--- a/outputs/chiron-report/Chiron-课程项目汇报.pptx
+++ b/outputs/chiron-report/Chiron-课程项目汇报.pptx
@@ -16,7 +16,11 @@
     <p:sldId xmlns:r="http://schemas.openxmlformats.org/officeDocument/2006/relationships" id="261" r:id="R1f9e408eddfc48c8"/>
     <p:sldId xmlns:r="http://schemas.openxmlformats.org/officeDocument/2006/relationships" id="262" r:id="Rb091f789fe1f4078"/>
     <p:sldId xmlns:r="http://schemas.openxmlformats.org/officeDocument/2006/relationships" id="263" r:id="R1490ca348b0c468e"/>
-    <p:sldId xmlns:r="http://schemas.openxmlformats.org/officeDocument/2006/relationships" id="264" r:id="R4d4ee5f3b2e4470a"/>
+    <p:sldId xmlns:ns0="http://schemas.openxmlformats.org/officeDocument/2006/relationships" id="265" ns0:id="rId15"/>
+    <p:sldId xmlns:ns0="http://schemas.openxmlformats.org/officeDocument/2006/relationships" id="266" ns0:id="rId16"/>
+    <p:sldId xmlns:ns0="http://schemas.openxmlformats.org/officeDocument/2006/relationships" id="267" ns0:id="rId17"/>
+    <p:sldId xmlns:ns0="http://schemas.openxmlformats.org/officeDocument/2006/relationships" id="268" ns0:id="rId18"/>
+    <p:sldId xmlns:ns0="http://schemas.openxmlformats.org/officeDocument/2006/relationships" id="269" ns0:id="rId19"/>
   </p:sldIdLst>
   <p:sldSz cx="12192000" cy="6858000"/>
   <p:notesSz cx="6858000" cy="9144000"/>
@@ -2200,6 +2204,5628 @@
 </p:sld>
 </file>
 
+<file path=ppt/slides/slide10.xml><?xml version="1.0" encoding="utf-8"?>
+<p:sld xmlns:a="http://schemas.openxmlformats.org/drawingml/2006/main" xmlns:p="http://schemas.openxmlformats.org/presentationml/2006/main" xmlns:r="http://schemas.openxmlformats.org/officeDocument/2006/relationships">
+  <p:cSld>
+    <p:spTree>
+      <p:nvGrpSpPr>
+        <p:cNvPr id="1" name=""/>
+        <p:cNvGrpSpPr/>
+        <p:nvPr/>
+      </p:nvGrpSpPr>
+      <p:grpSpPr/>
+      <p:sp>
+        <p:nvSpPr>
+          <p:cNvPr id="2" name="TextBox 1"/>
+          <p:cNvSpPr txBox="1"/>
+          <p:nvPr/>
+        </p:nvSpPr>
+        <p:spPr>
+          <a:xfrm>
+            <a:off x="571500" y="380000"/>
+            <a:ext cx="11049000" cy="420000"/>
+          </a:xfrm>
+          <a:prstGeom prst="rect">
+            <a:avLst/>
+          </a:prstGeom>
+          <a:noFill/>
+        </p:spPr>
+        <p:txBody>
+          <a:bodyPr wrap="square">
+            <a:spAutoFit/>
+          </a:bodyPr>
+          <a:lstStyle/>
+          <a:p>
+            <a:pPr>
+              <a:defRPr sz="2600" b="1">
+                <a:solidFill>
+                  <a:srgbClr val="000000"/>
+                </a:solidFill>
+              </a:defRPr>
+            </a:pPr>
+            <a:r>
+              <a:t>Sepolia 测试网验证</a:t>
+            </a:r>
+          </a:p>
+        </p:txBody>
+      </p:sp>
+      <p:sp>
+        <p:nvSpPr>
+          <p:cNvPr id="3" name="TextBox 2"/>
+          <p:cNvSpPr txBox="1"/>
+          <p:nvPr/>
+        </p:nvSpPr>
+        <p:spPr>
+          <a:xfrm>
+            <a:off x="571500" y="780000"/>
+            <a:ext cx="11049000" cy="250000"/>
+          </a:xfrm>
+          <a:prstGeom prst="rect">
+            <a:avLst/>
+          </a:prstGeom>
+          <a:noFill/>
+        </p:spPr>
+        <p:txBody>
+          <a:bodyPr wrap="square">
+            <a:spAutoFit/>
+          </a:bodyPr>
+          <a:lstStyle/>
+          <a:p>
+            <a:pPr>
+              <a:defRPr sz="1200" b="0">
+                <a:solidFill>
+                  <a:srgbClr val="656D76"/>
+                </a:solidFill>
+              </a:defRPr>
+            </a:pPr>
+            <a:r>
+              <a:t>测试链 Sepolia (11155111) · 完整部署与验证 · 18/18 测试通过</a:t>
+            </a:r>
+          </a:p>
+        </p:txBody>
+      </p:sp>
+      <p:sp>
+        <p:nvSpPr>
+          <p:cNvPr id="4" name="Rectangle 3"/>
+          <p:cNvSpPr/>
+          <p:nvPr/>
+        </p:nvSpPr>
+        <p:spPr>
+          <a:xfrm>
+            <a:off x="571500" y="1150000"/>
+            <a:ext cx="5400000" cy="450000"/>
+          </a:xfrm>
+          <a:prstGeom prst="rect">
+            <a:avLst/>
+          </a:prstGeom>
+          <a:solidFill>
+            <a:srgbClr val="FFFFFF"/>
+          </a:solidFill>
+          <a:ln w="6350">
+            <a:solidFill>
+              <a:srgbClr val="E1E4E8"/>
+            </a:solidFill>
+          </a:ln>
+        </p:spPr>
+        <p:style>
+          <a:lnRef idx="1">
+            <a:schemeClr val="accent1"/>
+          </a:lnRef>
+          <a:fillRef idx="3">
+            <a:schemeClr val="accent1"/>
+          </a:fillRef>
+          <a:effectRef idx="2">
+            <a:schemeClr val="accent1"/>
+          </a:effectRef>
+          <a:fontRef idx="minor">
+            <a:schemeClr val="lt1"/>
+          </a:fontRef>
+        </p:style>
+        <p:txBody>
+          <a:bodyPr rtlCol="0" anchor="ctr"/>
+          <a:lstStyle/>
+          <a:p>
+            <a:pPr algn="ctr"/>
+          </a:p>
+        </p:txBody>
+      </p:sp>
+      <p:sp>
+        <p:nvSpPr>
+          <p:cNvPr id="5" name="TextBox 4"/>
+          <p:cNvSpPr txBox="1"/>
+          <p:nvPr/>
+        </p:nvSpPr>
+        <p:spPr>
+          <a:xfrm>
+            <a:off x="671500" y="1210000"/>
+            <a:ext cx="5200000" cy="180000"/>
+          </a:xfrm>
+          <a:prstGeom prst="rect">
+            <a:avLst/>
+          </a:prstGeom>
+          <a:noFill/>
+        </p:spPr>
+        <p:txBody>
+          <a:bodyPr wrap="square">
+            <a:spAutoFit/>
+          </a:bodyPr>
+          <a:lstStyle/>
+          <a:p>
+            <a:pPr>
+              <a:defRPr sz="1200" b="1">
+                <a:solidFill>
+                  <a:srgbClr val="656D76"/>
+                </a:solidFill>
+              </a:defRPr>
+            </a:pPr>
+            <a:r>
+              <a:t>▸ Chiron</a:t>
+            </a:r>
+          </a:p>
+        </p:txBody>
+      </p:sp>
+      <p:sp>
+        <p:nvSpPr>
+          <p:cNvPr id="6" name="TextBox 5"/>
+          <p:cNvSpPr txBox="1"/>
+          <p:nvPr/>
+        </p:nvSpPr>
+        <p:spPr>
+          <a:xfrm>
+            <a:off x="671500" y="1390000"/>
+            <a:ext cx="5200000" cy="180000"/>
+          </a:xfrm>
+          <a:prstGeom prst="rect">
+            <a:avLst/>
+          </a:prstGeom>
+          <a:noFill/>
+        </p:spPr>
+        <p:txBody>
+          <a:bodyPr wrap="square">
+            <a:spAutoFit/>
+          </a:bodyPr>
+          <a:lstStyle/>
+          <a:p>
+            <a:pPr>
+              <a:defRPr sz="900" b="0">
+                <a:solidFill>
+                  <a:srgbClr val="656D76"/>
+                </a:solidFill>
+              </a:defRPr>
+            </a:pPr>
+            <a:r>
+              <a:t>  0xD21BCB2868e44e7644B52E21838Eb7c1431EA838</a:t>
+            </a:r>
+          </a:p>
+        </p:txBody>
+      </p:sp>
+      <p:sp>
+        <p:nvSpPr>
+          <p:cNvPr id="7" name="Rectangle 6"/>
+          <p:cNvSpPr/>
+          <p:nvPr/>
+        </p:nvSpPr>
+        <p:spPr>
+          <a:xfrm>
+            <a:off x="6171500" y="1150000"/>
+            <a:ext cx="5400000" cy="450000"/>
+          </a:xfrm>
+          <a:prstGeom prst="rect">
+            <a:avLst/>
+          </a:prstGeom>
+          <a:solidFill>
+            <a:srgbClr val="FFFFFF"/>
+          </a:solidFill>
+          <a:ln w="6350">
+            <a:solidFill>
+              <a:srgbClr val="E1E4E8"/>
+            </a:solidFill>
+          </a:ln>
+        </p:spPr>
+        <p:style>
+          <a:lnRef idx="1">
+            <a:schemeClr val="accent1"/>
+          </a:lnRef>
+          <a:fillRef idx="3">
+            <a:schemeClr val="accent1"/>
+          </a:fillRef>
+          <a:effectRef idx="2">
+            <a:schemeClr val="accent1"/>
+          </a:effectRef>
+          <a:fontRef idx="minor">
+            <a:schemeClr val="lt1"/>
+          </a:fontRef>
+        </p:style>
+        <p:txBody>
+          <a:bodyPr rtlCol="0" anchor="ctr"/>
+          <a:lstStyle/>
+          <a:p>
+            <a:pPr algn="ctr"/>
+          </a:p>
+        </p:txBody>
+      </p:sp>
+      <p:sp>
+        <p:nvSpPr>
+          <p:cNvPr id="8" name="TextBox 7"/>
+          <p:cNvSpPr txBox="1"/>
+          <p:nvPr/>
+        </p:nvSpPr>
+        <p:spPr>
+          <a:xfrm>
+            <a:off x="6271500" y="1210000"/>
+            <a:ext cx="5200000" cy="180000"/>
+          </a:xfrm>
+          <a:prstGeom prst="rect">
+            <a:avLst/>
+          </a:prstGeom>
+          <a:noFill/>
+        </p:spPr>
+        <p:txBody>
+          <a:bodyPr wrap="square">
+            <a:spAutoFit/>
+          </a:bodyPr>
+          <a:lstStyle/>
+          <a:p>
+            <a:pPr>
+              <a:defRPr sz="1200" b="1">
+                <a:solidFill>
+                  <a:srgbClr val="656D76"/>
+                </a:solidFill>
+              </a:defRPr>
+            </a:pPr>
+            <a:r>
+              <a:t>▸ BondPool</a:t>
+            </a:r>
+          </a:p>
+        </p:txBody>
+      </p:sp>
+      <p:sp>
+        <p:nvSpPr>
+          <p:cNvPr id="9" name="TextBox 8"/>
+          <p:cNvSpPr txBox="1"/>
+          <p:nvPr/>
+        </p:nvSpPr>
+        <p:spPr>
+          <a:xfrm>
+            <a:off x="6271500" y="1390000"/>
+            <a:ext cx="5200000" cy="180000"/>
+          </a:xfrm>
+          <a:prstGeom prst="rect">
+            <a:avLst/>
+          </a:prstGeom>
+          <a:noFill/>
+        </p:spPr>
+        <p:txBody>
+          <a:bodyPr wrap="square">
+            <a:spAutoFit/>
+          </a:bodyPr>
+          <a:lstStyle/>
+          <a:p>
+            <a:pPr>
+              <a:defRPr sz="900" b="0">
+                <a:solidFill>
+                  <a:srgbClr val="656D76"/>
+                </a:solidFill>
+              </a:defRPr>
+            </a:pPr>
+            <a:r>
+              <a:t>  0xCBa1A0B9523abAB64e33cCbCc3dca06485B9a1D3</a:t>
+            </a:r>
+          </a:p>
+        </p:txBody>
+      </p:sp>
+      <p:sp>
+        <p:nvSpPr>
+          <p:cNvPr id="10" name="Rectangle 9"/>
+          <p:cNvSpPr/>
+          <p:nvPr/>
+        </p:nvSpPr>
+        <p:spPr>
+          <a:xfrm>
+            <a:off x="571500" y="1650000"/>
+            <a:ext cx="5400000" cy="450000"/>
+          </a:xfrm>
+          <a:prstGeom prst="rect">
+            <a:avLst/>
+          </a:prstGeom>
+          <a:solidFill>
+            <a:srgbClr val="FFFFFF"/>
+          </a:solidFill>
+          <a:ln w="6350">
+            <a:solidFill>
+              <a:srgbClr val="E1E4E8"/>
+            </a:solidFill>
+          </a:ln>
+        </p:spPr>
+        <p:style>
+          <a:lnRef idx="1">
+            <a:schemeClr val="accent1"/>
+          </a:lnRef>
+          <a:fillRef idx="3">
+            <a:schemeClr val="accent1"/>
+          </a:fillRef>
+          <a:effectRef idx="2">
+            <a:schemeClr val="accent1"/>
+          </a:effectRef>
+          <a:fontRef idx="minor">
+            <a:schemeClr val="lt1"/>
+          </a:fontRef>
+        </p:style>
+        <p:txBody>
+          <a:bodyPr rtlCol="0" anchor="ctr"/>
+          <a:lstStyle/>
+          <a:p>
+            <a:pPr algn="ctr"/>
+          </a:p>
+        </p:txBody>
+      </p:sp>
+      <p:sp>
+        <p:nvSpPr>
+          <p:cNvPr id="11" name="TextBox 10"/>
+          <p:cNvSpPr txBox="1"/>
+          <p:nvPr/>
+        </p:nvSpPr>
+        <p:spPr>
+          <a:xfrm>
+            <a:off x="671500" y="1710000"/>
+            <a:ext cx="5200000" cy="180000"/>
+          </a:xfrm>
+          <a:prstGeom prst="rect">
+            <a:avLst/>
+          </a:prstGeom>
+          <a:noFill/>
+        </p:spPr>
+        <p:txBody>
+          <a:bodyPr wrap="square">
+            <a:spAutoFit/>
+          </a:bodyPr>
+          <a:lstStyle/>
+          <a:p>
+            <a:pPr>
+              <a:defRPr sz="1200" b="1">
+                <a:solidFill>
+                  <a:srgbClr val="656D76"/>
+                </a:solidFill>
+              </a:defRPr>
+            </a:pPr>
+            <a:r>
+              <a:t>▸ CircuitBreaker</a:t>
+            </a:r>
+          </a:p>
+        </p:txBody>
+      </p:sp>
+      <p:sp>
+        <p:nvSpPr>
+          <p:cNvPr id="12" name="TextBox 11"/>
+          <p:cNvSpPr txBox="1"/>
+          <p:nvPr/>
+        </p:nvSpPr>
+        <p:spPr>
+          <a:xfrm>
+            <a:off x="671500" y="1890000"/>
+            <a:ext cx="5200000" cy="180000"/>
+          </a:xfrm>
+          <a:prstGeom prst="rect">
+            <a:avLst/>
+          </a:prstGeom>
+          <a:noFill/>
+        </p:spPr>
+        <p:txBody>
+          <a:bodyPr wrap="square">
+            <a:spAutoFit/>
+          </a:bodyPr>
+          <a:lstStyle/>
+          <a:p>
+            <a:pPr>
+              <a:defRPr sz="900" b="0">
+                <a:solidFill>
+                  <a:srgbClr val="656D76"/>
+                </a:solidFill>
+              </a:defRPr>
+            </a:pPr>
+            <a:r>
+              <a:t>  0x9a7B65fcEF9b799F043BF2cb7587f1fF300E3530</a:t>
+            </a:r>
+          </a:p>
+        </p:txBody>
+      </p:sp>
+      <p:sp>
+        <p:nvSpPr>
+          <p:cNvPr id="13" name="Rectangle 12"/>
+          <p:cNvSpPr/>
+          <p:nvPr/>
+        </p:nvSpPr>
+        <p:spPr>
+          <a:xfrm>
+            <a:off x="6171500" y="1650000"/>
+            <a:ext cx="5400000" cy="450000"/>
+          </a:xfrm>
+          <a:prstGeom prst="rect">
+            <a:avLst/>
+          </a:prstGeom>
+          <a:solidFill>
+            <a:srgbClr val="FFFFFF"/>
+          </a:solidFill>
+          <a:ln w="6350">
+            <a:solidFill>
+              <a:srgbClr val="E1E4E8"/>
+            </a:solidFill>
+          </a:ln>
+        </p:spPr>
+        <p:style>
+          <a:lnRef idx="1">
+            <a:schemeClr val="accent1"/>
+          </a:lnRef>
+          <a:fillRef idx="3">
+            <a:schemeClr val="accent1"/>
+          </a:fillRef>
+          <a:effectRef idx="2">
+            <a:schemeClr val="accent1"/>
+          </a:effectRef>
+          <a:fontRef idx="minor">
+            <a:schemeClr val="lt1"/>
+          </a:fontRef>
+        </p:style>
+        <p:txBody>
+          <a:bodyPr rtlCol="0" anchor="ctr"/>
+          <a:lstStyle/>
+          <a:p>
+            <a:pPr algn="ctr"/>
+          </a:p>
+        </p:txBody>
+      </p:sp>
+      <p:sp>
+        <p:nvSpPr>
+          <p:cNvPr id="14" name="TextBox 13"/>
+          <p:cNvSpPr txBox="1"/>
+          <p:nvPr/>
+        </p:nvSpPr>
+        <p:spPr>
+          <a:xfrm>
+            <a:off x="6271500" y="1710000"/>
+            <a:ext cx="5200000" cy="180000"/>
+          </a:xfrm>
+          <a:prstGeom prst="rect">
+            <a:avLst/>
+          </a:prstGeom>
+          <a:noFill/>
+        </p:spPr>
+        <p:txBody>
+          <a:bodyPr wrap="square">
+            <a:spAutoFit/>
+          </a:bodyPr>
+          <a:lstStyle/>
+          <a:p>
+            <a:pPr>
+              <a:defRPr sz="1200" b="1">
+                <a:solidFill>
+                  <a:srgbClr val="656D76"/>
+                </a:solidFill>
+              </a:defRPr>
+            </a:pPr>
+            <a:r>
+              <a:t>▸ ITR</a:t>
+            </a:r>
+          </a:p>
+        </p:txBody>
+      </p:sp>
+      <p:sp>
+        <p:nvSpPr>
+          <p:cNvPr id="15" name="TextBox 14"/>
+          <p:cNvSpPr txBox="1"/>
+          <p:nvPr/>
+        </p:nvSpPr>
+        <p:spPr>
+          <a:xfrm>
+            <a:off x="6271500" y="1890000"/>
+            <a:ext cx="5200000" cy="180000"/>
+          </a:xfrm>
+          <a:prstGeom prst="rect">
+            <a:avLst/>
+          </a:prstGeom>
+          <a:noFill/>
+        </p:spPr>
+        <p:txBody>
+          <a:bodyPr wrap="square">
+            <a:spAutoFit/>
+          </a:bodyPr>
+          <a:lstStyle/>
+          <a:p>
+            <a:pPr>
+              <a:defRPr sz="900" b="0">
+                <a:solidFill>
+                  <a:srgbClr val="656D76"/>
+                </a:solidFill>
+              </a:defRPr>
+            </a:pPr>
+            <a:r>
+              <a:t>  0x9967098e8BdECcddbA664F6e12D5365b5eb28627</a:t>
+            </a:r>
+          </a:p>
+        </p:txBody>
+      </p:sp>
+      <p:sp>
+        <p:nvSpPr>
+          <p:cNvPr id="16" name="TextBox 15"/>
+          <p:cNvSpPr txBox="1"/>
+          <p:nvPr/>
+        </p:nvSpPr>
+        <p:spPr>
+          <a:xfrm>
+            <a:off x="571500" y="2250000"/>
+            <a:ext cx="11049000" cy="280000"/>
+          </a:xfrm>
+          <a:prstGeom prst="rect">
+            <a:avLst/>
+          </a:prstGeom>
+          <a:noFill/>
+        </p:spPr>
+        <p:txBody>
+          <a:bodyPr wrap="square">
+            <a:spAutoFit/>
+          </a:bodyPr>
+          <a:lstStyle/>
+          <a:p>
+            <a:pPr>
+              <a:defRPr sz="1800" b="1">
+                <a:solidFill>
+                  <a:srgbClr val="000000"/>
+                </a:solidFill>
+              </a:defRPr>
+            </a:pPr>
+            <a:r>
+              <a:t>测试结果</a:t>
+            </a:r>
+          </a:p>
+        </p:txBody>
+      </p:sp>
+      <p:sp>
+        <p:nvSpPr>
+          <p:cNvPr id="17" name="Rectangle 16"/>
+          <p:cNvSpPr/>
+          <p:nvPr/>
+        </p:nvSpPr>
+        <p:spPr>
+          <a:xfrm>
+            <a:off x="571500" y="2650000"/>
+            <a:ext cx="11049000" cy="300000"/>
+          </a:xfrm>
+          <a:prstGeom prst="rect">
+            <a:avLst/>
+          </a:prstGeom>
+          <a:solidFill>
+            <a:srgbClr val="FFFFFF"/>
+          </a:solidFill>
+          <a:ln w="6350">
+            <a:solidFill>
+              <a:srgbClr val="E1E4E8"/>
+            </a:solidFill>
+          </a:ln>
+        </p:spPr>
+        <p:style>
+          <a:lnRef idx="1">
+            <a:schemeClr val="accent1"/>
+          </a:lnRef>
+          <a:fillRef idx="3">
+            <a:schemeClr val="accent1"/>
+          </a:fillRef>
+          <a:effectRef idx="2">
+            <a:schemeClr val="accent1"/>
+          </a:effectRef>
+          <a:fontRef idx="minor">
+            <a:schemeClr val="lt1"/>
+          </a:fontRef>
+        </p:style>
+        <p:txBody>
+          <a:bodyPr rtlCol="0" anchor="ctr"/>
+          <a:lstStyle/>
+          <a:p>
+            <a:pPr algn="ctr"/>
+          </a:p>
+        </p:txBody>
+      </p:sp>
+      <p:sp>
+        <p:nvSpPr>
+          <p:cNvPr id="18" name="TextBox 17"/>
+          <p:cNvSpPr txBox="1"/>
+          <p:nvPr/>
+        </p:nvSpPr>
+        <p:spPr>
+          <a:xfrm>
+            <a:off x="691500" y="2700000"/>
+            <a:ext cx="500000" cy="200000"/>
+          </a:xfrm>
+          <a:prstGeom prst="rect">
+            <a:avLst/>
+          </a:prstGeom>
+          <a:noFill/>
+        </p:spPr>
+        <p:txBody>
+          <a:bodyPr wrap="square">
+            <a:spAutoFit/>
+          </a:bodyPr>
+          <a:lstStyle/>
+          <a:p>
+            <a:pPr>
+              <a:defRPr sz="1400" b="1">
+                <a:solidFill>
+                  <a:srgbClr val="1A7F37"/>
+                </a:solidFill>
+              </a:defRPr>
+            </a:pPr>
+            <a:r>
+              <a:t>✓</a:t>
+            </a:r>
+          </a:p>
+        </p:txBody>
+      </p:sp>
+      <p:sp>
+        <p:nvSpPr>
+          <p:cNvPr id="19" name="TextBox 18"/>
+          <p:cNvSpPr txBox="1"/>
+          <p:nvPr/>
+        </p:nvSpPr>
+        <p:spPr>
+          <a:xfrm>
+            <a:off x="1221500" y="2700000"/>
+            <a:ext cx="2800000" cy="200000"/>
+          </a:xfrm>
+          <a:prstGeom prst="rect">
+            <a:avLst/>
+          </a:prstGeom>
+          <a:noFill/>
+        </p:spPr>
+        <p:txBody>
+          <a:bodyPr wrap="square">
+            <a:spAutoFit/>
+          </a:bodyPr>
+          <a:lstStyle/>
+          <a:p>
+            <a:pPr>
+              <a:defRPr sz="1100" b="1">
+                <a:solidFill>
+                  <a:srgbClr val="1F2328"/>
+                </a:solidFill>
+              </a:defRPr>
+            </a:pPr>
+            <a:r>
+              <a:t>Chiron 存证</a:t>
+            </a:r>
+          </a:p>
+        </p:txBody>
+      </p:sp>
+      <p:sp>
+        <p:nvSpPr>
+          <p:cNvPr id="20" name="TextBox 19"/>
+          <p:cNvSpPr txBox="1"/>
+          <p:nvPr/>
+        </p:nvSpPr>
+        <p:spPr>
+          <a:xfrm>
+            <a:off x="4071500" y="2700000"/>
+            <a:ext cx="7000000" cy="200000"/>
+          </a:xfrm>
+          <a:prstGeom prst="rect">
+            <a:avLst/>
+          </a:prstGeom>
+          <a:noFill/>
+        </p:spPr>
+        <p:txBody>
+          <a:bodyPr wrap="square">
+            <a:spAutoFit/>
+          </a:bodyPr>
+          <a:lstStyle/>
+          <a:p>
+            <a:pPr>
+              <a:defRPr sz="1000" b="0">
+                <a:solidFill>
+                  <a:srgbClr val="656D76"/>
+                </a:solidFill>
+              </a:defRPr>
+            </a:pPr>
+            <a:r>
+              <a:t>storeReceipt → getReceipt → getAgentReceipts</a:t>
+            </a:r>
+          </a:p>
+        </p:txBody>
+      </p:sp>
+      <p:sp>
+        <p:nvSpPr>
+          <p:cNvPr id="21" name="Rectangle 20"/>
+          <p:cNvSpPr/>
+          <p:nvPr/>
+        </p:nvSpPr>
+        <p:spPr>
+          <a:xfrm>
+            <a:off x="571500" y="2990000"/>
+            <a:ext cx="11049000" cy="300000"/>
+          </a:xfrm>
+          <a:prstGeom prst="rect">
+            <a:avLst/>
+          </a:prstGeom>
+          <a:solidFill>
+            <a:srgbClr val="F6F8FA"/>
+          </a:solidFill>
+          <a:ln w="6350">
+            <a:solidFill>
+              <a:srgbClr val="E1E4E8"/>
+            </a:solidFill>
+          </a:ln>
+        </p:spPr>
+        <p:style>
+          <a:lnRef idx="1">
+            <a:schemeClr val="accent1"/>
+          </a:lnRef>
+          <a:fillRef idx="3">
+            <a:schemeClr val="accent1"/>
+          </a:fillRef>
+          <a:effectRef idx="2">
+            <a:schemeClr val="accent1"/>
+          </a:effectRef>
+          <a:fontRef idx="minor">
+            <a:schemeClr val="lt1"/>
+          </a:fontRef>
+        </p:style>
+        <p:txBody>
+          <a:bodyPr rtlCol="0" anchor="ctr"/>
+          <a:lstStyle/>
+          <a:p>
+            <a:pPr algn="ctr"/>
+          </a:p>
+        </p:txBody>
+      </p:sp>
+      <p:sp>
+        <p:nvSpPr>
+          <p:cNvPr id="22" name="TextBox 21"/>
+          <p:cNvSpPr txBox="1"/>
+          <p:nvPr/>
+        </p:nvSpPr>
+        <p:spPr>
+          <a:xfrm>
+            <a:off x="691500" y="3040000"/>
+            <a:ext cx="500000" cy="200000"/>
+          </a:xfrm>
+          <a:prstGeom prst="rect">
+            <a:avLst/>
+          </a:prstGeom>
+          <a:noFill/>
+        </p:spPr>
+        <p:txBody>
+          <a:bodyPr wrap="square">
+            <a:spAutoFit/>
+          </a:bodyPr>
+          <a:lstStyle/>
+          <a:p>
+            <a:pPr>
+              <a:defRPr sz="1400" b="1">
+                <a:solidFill>
+                  <a:srgbClr val="1A7F37"/>
+                </a:solidFill>
+              </a:defRPr>
+            </a:pPr>
+            <a:r>
+              <a:t>✓</a:t>
+            </a:r>
+          </a:p>
+        </p:txBody>
+      </p:sp>
+      <p:sp>
+        <p:nvSpPr>
+          <p:cNvPr id="23" name="TextBox 22"/>
+          <p:cNvSpPr txBox="1"/>
+          <p:nvPr/>
+        </p:nvSpPr>
+        <p:spPr>
+          <a:xfrm>
+            <a:off x="1221500" y="3040000"/>
+            <a:ext cx="2800000" cy="200000"/>
+          </a:xfrm>
+          <a:prstGeom prst="rect">
+            <a:avLst/>
+          </a:prstGeom>
+          <a:noFill/>
+        </p:spPr>
+        <p:txBody>
+          <a:bodyPr wrap="square">
+            <a:spAutoFit/>
+          </a:bodyPr>
+          <a:lstStyle/>
+          <a:p>
+            <a:pPr>
+              <a:defRPr sz="1100" b="1">
+                <a:solidFill>
+                  <a:srgbClr val="1F2328"/>
+                </a:solidFill>
+              </a:defRPr>
+            </a:pPr>
+            <a:r>
+              <a:t>CircuitBreaker</a:t>
+            </a:r>
+          </a:p>
+        </p:txBody>
+      </p:sp>
+      <p:sp>
+        <p:nvSpPr>
+          <p:cNvPr id="24" name="TextBox 23"/>
+          <p:cNvSpPr txBox="1"/>
+          <p:nvPr/>
+        </p:nvSpPr>
+        <p:spPr>
+          <a:xfrm>
+            <a:off x="4071500" y="3040000"/>
+            <a:ext cx="7000000" cy="200000"/>
+          </a:xfrm>
+          <a:prstGeom prst="rect">
+            <a:avLst/>
+          </a:prstGeom>
+          <a:noFill/>
+        </p:spPr>
+        <p:txBody>
+          <a:bodyPr wrap="square">
+            <a:spAutoFit/>
+          </a:bodyPr>
+          <a:lstStyle/>
+          <a:p>
+            <a:pPr>
+              <a:defRPr sz="1000" b="0">
+                <a:solidFill>
+                  <a:srgbClr val="656D76"/>
+                </a:solidFill>
+              </a:defRPr>
+            </a:pPr>
+            <a:r>
+              <a:t>5 FAIL → isPaused · resume → 恢复</a:t>
+            </a:r>
+          </a:p>
+        </p:txBody>
+      </p:sp>
+      <p:sp>
+        <p:nvSpPr>
+          <p:cNvPr id="25" name="Rectangle 24"/>
+          <p:cNvSpPr/>
+          <p:nvPr/>
+        </p:nvSpPr>
+        <p:spPr>
+          <a:xfrm>
+            <a:off x="571500" y="3330000"/>
+            <a:ext cx="11049000" cy="300000"/>
+          </a:xfrm>
+          <a:prstGeom prst="rect">
+            <a:avLst/>
+          </a:prstGeom>
+          <a:solidFill>
+            <a:srgbClr val="FFFFFF"/>
+          </a:solidFill>
+          <a:ln w="6350">
+            <a:solidFill>
+              <a:srgbClr val="E1E4E8"/>
+            </a:solidFill>
+          </a:ln>
+        </p:spPr>
+        <p:style>
+          <a:lnRef idx="1">
+            <a:schemeClr val="accent1"/>
+          </a:lnRef>
+          <a:fillRef idx="3">
+            <a:schemeClr val="accent1"/>
+          </a:fillRef>
+          <a:effectRef idx="2">
+            <a:schemeClr val="accent1"/>
+          </a:effectRef>
+          <a:fontRef idx="minor">
+            <a:schemeClr val="lt1"/>
+          </a:fontRef>
+        </p:style>
+        <p:txBody>
+          <a:bodyPr rtlCol="0" anchor="ctr"/>
+          <a:lstStyle/>
+          <a:p>
+            <a:pPr algn="ctr"/>
+          </a:p>
+        </p:txBody>
+      </p:sp>
+      <p:sp>
+        <p:nvSpPr>
+          <p:cNvPr id="26" name="TextBox 25"/>
+          <p:cNvSpPr txBox="1"/>
+          <p:nvPr/>
+        </p:nvSpPr>
+        <p:spPr>
+          <a:xfrm>
+            <a:off x="691500" y="3380000"/>
+            <a:ext cx="500000" cy="200000"/>
+          </a:xfrm>
+          <a:prstGeom prst="rect">
+            <a:avLst/>
+          </a:prstGeom>
+          <a:noFill/>
+        </p:spPr>
+        <p:txBody>
+          <a:bodyPr wrap="square">
+            <a:spAutoFit/>
+          </a:bodyPr>
+          <a:lstStyle/>
+          <a:p>
+            <a:pPr>
+              <a:defRPr sz="1400" b="1">
+                <a:solidFill>
+                  <a:srgbClr val="1A7F37"/>
+                </a:solidFill>
+              </a:defRPr>
+            </a:pPr>
+            <a:r>
+              <a:t>✓</a:t>
+            </a:r>
+          </a:p>
+        </p:txBody>
+      </p:sp>
+      <p:sp>
+        <p:nvSpPr>
+          <p:cNvPr id="27" name="TextBox 26"/>
+          <p:cNvSpPr txBox="1"/>
+          <p:nvPr/>
+        </p:nvSpPr>
+        <p:spPr>
+          <a:xfrm>
+            <a:off x="1221500" y="3380000"/>
+            <a:ext cx="2800000" cy="200000"/>
+          </a:xfrm>
+          <a:prstGeom prst="rect">
+            <a:avLst/>
+          </a:prstGeom>
+          <a:noFill/>
+        </p:spPr>
+        <p:txBody>
+          <a:bodyPr wrap="square">
+            <a:spAutoFit/>
+          </a:bodyPr>
+          <a:lstStyle/>
+          <a:p>
+            <a:pPr>
+              <a:defRPr sz="1100" b="1">
+                <a:solidFill>
+                  <a:srgbClr val="1F2328"/>
+                </a:solidFill>
+              </a:defRPr>
+            </a:pPr>
+            <a:r>
+              <a:t>BondPool</a:t>
+            </a:r>
+          </a:p>
+        </p:txBody>
+      </p:sp>
+      <p:sp>
+        <p:nvSpPr>
+          <p:cNvPr id="28" name="TextBox 27"/>
+          <p:cNvSpPr txBox="1"/>
+          <p:nvPr/>
+        </p:nvSpPr>
+        <p:spPr>
+          <a:xfrm>
+            <a:off x="4071500" y="3380000"/>
+            <a:ext cx="7000000" cy="200000"/>
+          </a:xfrm>
+          <a:prstGeom prst="rect">
+            <a:avLst/>
+          </a:prstGeom>
+          <a:noFill/>
+        </p:spPr>
+        <p:txBody>
+          <a:bodyPr wrap="square">
+            <a:spAutoFit/>
+          </a:bodyPr>
+          <a:lstStyle/>
+          <a:p>
+            <a:pPr>
+              <a:defRPr sz="1000" b="0">
+                <a:solidFill>
+                  <a:srgbClr val="656D76"/>
+                </a:solidFill>
+              </a:defRPr>
+            </a:pPr>
+            <a:r>
+              <a:t>deposit · withdraw · getTxLimit</a:t>
+            </a:r>
+          </a:p>
+        </p:txBody>
+      </p:sp>
+      <p:sp>
+        <p:nvSpPr>
+          <p:cNvPr id="29" name="Rectangle 28"/>
+          <p:cNvSpPr/>
+          <p:nvPr/>
+        </p:nvSpPr>
+        <p:spPr>
+          <a:xfrm>
+            <a:off x="571500" y="3670000"/>
+            <a:ext cx="11049000" cy="300000"/>
+          </a:xfrm>
+          <a:prstGeom prst="rect">
+            <a:avLst/>
+          </a:prstGeom>
+          <a:solidFill>
+            <a:srgbClr val="F6F8FA"/>
+          </a:solidFill>
+          <a:ln w="6350">
+            <a:solidFill>
+              <a:srgbClr val="E1E4E8"/>
+            </a:solidFill>
+          </a:ln>
+        </p:spPr>
+        <p:style>
+          <a:lnRef idx="1">
+            <a:schemeClr val="accent1"/>
+          </a:lnRef>
+          <a:fillRef idx="3">
+            <a:schemeClr val="accent1"/>
+          </a:fillRef>
+          <a:effectRef idx="2">
+            <a:schemeClr val="accent1"/>
+          </a:effectRef>
+          <a:fontRef idx="minor">
+            <a:schemeClr val="lt1"/>
+          </a:fontRef>
+        </p:style>
+        <p:txBody>
+          <a:bodyPr rtlCol="0" anchor="ctr"/>
+          <a:lstStyle/>
+          <a:p>
+            <a:pPr algn="ctr"/>
+          </a:p>
+        </p:txBody>
+      </p:sp>
+      <p:sp>
+        <p:nvSpPr>
+          <p:cNvPr id="30" name="TextBox 29"/>
+          <p:cNvSpPr txBox="1"/>
+          <p:nvPr/>
+        </p:nvSpPr>
+        <p:spPr>
+          <a:xfrm>
+            <a:off x="691500" y="3720000"/>
+            <a:ext cx="500000" cy="200000"/>
+          </a:xfrm>
+          <a:prstGeom prst="rect">
+            <a:avLst/>
+          </a:prstGeom>
+          <a:noFill/>
+        </p:spPr>
+        <p:txBody>
+          <a:bodyPr wrap="square">
+            <a:spAutoFit/>
+          </a:bodyPr>
+          <a:lstStyle/>
+          <a:p>
+            <a:pPr>
+              <a:defRPr sz="1400" b="1">
+                <a:solidFill>
+                  <a:srgbClr val="1A7F37"/>
+                </a:solidFill>
+              </a:defRPr>
+            </a:pPr>
+            <a:r>
+              <a:t>✓</a:t>
+            </a:r>
+          </a:p>
+        </p:txBody>
+      </p:sp>
+      <p:sp>
+        <p:nvSpPr>
+          <p:cNvPr id="31" name="TextBox 30"/>
+          <p:cNvSpPr txBox="1"/>
+          <p:nvPr/>
+        </p:nvSpPr>
+        <p:spPr>
+          <a:xfrm>
+            <a:off x="1221500" y="3720000"/>
+            <a:ext cx="2800000" cy="200000"/>
+          </a:xfrm>
+          <a:prstGeom prst="rect">
+            <a:avLst/>
+          </a:prstGeom>
+          <a:noFill/>
+        </p:spPr>
+        <p:txBody>
+          <a:bodyPr wrap="square">
+            <a:spAutoFit/>
+          </a:bodyPr>
+          <a:lstStyle/>
+          <a:p>
+            <a:pPr>
+              <a:defRPr sz="1100" b="1">
+                <a:solidFill>
+                  <a:srgbClr val="1F2328"/>
+                </a:solidFill>
+              </a:defRPr>
+            </a:pPr>
+            <a:r>
+              <a:t>ITR</a:t>
+            </a:r>
+          </a:p>
+        </p:txBody>
+      </p:sp>
+      <p:sp>
+        <p:nvSpPr>
+          <p:cNvPr id="32" name="TextBox 31"/>
+          <p:cNvSpPr txBox="1"/>
+          <p:nvPr/>
+        </p:nvSpPr>
+        <p:spPr>
+          <a:xfrm>
+            <a:off x="4071500" y="3720000"/>
+            <a:ext cx="7000000" cy="200000"/>
+          </a:xfrm>
+          <a:prstGeom prst="rect">
+            <a:avLst/>
+          </a:prstGeom>
+          <a:noFill/>
+        </p:spPr>
+        <p:txBody>
+          <a:bodyPr wrap="square">
+            <a:spAutoFit/>
+          </a:bodyPr>
+          <a:lstStyle/>
+          <a:p>
+            <a:pPr>
+              <a:defRPr sz="1000" b="0">
+                <a:solidFill>
+                  <a:srgbClr val="656D76"/>
+                </a:solidFill>
+              </a:defRPr>
+            </a:pPr>
+            <a:r>
+              <a:t>register · getActionType · deactivate</a:t>
+            </a:r>
+          </a:p>
+        </p:txBody>
+      </p:sp>
+      <p:sp>
+        <p:nvSpPr>
+          <p:cNvPr id="33" name="Rectangle 32"/>
+          <p:cNvSpPr/>
+          <p:nvPr/>
+        </p:nvSpPr>
+        <p:spPr>
+          <a:xfrm>
+            <a:off x="571500" y="4010000"/>
+            <a:ext cx="11049000" cy="300000"/>
+          </a:xfrm>
+          <a:prstGeom prst="rect">
+            <a:avLst/>
+          </a:prstGeom>
+          <a:solidFill>
+            <a:srgbClr val="FFFFFF"/>
+          </a:solidFill>
+          <a:ln w="6350">
+            <a:solidFill>
+              <a:srgbClr val="E1E4E8"/>
+            </a:solidFill>
+          </a:ln>
+        </p:spPr>
+        <p:style>
+          <a:lnRef idx="1">
+            <a:schemeClr val="accent1"/>
+          </a:lnRef>
+          <a:fillRef idx="3">
+            <a:schemeClr val="accent1"/>
+          </a:fillRef>
+          <a:effectRef idx="2">
+            <a:schemeClr val="accent1"/>
+          </a:effectRef>
+          <a:fontRef idx="minor">
+            <a:schemeClr val="lt1"/>
+          </a:fontRef>
+        </p:style>
+        <p:txBody>
+          <a:bodyPr rtlCol="0" anchor="ctr"/>
+          <a:lstStyle/>
+          <a:p>
+            <a:pPr algn="ctr"/>
+          </a:p>
+        </p:txBody>
+      </p:sp>
+      <p:sp>
+        <p:nvSpPr>
+          <p:cNvPr id="34" name="TextBox 33"/>
+          <p:cNvSpPr txBox="1"/>
+          <p:nvPr/>
+        </p:nvSpPr>
+        <p:spPr>
+          <a:xfrm>
+            <a:off x="691500" y="4060000"/>
+            <a:ext cx="500000" cy="200000"/>
+          </a:xfrm>
+          <a:prstGeom prst="rect">
+            <a:avLst/>
+          </a:prstGeom>
+          <a:noFill/>
+        </p:spPr>
+        <p:txBody>
+          <a:bodyPr wrap="square">
+            <a:spAutoFit/>
+          </a:bodyPr>
+          <a:lstStyle/>
+          <a:p>
+            <a:pPr>
+              <a:defRPr sz="1400" b="1">
+                <a:solidFill>
+                  <a:srgbClr val="1A7F37"/>
+                </a:solidFill>
+              </a:defRPr>
+            </a:pPr>
+            <a:r>
+              <a:t>✓</a:t>
+            </a:r>
+          </a:p>
+        </p:txBody>
+      </p:sp>
+      <p:sp>
+        <p:nvSpPr>
+          <p:cNvPr id="35" name="TextBox 34"/>
+          <p:cNvSpPr txBox="1"/>
+          <p:nvPr/>
+        </p:nvSpPr>
+        <p:spPr>
+          <a:xfrm>
+            <a:off x="1221500" y="4060000"/>
+            <a:ext cx="2800000" cy="200000"/>
+          </a:xfrm>
+          <a:prstGeom prst="rect">
+            <a:avLst/>
+          </a:prstGeom>
+          <a:noFill/>
+        </p:spPr>
+        <p:txBody>
+          <a:bodyPr wrap="square">
+            <a:spAutoFit/>
+          </a:bodyPr>
+          <a:lstStyle/>
+          <a:p>
+            <a:pPr>
+              <a:defRPr sz="1100" b="1">
+                <a:solidFill>
+                  <a:srgbClr val="1F2328"/>
+                </a:solidFill>
+              </a:defRPr>
+            </a:pPr>
+            <a:r>
+              <a:t>跨合约集成</a:t>
+            </a:r>
+          </a:p>
+        </p:txBody>
+      </p:sp>
+      <p:sp>
+        <p:nvSpPr>
+          <p:cNvPr id="36" name="TextBox 35"/>
+          <p:cNvSpPr txBox="1"/>
+          <p:nvPr/>
+        </p:nvSpPr>
+        <p:spPr>
+          <a:xfrm>
+            <a:off x="4071500" y="4060000"/>
+            <a:ext cx="7000000" cy="200000"/>
+          </a:xfrm>
+          <a:prstGeom prst="rect">
+            <a:avLst/>
+          </a:prstGeom>
+          <a:noFill/>
+        </p:spPr>
+        <p:txBody>
+          <a:bodyPr wrap="square">
+            <a:spAutoFit/>
+          </a:bodyPr>
+          <a:lstStyle/>
+          <a:p>
+            <a:pPr>
+              <a:defRPr sz="1000" b="0">
+                <a:solidFill>
+                  <a:srgbClr val="656D76"/>
+                </a:solidFill>
+              </a:defRPr>
+            </a:pPr>
+            <a:r>
+              <a:t>Chiron FAIL 自动触发 CB 暂停</a:t>
+            </a:r>
+          </a:p>
+        </p:txBody>
+      </p:sp>
+      <p:sp>
+        <p:nvSpPr>
+          <p:cNvPr id="37" name="Rectangle 36"/>
+          <p:cNvSpPr/>
+          <p:nvPr/>
+        </p:nvSpPr>
+        <p:spPr>
+          <a:xfrm>
+            <a:off x="571500" y="4350000"/>
+            <a:ext cx="11049000" cy="300000"/>
+          </a:xfrm>
+          <a:prstGeom prst="rect">
+            <a:avLst/>
+          </a:prstGeom>
+          <a:solidFill>
+            <a:srgbClr val="F6F8FA"/>
+          </a:solidFill>
+          <a:ln w="6350">
+            <a:solidFill>
+              <a:srgbClr val="E1E4E8"/>
+            </a:solidFill>
+          </a:ln>
+        </p:spPr>
+        <p:style>
+          <a:lnRef idx="1">
+            <a:schemeClr val="accent1"/>
+          </a:lnRef>
+          <a:fillRef idx="3">
+            <a:schemeClr val="accent1"/>
+          </a:fillRef>
+          <a:effectRef idx="2">
+            <a:schemeClr val="accent1"/>
+          </a:effectRef>
+          <a:fontRef idx="minor">
+            <a:schemeClr val="lt1"/>
+          </a:fontRef>
+        </p:style>
+        <p:txBody>
+          <a:bodyPr rtlCol="0" anchor="ctr"/>
+          <a:lstStyle/>
+          <a:p>
+            <a:pPr algn="ctr"/>
+          </a:p>
+        </p:txBody>
+      </p:sp>
+      <p:sp>
+        <p:nvSpPr>
+          <p:cNvPr id="38" name="TextBox 37"/>
+          <p:cNvSpPr txBox="1"/>
+          <p:nvPr/>
+        </p:nvSpPr>
+        <p:spPr>
+          <a:xfrm>
+            <a:off x="691500" y="4400000"/>
+            <a:ext cx="500000" cy="200000"/>
+          </a:xfrm>
+          <a:prstGeom prst="rect">
+            <a:avLst/>
+          </a:prstGeom>
+          <a:noFill/>
+        </p:spPr>
+        <p:txBody>
+          <a:bodyPr wrap="square">
+            <a:spAutoFit/>
+          </a:bodyPr>
+          <a:lstStyle/>
+          <a:p>
+            <a:pPr>
+              <a:defRPr sz="1400" b="1">
+                <a:solidFill>
+                  <a:srgbClr val="1A7F37"/>
+                </a:solidFill>
+              </a:defRPr>
+            </a:pPr>
+            <a:r>
+              <a:t>✓</a:t>
+            </a:r>
+          </a:p>
+        </p:txBody>
+      </p:sp>
+      <p:sp>
+        <p:nvSpPr>
+          <p:cNvPr id="39" name="TextBox 38"/>
+          <p:cNvSpPr txBox="1"/>
+          <p:nvPr/>
+        </p:nvSpPr>
+        <p:spPr>
+          <a:xfrm>
+            <a:off x="1221500" y="4400000"/>
+            <a:ext cx="2800000" cy="200000"/>
+          </a:xfrm>
+          <a:prstGeom prst="rect">
+            <a:avLst/>
+          </a:prstGeom>
+          <a:noFill/>
+        </p:spPr>
+        <p:txBody>
+          <a:bodyPr wrap="square">
+            <a:spAutoFit/>
+          </a:bodyPr>
+          <a:lstStyle/>
+          <a:p>
+            <a:pPr>
+              <a:defRPr sz="1100" b="1">
+                <a:solidFill>
+                  <a:srgbClr val="1F2328"/>
+                </a:solidFill>
+              </a:defRPr>
+            </a:pPr>
+            <a:r>
+              <a:t>Agent E2E</a:t>
+            </a:r>
+          </a:p>
+        </p:txBody>
+      </p:sp>
+      <p:sp>
+        <p:nvSpPr>
+          <p:cNvPr id="40" name="TextBox 39"/>
+          <p:cNvSpPr txBox="1"/>
+          <p:nvPr/>
+        </p:nvSpPr>
+        <p:spPr>
+          <a:xfrm>
+            <a:off x="4071500" y="4400000"/>
+            <a:ext cx="7000000" cy="200000"/>
+          </a:xfrm>
+          <a:prstGeom prst="rect">
+            <a:avLst/>
+          </a:prstGeom>
+          <a:noFill/>
+        </p:spPr>
+        <p:txBody>
+          <a:bodyPr wrap="square">
+            <a:spAutoFit/>
+          </a:bodyPr>
+          <a:lstStyle/>
+          <a:p>
+            <a:pPr>
+              <a:defRPr sz="1000" b="0">
+                <a:solidFill>
+                  <a:srgbClr val="656D76"/>
+                </a:solidFill>
+              </a:defRPr>
+            </a:pPr>
+            <a:r>
+              <a:t>Intent → L1 校验 → 存证上链 → 读回验证</a:t>
+            </a:r>
+          </a:p>
+        </p:txBody>
+      </p:sp>
+      <p:sp>
+        <p:nvSpPr>
+          <p:cNvPr id="41" name="TextBox 40"/>
+          <p:cNvSpPr txBox="1"/>
+          <p:nvPr/>
+        </p:nvSpPr>
+        <p:spPr>
+          <a:xfrm>
+            <a:off x="571500" y="5800000"/>
+            <a:ext cx="11049000" cy="250000"/>
+          </a:xfrm>
+          <a:prstGeom prst="rect">
+            <a:avLst/>
+          </a:prstGeom>
+          <a:noFill/>
+        </p:spPr>
+        <p:txBody>
+          <a:bodyPr wrap="square">
+            <a:spAutoFit/>
+          </a:bodyPr>
+          <a:lstStyle/>
+          <a:p>
+            <a:pPr>
+              <a:defRPr sz="900" b="0">
+                <a:solidFill>
+                  <a:srgbClr val="656D76"/>
+                </a:solidFill>
+              </a:defRPr>
+            </a:pPr>
+            <a:r>
+              <a:t>集成指南: sdk/integrations/AGENT-INTEGRATION.md  |  链上存证: sepolia.etherscan.io/tx/0x1de83e...</a:t>
+            </a:r>
+          </a:p>
+        </p:txBody>
+      </p:sp>
+    </p:spTree>
+  </p:cSld>
+  <p:clrMapOvr>
+    <a:masterClrMapping/>
+  </p:clrMapOvr>
+</p:sld>
+</file>
+
+<file path=ppt/slides/slide11.xml><?xml version="1.0" encoding="utf-8"?>
+<p:sld xmlns:a="http://schemas.openxmlformats.org/drawingml/2006/main" xmlns:p="http://schemas.openxmlformats.org/presentationml/2006/main" xmlns:r="http://schemas.openxmlformats.org/officeDocument/2006/relationships">
+  <p:cSld>
+    <p:spTree>
+      <p:nvGrpSpPr>
+        <p:cNvPr id="1" name=""/>
+        <p:cNvGrpSpPr/>
+        <p:nvPr/>
+      </p:nvGrpSpPr>
+      <p:grpSpPr/>
+      <p:sp>
+        <p:nvSpPr>
+          <p:cNvPr id="2" name="TextBox 1"/>
+          <p:cNvSpPr txBox="1"/>
+          <p:nvPr/>
+        </p:nvSpPr>
+        <p:spPr>
+          <a:xfrm>
+            <a:off x="571500" y="380000"/>
+            <a:ext cx="11049000" cy="420000"/>
+          </a:xfrm>
+          <a:prstGeom prst="rect">
+            <a:avLst/>
+          </a:prstGeom>
+          <a:noFill/>
+        </p:spPr>
+        <p:txBody>
+          <a:bodyPr wrap="square">
+            <a:spAutoFit/>
+          </a:bodyPr>
+          <a:lstStyle/>
+          <a:p>
+            <a:pPr>
+              <a:defRPr sz="2600" b="1">
+                <a:solidFill>
+                  <a:srgbClr val="000000"/>
+                </a:solidFill>
+              </a:defRPr>
+            </a:pPr>
+            <a:r>
+              <a:t>Agent 框架接入：Chiron 即插即用</a:t>
+            </a:r>
+          </a:p>
+        </p:txBody>
+      </p:sp>
+      <p:sp>
+        <p:nvSpPr>
+          <p:cNvPr id="3" name="TextBox 2"/>
+          <p:cNvSpPr txBox="1"/>
+          <p:nvPr/>
+        </p:nvSpPr>
+        <p:spPr>
+          <a:xfrm>
+            <a:off x="571500" y="780000"/>
+            <a:ext cx="11049000" cy="250000"/>
+          </a:xfrm>
+          <a:prstGeom prst="rect">
+            <a:avLst/>
+          </a:prstGeom>
+          <a:noFill/>
+        </p:spPr>
+        <p:txBody>
+          <a:bodyPr wrap="square">
+            <a:spAutoFit/>
+          </a:bodyPr>
+          <a:lstStyle/>
+          <a:p>
+            <a:pPr>
+              <a:defRPr sz="1200" b="0">
+                <a:solidFill>
+                  <a:srgbClr val="656D76"/>
+                </a:solidFill>
+              </a:defRPr>
+            </a:pPr>
+            <a:r>
+              <a:t>任意 Agent 在交易前调用 verify() 获得 L1 校验保护 · 3 行代码接入</a:t>
+            </a:r>
+          </a:p>
+        </p:txBody>
+      </p:sp>
+      <p:sp>
+        <p:nvSpPr>
+          <p:cNvPr id="4" name="Rectangle 3"/>
+          <p:cNvSpPr/>
+          <p:nvPr/>
+        </p:nvSpPr>
+        <p:spPr>
+          <a:xfrm>
+            <a:off x="571500" y="1200000"/>
+            <a:ext cx="5400000" cy="1150000"/>
+          </a:xfrm>
+          <a:prstGeom prst="rect">
+            <a:avLst/>
+          </a:prstGeom>
+          <a:solidFill>
+            <a:srgbClr val="FFFFFF"/>
+          </a:solidFill>
+          <a:ln w="6350">
+            <a:solidFill>
+              <a:srgbClr val="E1E4E8"/>
+            </a:solidFill>
+          </a:ln>
+        </p:spPr>
+        <p:style>
+          <a:lnRef idx="1">
+            <a:schemeClr val="accent1"/>
+          </a:lnRef>
+          <a:fillRef idx="3">
+            <a:schemeClr val="accent1"/>
+          </a:fillRef>
+          <a:effectRef idx="2">
+            <a:schemeClr val="accent1"/>
+          </a:effectRef>
+          <a:fontRef idx="minor">
+            <a:schemeClr val="lt1"/>
+          </a:fontRef>
+        </p:style>
+        <p:txBody>
+          <a:bodyPr rtlCol="0" anchor="ctr"/>
+          <a:lstStyle/>
+          <a:p>
+            <a:pPr algn="ctr"/>
+          </a:p>
+        </p:txBody>
+      </p:sp>
+      <p:sp>
+        <p:nvSpPr>
+          <p:cNvPr id="5" name="TextBox 4"/>
+          <p:cNvSpPr txBox="1"/>
+          <p:nvPr/>
+        </p:nvSpPr>
+        <p:spPr>
+          <a:xfrm>
+            <a:off x="691500" y="1280000"/>
+            <a:ext cx="5200000" cy="250000"/>
+          </a:xfrm>
+          <a:prstGeom prst="rect">
+            <a:avLst/>
+          </a:prstGeom>
+          <a:noFill/>
+        </p:spPr>
+        <p:txBody>
+          <a:bodyPr wrap="square">
+            <a:spAutoFit/>
+          </a:bodyPr>
+          <a:lstStyle/>
+          <a:p>
+            <a:pPr>
+              <a:defRPr sz="1500" b="1">
+                <a:solidFill>
+                  <a:srgbClr val="1A7F37"/>
+                </a:solidFill>
+              </a:defRPr>
+            </a:pPr>
+            <a:r>
+              <a:t>  SDK 直接集成</a:t>
+            </a:r>
+          </a:p>
+        </p:txBody>
+      </p:sp>
+      <p:sp>
+        <p:nvSpPr>
+          <p:cNvPr id="6" name="TextBox 5"/>
+          <p:cNvSpPr txBox="1"/>
+          <p:nvPr/>
+        </p:nvSpPr>
+        <p:spPr>
+          <a:xfrm>
+            <a:off x="691500" y="1540000"/>
+            <a:ext cx="5200000" cy="500000"/>
+          </a:xfrm>
+          <a:prstGeom prst="rect">
+            <a:avLst/>
+          </a:prstGeom>
+          <a:noFill/>
+        </p:spPr>
+        <p:txBody>
+          <a:bodyPr wrap="square">
+            <a:spAutoFit/>
+          </a:bodyPr>
+          <a:lstStyle/>
+          <a:p>
+            <a:pPr>
+              <a:defRPr sz="1000" b="0">
+                <a:solidFill>
+                  <a:srgbClr val="656D76"/>
+                </a:solidFill>
+              </a:defRPr>
+            </a:pPr>
+            <a:r>
+              <a:t>npm install @chiron/sdk</a:t>
+            </a:r>
+            <a:br/>
+            <a:r>
+              <a:t>chiron.verify(intent, tx)</a:t>
+            </a:r>
+          </a:p>
+        </p:txBody>
+      </p:sp>
+      <p:sp>
+        <p:nvSpPr>
+          <p:cNvPr id="7" name="TextBox 6"/>
+          <p:cNvSpPr txBox="1"/>
+          <p:nvPr/>
+        </p:nvSpPr>
+        <p:spPr>
+          <a:xfrm>
+            <a:off x="691500" y="2000000"/>
+            <a:ext cx="5200000" cy="250000"/>
+          </a:xfrm>
+          <a:prstGeom prst="rect">
+            <a:avLst/>
+          </a:prstGeom>
+          <a:noFill/>
+        </p:spPr>
+        <p:txBody>
+          <a:bodyPr wrap="square">
+            <a:spAutoFit/>
+          </a:bodyPr>
+          <a:lstStyle/>
+          <a:p>
+            <a:pPr>
+              <a:defRPr sz="900" b="0">
+                <a:solidFill>
+                  <a:srgbClr val="0969DA"/>
+                </a:solidFill>
+              </a:defRPr>
+            </a:pPr>
+            <a:r>
+              <a:t>    适用于: Node.js</a:t>
+            </a:r>
+          </a:p>
+        </p:txBody>
+      </p:sp>
+      <p:sp>
+        <p:nvSpPr>
+          <p:cNvPr id="8" name="Rectangle 7"/>
+          <p:cNvSpPr/>
+          <p:nvPr/>
+        </p:nvSpPr>
+        <p:spPr>
+          <a:xfrm>
+            <a:off x="571500" y="2500000"/>
+            <a:ext cx="5400000" cy="1150000"/>
+          </a:xfrm>
+          <a:prstGeom prst="rect">
+            <a:avLst/>
+          </a:prstGeom>
+          <a:solidFill>
+            <a:srgbClr val="FFFFFF"/>
+          </a:solidFill>
+          <a:ln w="6350">
+            <a:solidFill>
+              <a:srgbClr val="E1E4E8"/>
+            </a:solidFill>
+          </a:ln>
+        </p:spPr>
+        <p:style>
+          <a:lnRef idx="1">
+            <a:schemeClr val="accent1"/>
+          </a:lnRef>
+          <a:fillRef idx="3">
+            <a:schemeClr val="accent1"/>
+          </a:fillRef>
+          <a:effectRef idx="2">
+            <a:schemeClr val="accent1"/>
+          </a:effectRef>
+          <a:fontRef idx="minor">
+            <a:schemeClr val="lt1"/>
+          </a:fontRef>
+        </p:style>
+        <p:txBody>
+          <a:bodyPr rtlCol="0" anchor="ctr"/>
+          <a:lstStyle/>
+          <a:p>
+            <a:pPr algn="ctr"/>
+          </a:p>
+        </p:txBody>
+      </p:sp>
+      <p:sp>
+        <p:nvSpPr>
+          <p:cNvPr id="9" name="TextBox 8"/>
+          <p:cNvSpPr txBox="1"/>
+          <p:nvPr/>
+        </p:nvSpPr>
+        <p:spPr>
+          <a:xfrm>
+            <a:off x="691500" y="2580000"/>
+            <a:ext cx="5200000" cy="250000"/>
+          </a:xfrm>
+          <a:prstGeom prst="rect">
+            <a:avLst/>
+          </a:prstGeom>
+          <a:noFill/>
+        </p:spPr>
+        <p:txBody>
+          <a:bodyPr wrap="square">
+            <a:spAutoFit/>
+          </a:bodyPr>
+          <a:lstStyle/>
+          <a:p>
+            <a:pPr>
+              <a:defRPr sz="1500" b="1">
+                <a:solidFill>
+                  <a:srgbClr val="1A7F37"/>
+                </a:solidFill>
+              </a:defRPr>
+            </a:pPr>
+            <a:r>
+              <a:t>  HTTP API</a:t>
+            </a:r>
+          </a:p>
+        </p:txBody>
+      </p:sp>
+      <p:sp>
+        <p:nvSpPr>
+          <p:cNvPr id="10" name="TextBox 9"/>
+          <p:cNvSpPr txBox="1"/>
+          <p:nvPr/>
+        </p:nvSpPr>
+        <p:spPr>
+          <a:xfrm>
+            <a:off x="691500" y="2840000"/>
+            <a:ext cx="5200000" cy="500000"/>
+          </a:xfrm>
+          <a:prstGeom prst="rect">
+            <a:avLst/>
+          </a:prstGeom>
+          <a:noFill/>
+        </p:spPr>
+        <p:txBody>
+          <a:bodyPr wrap="square">
+            <a:spAutoFit/>
+          </a:bodyPr>
+          <a:lstStyle/>
+          <a:p>
+            <a:pPr>
+              <a:defRPr sz="1000" b="0">
+                <a:solidFill>
+                  <a:srgbClr val="656D76"/>
+                </a:solidFill>
+              </a:defRPr>
+            </a:pPr>
+            <a:r>
+              <a:t>POST /verify {intent, tx}</a:t>
+            </a:r>
+            <a:br/>
+            <a:r>
+              <a:t>返回 {allowed, l1Result}</a:t>
+            </a:r>
+          </a:p>
+        </p:txBody>
+      </p:sp>
+      <p:sp>
+        <p:nvSpPr>
+          <p:cNvPr id="11" name="TextBox 10"/>
+          <p:cNvSpPr txBox="1"/>
+          <p:nvPr/>
+        </p:nvSpPr>
+        <p:spPr>
+          <a:xfrm>
+            <a:off x="691500" y="3300000"/>
+            <a:ext cx="5200000" cy="250000"/>
+          </a:xfrm>
+          <a:prstGeom prst="rect">
+            <a:avLst/>
+          </a:prstGeom>
+          <a:noFill/>
+        </p:spPr>
+        <p:txBody>
+          <a:bodyPr wrap="square">
+            <a:spAutoFit/>
+          </a:bodyPr>
+          <a:lstStyle/>
+          <a:p>
+            <a:pPr>
+              <a:defRPr sz="900" b="0">
+                <a:solidFill>
+                  <a:srgbClr val="0969DA"/>
+                </a:solidFill>
+              </a:defRPr>
+            </a:pPr>
+            <a:r>
+              <a:t>    适用于: Any Lang</a:t>
+            </a:r>
+          </a:p>
+        </p:txBody>
+      </p:sp>
+      <p:sp>
+        <p:nvSpPr>
+          <p:cNvPr id="12" name="Rectangle 11"/>
+          <p:cNvSpPr/>
+          <p:nvPr/>
+        </p:nvSpPr>
+        <p:spPr>
+          <a:xfrm>
+            <a:off x="571500" y="3800000"/>
+            <a:ext cx="5400000" cy="1150000"/>
+          </a:xfrm>
+          <a:prstGeom prst="rect">
+            <a:avLst/>
+          </a:prstGeom>
+          <a:solidFill>
+            <a:srgbClr val="FFFFFF"/>
+          </a:solidFill>
+          <a:ln w="6350">
+            <a:solidFill>
+              <a:srgbClr val="E1E4E8"/>
+            </a:solidFill>
+          </a:ln>
+        </p:spPr>
+        <p:style>
+          <a:lnRef idx="1">
+            <a:schemeClr val="accent1"/>
+          </a:lnRef>
+          <a:fillRef idx="3">
+            <a:schemeClr val="accent1"/>
+          </a:fillRef>
+          <a:effectRef idx="2">
+            <a:schemeClr val="accent1"/>
+          </a:effectRef>
+          <a:fontRef idx="minor">
+            <a:schemeClr val="lt1"/>
+          </a:fontRef>
+        </p:style>
+        <p:txBody>
+          <a:bodyPr rtlCol="0" anchor="ctr"/>
+          <a:lstStyle/>
+          <a:p>
+            <a:pPr algn="ctr"/>
+          </a:p>
+        </p:txBody>
+      </p:sp>
+      <p:sp>
+        <p:nvSpPr>
+          <p:cNvPr id="13" name="TextBox 12"/>
+          <p:cNvSpPr txBox="1"/>
+          <p:nvPr/>
+        </p:nvSpPr>
+        <p:spPr>
+          <a:xfrm>
+            <a:off x="691500" y="3880000"/>
+            <a:ext cx="5200000" cy="250000"/>
+          </a:xfrm>
+          <a:prstGeom prst="rect">
+            <a:avLst/>
+          </a:prstGeom>
+          <a:noFill/>
+        </p:spPr>
+        <p:txBody>
+          <a:bodyPr wrap="square">
+            <a:spAutoFit/>
+          </a:bodyPr>
+          <a:lstStyle/>
+          <a:p>
+            <a:pPr>
+              <a:defRPr sz="1500" b="1">
+                <a:solidFill>
+                  <a:srgbClr val="1A7F37"/>
+                </a:solidFill>
+              </a:defRPr>
+            </a:pPr>
+            <a:r>
+              <a:t>  ElizaOS 插件</a:t>
+            </a:r>
+          </a:p>
+        </p:txBody>
+      </p:sp>
+      <p:sp>
+        <p:nvSpPr>
+          <p:cNvPr id="14" name="TextBox 13"/>
+          <p:cNvSpPr txBox="1"/>
+          <p:nvPr/>
+        </p:nvSpPr>
+        <p:spPr>
+          <a:xfrm>
+            <a:off x="691500" y="4140000"/>
+            <a:ext cx="5200000" cy="500000"/>
+          </a:xfrm>
+          <a:prstGeom prst="rect">
+            <a:avLst/>
+          </a:prstGeom>
+          <a:noFill/>
+        </p:spPr>
+        <p:txBody>
+          <a:bodyPr wrap="square">
+            <a:spAutoFit/>
+          </a:bodyPr>
+          <a:lstStyle/>
+          <a:p>
+            <a:pPr>
+              <a:defRPr sz="1000" b="0">
+                <a:solidFill>
+                  <a:srgbClr val="656D76"/>
+                </a:solidFill>
+              </a:defRPr>
+            </a:pPr>
+            <a:r>
+              <a:t>plugin-chiron</a:t>
+            </a:r>
+            <a:br/>
+            <a:r>
+              <a:t>beforeTransaction() 自动拦截</a:t>
+            </a:r>
+          </a:p>
+        </p:txBody>
+      </p:sp>
+      <p:sp>
+        <p:nvSpPr>
+          <p:cNvPr id="15" name="TextBox 14"/>
+          <p:cNvSpPr txBox="1"/>
+          <p:nvPr/>
+        </p:nvSpPr>
+        <p:spPr>
+          <a:xfrm>
+            <a:off x="691500" y="4600000"/>
+            <a:ext cx="5200000" cy="250000"/>
+          </a:xfrm>
+          <a:prstGeom prst="rect">
+            <a:avLst/>
+          </a:prstGeom>
+          <a:noFill/>
+        </p:spPr>
+        <p:txBody>
+          <a:bodyPr wrap="square">
+            <a:spAutoFit/>
+          </a:bodyPr>
+          <a:lstStyle/>
+          <a:p>
+            <a:pPr>
+              <a:defRPr sz="900" b="0">
+                <a:solidFill>
+                  <a:srgbClr val="0969DA"/>
+                </a:solidFill>
+              </a:defRPr>
+            </a:pPr>
+            <a:r>
+              <a:t>    适用于: ElizaOS</a:t>
+            </a:r>
+          </a:p>
+        </p:txBody>
+      </p:sp>
+      <p:sp>
+        <p:nvSpPr>
+          <p:cNvPr id="16" name="TextBox 15"/>
+          <p:cNvSpPr txBox="1"/>
+          <p:nvPr/>
+        </p:nvSpPr>
+        <p:spPr>
+          <a:xfrm>
+            <a:off x="6300000" y="1200000"/>
+            <a:ext cx="5500000" cy="250000"/>
+          </a:xfrm>
+          <a:prstGeom prst="rect">
+            <a:avLst/>
+          </a:prstGeom>
+          <a:noFill/>
+        </p:spPr>
+        <p:txBody>
+          <a:bodyPr wrap="square">
+            <a:spAutoFit/>
+          </a:bodyPr>
+          <a:lstStyle/>
+          <a:p>
+            <a:pPr>
+              <a:defRPr sz="1600" b="1">
+                <a:solidFill>
+                  <a:srgbClr val="000000"/>
+                </a:solidFill>
+              </a:defRPr>
+            </a:pPr>
+            <a:r>
+              <a:t>集成流程</a:t>
+            </a:r>
+          </a:p>
+        </p:txBody>
+      </p:sp>
+      <p:sp>
+        <p:nvSpPr>
+          <p:cNvPr id="17" name="Rectangle 16"/>
+          <p:cNvSpPr/>
+          <p:nvPr/>
+        </p:nvSpPr>
+        <p:spPr>
+          <a:xfrm>
+            <a:off x="6300000" y="1600000"/>
+            <a:ext cx="5500000" cy="350000"/>
+          </a:xfrm>
+          <a:prstGeom prst="rect">
+            <a:avLst/>
+          </a:prstGeom>
+          <a:solidFill>
+            <a:srgbClr val="F6F8FA"/>
+          </a:solidFill>
+          <a:ln w="6350">
+            <a:solidFill>
+              <a:srgbClr val="E1E4E8"/>
+            </a:solidFill>
+          </a:ln>
+        </p:spPr>
+        <p:style>
+          <a:lnRef idx="1">
+            <a:schemeClr val="accent1"/>
+          </a:lnRef>
+          <a:fillRef idx="3">
+            <a:schemeClr val="accent1"/>
+          </a:fillRef>
+          <a:effectRef idx="2">
+            <a:schemeClr val="accent1"/>
+          </a:effectRef>
+          <a:fontRef idx="minor">
+            <a:schemeClr val="lt1"/>
+          </a:fontRef>
+        </p:style>
+        <p:txBody>
+          <a:bodyPr rtlCol="0" anchor="ctr"/>
+          <a:lstStyle/>
+          <a:p>
+            <a:pPr algn="ctr"/>
+          </a:p>
+        </p:txBody>
+      </p:sp>
+      <p:sp>
+        <p:nvSpPr>
+          <p:cNvPr id="18" name="TextBox 17"/>
+          <p:cNvSpPr txBox="1"/>
+          <p:nvPr/>
+        </p:nvSpPr>
+        <p:spPr>
+          <a:xfrm>
+            <a:off x="6400000" y="1640000"/>
+            <a:ext cx="5400000" cy="180000"/>
+          </a:xfrm>
+          <a:prstGeom prst="rect">
+            <a:avLst/>
+          </a:prstGeom>
+          <a:noFill/>
+        </p:spPr>
+        <p:txBody>
+          <a:bodyPr wrap="square">
+            <a:spAutoFit/>
+          </a:bodyPr>
+          <a:lstStyle/>
+          <a:p>
+            <a:pPr>
+              <a:defRPr sz="1200" b="1">
+                <a:solidFill>
+                  <a:srgbClr val="1F2328"/>
+                </a:solidFill>
+              </a:defRPr>
+            </a:pPr>
+            <a:r>
+              <a:t>🎯 Agent 决策</a:t>
+            </a:r>
+          </a:p>
+        </p:txBody>
+      </p:sp>
+      <p:sp>
+        <p:nvSpPr>
+          <p:cNvPr id="19" name="TextBox 18"/>
+          <p:cNvSpPr txBox="1"/>
+          <p:nvPr/>
+        </p:nvSpPr>
+        <p:spPr>
+          <a:xfrm>
+            <a:off x="6400000" y="1800000"/>
+            <a:ext cx="5400000" cy="140000"/>
+          </a:xfrm>
+          <a:prstGeom prst="rect">
+            <a:avLst/>
+          </a:prstGeom>
+          <a:noFill/>
+        </p:spPr>
+        <p:txBody>
+          <a:bodyPr wrap="square">
+            <a:spAutoFit/>
+          </a:bodyPr>
+          <a:lstStyle/>
+          <a:p>
+            <a:pPr>
+              <a:defRPr sz="1000" b="0">
+                <a:solidFill>
+                  <a:srgbClr val="656D76"/>
+                </a:solidFill>
+              </a:defRPr>
+            </a:pPr>
+            <a:r>
+              <a:t>执行链上操作</a:t>
+            </a:r>
+          </a:p>
+        </p:txBody>
+      </p:sp>
+      <p:sp>
+        <p:nvSpPr>
+          <p:cNvPr id="20" name="Rectangle 19"/>
+          <p:cNvSpPr/>
+          <p:nvPr/>
+        </p:nvSpPr>
+        <p:spPr>
+          <a:xfrm>
+            <a:off x="6300000" y="2000000"/>
+            <a:ext cx="5500000" cy="350000"/>
+          </a:xfrm>
+          <a:prstGeom prst="rect">
+            <a:avLst/>
+          </a:prstGeom>
+          <a:solidFill>
+            <a:srgbClr val="F6F8FA"/>
+          </a:solidFill>
+          <a:ln w="6350">
+            <a:solidFill>
+              <a:srgbClr val="E1E4E8"/>
+            </a:solidFill>
+          </a:ln>
+        </p:spPr>
+        <p:style>
+          <a:lnRef idx="1">
+            <a:schemeClr val="accent1"/>
+          </a:lnRef>
+          <a:fillRef idx="3">
+            <a:schemeClr val="accent1"/>
+          </a:fillRef>
+          <a:effectRef idx="2">
+            <a:schemeClr val="accent1"/>
+          </a:effectRef>
+          <a:fontRef idx="minor">
+            <a:schemeClr val="lt1"/>
+          </a:fontRef>
+        </p:style>
+        <p:txBody>
+          <a:bodyPr rtlCol="0" anchor="ctr"/>
+          <a:lstStyle/>
+          <a:p>
+            <a:pPr algn="ctr"/>
+          </a:p>
+        </p:txBody>
+      </p:sp>
+      <p:sp>
+        <p:nvSpPr>
+          <p:cNvPr id="21" name="TextBox 20"/>
+          <p:cNvSpPr txBox="1"/>
+          <p:nvPr/>
+        </p:nvSpPr>
+        <p:spPr>
+          <a:xfrm>
+            <a:off x="6400000" y="2040000"/>
+            <a:ext cx="5400000" cy="180000"/>
+          </a:xfrm>
+          <a:prstGeom prst="rect">
+            <a:avLst/>
+          </a:prstGeom>
+          <a:noFill/>
+        </p:spPr>
+        <p:txBody>
+          <a:bodyPr wrap="square">
+            <a:spAutoFit/>
+          </a:bodyPr>
+          <a:lstStyle/>
+          <a:p>
+            <a:pPr>
+              <a:defRPr sz="1200" b="1">
+                <a:solidFill>
+                  <a:srgbClr val="1F2328"/>
+                </a:solidFill>
+              </a:defRPr>
+            </a:pPr>
+            <a:r>
+              <a:t>📝 声明 Intent</a:t>
+            </a:r>
+          </a:p>
+        </p:txBody>
+      </p:sp>
+      <p:sp>
+        <p:nvSpPr>
+          <p:cNvPr id="22" name="TextBox 21"/>
+          <p:cNvSpPr txBox="1"/>
+          <p:nvPr/>
+        </p:nvSpPr>
+        <p:spPr>
+          <a:xfrm>
+            <a:off x="6400000" y="2200000"/>
+            <a:ext cx="5400000" cy="140000"/>
+          </a:xfrm>
+          <a:prstGeom prst="rect">
+            <a:avLst/>
+          </a:prstGeom>
+          <a:noFill/>
+        </p:spPr>
+        <p:txBody>
+          <a:bodyPr wrap="square">
+            <a:spAutoFit/>
+          </a:bodyPr>
+          <a:lstStyle/>
+          <a:p>
+            <a:pPr>
+              <a:defRPr sz="1000" b="0">
+                <a:solidFill>
+                  <a:srgbClr val="656D76"/>
+                </a:solidFill>
+              </a:defRPr>
+            </a:pPr>
+            <a:r>
+              <a:t>结构化意图模板</a:t>
+            </a:r>
+          </a:p>
+        </p:txBody>
+      </p:sp>
+      <p:sp>
+        <p:nvSpPr>
+          <p:cNvPr id="23" name="Rectangle 22"/>
+          <p:cNvSpPr/>
+          <p:nvPr/>
+        </p:nvSpPr>
+        <p:spPr>
+          <a:xfrm>
+            <a:off x="6300000" y="2400000"/>
+            <a:ext cx="5500000" cy="350000"/>
+          </a:xfrm>
+          <a:prstGeom prst="rect">
+            <a:avLst/>
+          </a:prstGeom>
+          <a:solidFill>
+            <a:srgbClr val="F6F8FA"/>
+          </a:solidFill>
+          <a:ln w="6350">
+            <a:solidFill>
+              <a:srgbClr val="E1E4E8"/>
+            </a:solidFill>
+          </a:ln>
+        </p:spPr>
+        <p:style>
+          <a:lnRef idx="1">
+            <a:schemeClr val="accent1"/>
+          </a:lnRef>
+          <a:fillRef idx="3">
+            <a:schemeClr val="accent1"/>
+          </a:fillRef>
+          <a:effectRef idx="2">
+            <a:schemeClr val="accent1"/>
+          </a:effectRef>
+          <a:fontRef idx="minor">
+            <a:schemeClr val="lt1"/>
+          </a:fontRef>
+        </p:style>
+        <p:txBody>
+          <a:bodyPr rtlCol="0" anchor="ctr"/>
+          <a:lstStyle/>
+          <a:p>
+            <a:pPr algn="ctr"/>
+          </a:p>
+        </p:txBody>
+      </p:sp>
+      <p:sp>
+        <p:nvSpPr>
+          <p:cNvPr id="24" name="TextBox 23"/>
+          <p:cNvSpPr txBox="1"/>
+          <p:nvPr/>
+        </p:nvSpPr>
+        <p:spPr>
+          <a:xfrm>
+            <a:off x="6400000" y="2440000"/>
+            <a:ext cx="5400000" cy="180000"/>
+          </a:xfrm>
+          <a:prstGeom prst="rect">
+            <a:avLst/>
+          </a:prstGeom>
+          <a:noFill/>
+        </p:spPr>
+        <p:txBody>
+          <a:bodyPr wrap="square">
+            <a:spAutoFit/>
+          </a:bodyPr>
+          <a:lstStyle/>
+          <a:p>
+            <a:pPr>
+              <a:defRPr sz="1200" b="1">
+                <a:solidFill>
+                  <a:srgbClr val="1F2328"/>
+                </a:solidFill>
+              </a:defRPr>
+            </a:pPr>
+            <a:r>
+              <a:t>🔧 构造交易</a:t>
+            </a:r>
+          </a:p>
+        </p:txBody>
+      </p:sp>
+      <p:sp>
+        <p:nvSpPr>
+          <p:cNvPr id="25" name="TextBox 24"/>
+          <p:cNvSpPr txBox="1"/>
+          <p:nvPr/>
+        </p:nvSpPr>
+        <p:spPr>
+          <a:xfrm>
+            <a:off x="6400000" y="2600000"/>
+            <a:ext cx="5400000" cy="140000"/>
+          </a:xfrm>
+          <a:prstGeom prst="rect">
+            <a:avLst/>
+          </a:prstGeom>
+          <a:noFill/>
+        </p:spPr>
+        <p:txBody>
+          <a:bodyPr wrap="square">
+            <a:spAutoFit/>
+          </a:bodyPr>
+          <a:lstStyle/>
+          <a:p>
+            <a:pPr>
+              <a:defRPr sz="1000" b="0">
+                <a:solidFill>
+                  <a:srgbClr val="656D76"/>
+                </a:solidFill>
+              </a:defRPr>
+            </a:pPr>
+            <a:r>
+              <a:t>Transaction 对象</a:t>
+            </a:r>
+          </a:p>
+        </p:txBody>
+      </p:sp>
+      <p:sp>
+        <p:nvSpPr>
+          <p:cNvPr id="26" name="Rectangle 25"/>
+          <p:cNvSpPr/>
+          <p:nvPr/>
+        </p:nvSpPr>
+        <p:spPr>
+          <a:xfrm>
+            <a:off x="6300000" y="2800000"/>
+            <a:ext cx="5500000" cy="350000"/>
+          </a:xfrm>
+          <a:prstGeom prst="rect">
+            <a:avLst/>
+          </a:prstGeom>
+          <a:solidFill>
+            <a:srgbClr val="F6F8FA"/>
+          </a:solidFill>
+          <a:ln w="6350">
+            <a:solidFill>
+              <a:srgbClr val="E1E4E8"/>
+            </a:solidFill>
+          </a:ln>
+        </p:spPr>
+        <p:style>
+          <a:lnRef idx="1">
+            <a:schemeClr val="accent1"/>
+          </a:lnRef>
+          <a:fillRef idx="3">
+            <a:schemeClr val="accent1"/>
+          </a:fillRef>
+          <a:effectRef idx="2">
+            <a:schemeClr val="accent1"/>
+          </a:effectRef>
+          <a:fontRef idx="minor">
+            <a:schemeClr val="lt1"/>
+          </a:fontRef>
+        </p:style>
+        <p:txBody>
+          <a:bodyPr rtlCol="0" anchor="ctr"/>
+          <a:lstStyle/>
+          <a:p>
+            <a:pPr algn="ctr"/>
+          </a:p>
+        </p:txBody>
+      </p:sp>
+      <p:sp>
+        <p:nvSpPr>
+          <p:cNvPr id="27" name="TextBox 26"/>
+          <p:cNvSpPr txBox="1"/>
+          <p:nvPr/>
+        </p:nvSpPr>
+        <p:spPr>
+          <a:xfrm>
+            <a:off x="6400000" y="2840000"/>
+            <a:ext cx="5400000" cy="180000"/>
+          </a:xfrm>
+          <a:prstGeom prst="rect">
+            <a:avLst/>
+          </a:prstGeom>
+          <a:noFill/>
+        </p:spPr>
+        <p:txBody>
+          <a:bodyPr wrap="square">
+            <a:spAutoFit/>
+          </a:bodyPr>
+          <a:lstStyle/>
+          <a:p>
+            <a:pPr>
+              <a:defRPr sz="1200" b="1">
+                <a:solidFill>
+                  <a:srgbClr val="1F2328"/>
+                </a:solidFill>
+              </a:defRPr>
+            </a:pPr>
+            <a:r>
+              <a:t>🛡️ Chiron L1</a:t>
+            </a:r>
+          </a:p>
+        </p:txBody>
+      </p:sp>
+      <p:sp>
+        <p:nvSpPr>
+          <p:cNvPr id="28" name="TextBox 27"/>
+          <p:cNvSpPr txBox="1"/>
+          <p:nvPr/>
+        </p:nvSpPr>
+        <p:spPr>
+          <a:xfrm>
+            <a:off x="6400000" y="3000000"/>
+            <a:ext cx="5400000" cy="140000"/>
+          </a:xfrm>
+          <a:prstGeom prst="rect">
+            <a:avLst/>
+          </a:prstGeom>
+          <a:noFill/>
+        </p:spPr>
+        <p:txBody>
+          <a:bodyPr wrap="square">
+            <a:spAutoFit/>
+          </a:bodyPr>
+          <a:lstStyle/>
+          <a:p>
+            <a:pPr>
+              <a:defRPr sz="1000" b="0">
+                <a:solidFill>
+                  <a:srgbClr val="656D76"/>
+                </a:solidFill>
+              </a:defRPr>
+            </a:pPr>
+            <a:r>
+              <a:t>R1→R6 规则校验</a:t>
+            </a:r>
+          </a:p>
+        </p:txBody>
+      </p:sp>
+      <p:sp>
+        <p:nvSpPr>
+          <p:cNvPr id="29" name="Rectangle 28"/>
+          <p:cNvSpPr/>
+          <p:nvPr/>
+        </p:nvSpPr>
+        <p:spPr>
+          <a:xfrm>
+            <a:off x="6300000" y="3200000"/>
+            <a:ext cx="5500000" cy="350000"/>
+          </a:xfrm>
+          <a:prstGeom prst="rect">
+            <a:avLst/>
+          </a:prstGeom>
+          <a:solidFill>
+            <a:srgbClr val="F6F8FA"/>
+          </a:solidFill>
+          <a:ln w="6350">
+            <a:solidFill>
+              <a:srgbClr val="E1E4E8"/>
+            </a:solidFill>
+          </a:ln>
+        </p:spPr>
+        <p:style>
+          <a:lnRef idx="1">
+            <a:schemeClr val="accent1"/>
+          </a:lnRef>
+          <a:fillRef idx="3">
+            <a:schemeClr val="accent1"/>
+          </a:fillRef>
+          <a:effectRef idx="2">
+            <a:schemeClr val="accent1"/>
+          </a:effectRef>
+          <a:fontRef idx="minor">
+            <a:schemeClr val="lt1"/>
+          </a:fontRef>
+        </p:style>
+        <p:txBody>
+          <a:bodyPr rtlCol="0" anchor="ctr"/>
+          <a:lstStyle/>
+          <a:p>
+            <a:pPr algn="ctr"/>
+          </a:p>
+        </p:txBody>
+      </p:sp>
+      <p:sp>
+        <p:nvSpPr>
+          <p:cNvPr id="30" name="TextBox 29"/>
+          <p:cNvSpPr txBox="1"/>
+          <p:nvPr/>
+        </p:nvSpPr>
+        <p:spPr>
+          <a:xfrm>
+            <a:off x="6400000" y="3240000"/>
+            <a:ext cx="5400000" cy="180000"/>
+          </a:xfrm>
+          <a:prstGeom prst="rect">
+            <a:avLst/>
+          </a:prstGeom>
+          <a:noFill/>
+        </p:spPr>
+        <p:txBody>
+          <a:bodyPr wrap="square">
+            <a:spAutoFit/>
+          </a:bodyPr>
+          <a:lstStyle/>
+          <a:p>
+            <a:pPr>
+              <a:defRPr sz="1200" b="1">
+                <a:solidFill>
+                  <a:srgbClr val="1A7F37"/>
+                </a:solidFill>
+              </a:defRPr>
+            </a:pPr>
+            <a:r>
+              <a:t>  ├─ PASS→放行</a:t>
+            </a:r>
+          </a:p>
+        </p:txBody>
+      </p:sp>
+      <p:sp>
+        <p:nvSpPr>
+          <p:cNvPr id="31" name="TextBox 30"/>
+          <p:cNvSpPr txBox="1"/>
+          <p:nvPr/>
+        </p:nvSpPr>
+        <p:spPr>
+          <a:xfrm>
+            <a:off x="6400000" y="3400000"/>
+            <a:ext cx="5400000" cy="140000"/>
+          </a:xfrm>
+          <a:prstGeom prst="rect">
+            <a:avLst/>
+          </a:prstGeom>
+          <a:noFill/>
+        </p:spPr>
+        <p:txBody>
+          <a:bodyPr wrap="square">
+            <a:spAutoFit/>
+          </a:bodyPr>
+          <a:lstStyle/>
+          <a:p>
+            <a:pPr>
+              <a:defRPr sz="1000" b="0">
+                <a:solidFill>
+                  <a:srgbClr val="656D76"/>
+                </a:solidFill>
+              </a:defRPr>
+            </a:pPr>
+            <a:r>
+              <a:t>链上存证</a:t>
+            </a:r>
+          </a:p>
+        </p:txBody>
+      </p:sp>
+      <p:sp>
+        <p:nvSpPr>
+          <p:cNvPr id="32" name="Rectangle 31"/>
+          <p:cNvSpPr/>
+          <p:nvPr/>
+        </p:nvSpPr>
+        <p:spPr>
+          <a:xfrm>
+            <a:off x="6300000" y="3600000"/>
+            <a:ext cx="5500000" cy="350000"/>
+          </a:xfrm>
+          <a:prstGeom prst="rect">
+            <a:avLst/>
+          </a:prstGeom>
+          <a:solidFill>
+            <a:srgbClr val="F6F8FA"/>
+          </a:solidFill>
+          <a:ln w="6350">
+            <a:solidFill>
+              <a:srgbClr val="E1E4E8"/>
+            </a:solidFill>
+          </a:ln>
+        </p:spPr>
+        <p:style>
+          <a:lnRef idx="1">
+            <a:schemeClr val="accent1"/>
+          </a:lnRef>
+          <a:fillRef idx="3">
+            <a:schemeClr val="accent1"/>
+          </a:fillRef>
+          <a:effectRef idx="2">
+            <a:schemeClr val="accent1"/>
+          </a:effectRef>
+          <a:fontRef idx="minor">
+            <a:schemeClr val="lt1"/>
+          </a:fontRef>
+        </p:style>
+        <p:txBody>
+          <a:bodyPr rtlCol="0" anchor="ctr"/>
+          <a:lstStyle/>
+          <a:p>
+            <a:pPr algn="ctr"/>
+          </a:p>
+        </p:txBody>
+      </p:sp>
+      <p:sp>
+        <p:nvSpPr>
+          <p:cNvPr id="33" name="TextBox 32"/>
+          <p:cNvSpPr txBox="1"/>
+          <p:nvPr/>
+        </p:nvSpPr>
+        <p:spPr>
+          <a:xfrm>
+            <a:off x="6400000" y="3640000"/>
+            <a:ext cx="5400000" cy="180000"/>
+          </a:xfrm>
+          <a:prstGeom prst="rect">
+            <a:avLst/>
+          </a:prstGeom>
+          <a:noFill/>
+        </p:spPr>
+        <p:txBody>
+          <a:bodyPr wrap="square">
+            <a:spAutoFit/>
+          </a:bodyPr>
+          <a:lstStyle/>
+          <a:p>
+            <a:pPr>
+              <a:defRPr sz="1200" b="1">
+                <a:solidFill>
+                  <a:srgbClr val="CF222E"/>
+                </a:solidFill>
+              </a:defRPr>
+            </a:pPr>
+            <a:r>
+              <a:t>  └─ FAIL→阻断</a:t>
+            </a:r>
+          </a:p>
+        </p:txBody>
+      </p:sp>
+      <p:sp>
+        <p:nvSpPr>
+          <p:cNvPr id="34" name="TextBox 33"/>
+          <p:cNvSpPr txBox="1"/>
+          <p:nvPr/>
+        </p:nvSpPr>
+        <p:spPr>
+          <a:xfrm>
+            <a:off x="6400000" y="3800000"/>
+            <a:ext cx="5400000" cy="140000"/>
+          </a:xfrm>
+          <a:prstGeom prst="rect">
+            <a:avLst/>
+          </a:prstGeom>
+          <a:noFill/>
+        </p:spPr>
+        <p:txBody>
+          <a:bodyPr wrap="square">
+            <a:spAutoFit/>
+          </a:bodyPr>
+          <a:lstStyle/>
+          <a:p>
+            <a:pPr>
+              <a:defRPr sz="1000" b="0">
+                <a:solidFill>
+                  <a:srgbClr val="656D76"/>
+                </a:solidFill>
+              </a:defRPr>
+            </a:pPr>
+            <a:r>
+              <a:t>CB 记录</a:t>
+            </a:r>
+          </a:p>
+        </p:txBody>
+      </p:sp>
+      <p:sp>
+        <p:nvSpPr>
+          <p:cNvPr id="35" name="TextBox 34"/>
+          <p:cNvSpPr txBox="1"/>
+          <p:nvPr/>
+        </p:nvSpPr>
+        <p:spPr>
+          <a:xfrm>
+            <a:off x="571500" y="6150000"/>
+            <a:ext cx="11049000" cy="250000"/>
+          </a:xfrm>
+          <a:prstGeom prst="rect">
+            <a:avLst/>
+          </a:prstGeom>
+          <a:noFill/>
+        </p:spPr>
+        <p:txBody>
+          <a:bodyPr wrap="square">
+            <a:spAutoFit/>
+          </a:bodyPr>
+          <a:lstStyle/>
+          <a:p>
+            <a:pPr>
+              <a:defRPr sz="900" b="0">
+                <a:solidFill>
+                  <a:srgbClr val="656D76"/>
+                </a:solidFill>
+              </a:defRPr>
+            </a:pPr>
+            <a:r>
+              <a:t>集成指南: sdk/integrations/AGENT-INTEGRATION.md  |  ElizaOS 插件: integrations/elizaos-plugin/</a:t>
+            </a:r>
+          </a:p>
+        </p:txBody>
+      </p:sp>
+    </p:spTree>
+  </p:cSld>
+  <p:clrMapOvr>
+    <a:masterClrMapping/>
+  </p:clrMapOvr>
+</p:sld>
+</file>
+
+<file path=ppt/slides/slide12.xml><?xml version="1.0" encoding="utf-8"?>
+<p:sld xmlns:a="http://schemas.openxmlformats.org/drawingml/2006/main" xmlns:p="http://schemas.openxmlformats.org/presentationml/2006/main" xmlns:r="http://schemas.openxmlformats.org/officeDocument/2006/relationships">
+  <p:cSld>
+    <p:spTree>
+      <p:nvGrpSpPr>
+        <p:cNvPr id="1" name=""/>
+        <p:cNvGrpSpPr/>
+        <p:nvPr/>
+      </p:nvGrpSpPr>
+      <p:grpSpPr/>
+      <p:sp>
+        <p:nvSpPr>
+          <p:cNvPr id="2" name="TextBox 1"/>
+          <p:cNvSpPr txBox="1"/>
+          <p:nvPr/>
+        </p:nvSpPr>
+        <p:spPr>
+          <a:xfrm>
+            <a:off x="571500" y="380000"/>
+            <a:ext cx="11049000" cy="420000"/>
+          </a:xfrm>
+          <a:prstGeom prst="rect">
+            <a:avLst/>
+          </a:prstGeom>
+          <a:noFill/>
+        </p:spPr>
+        <p:txBody>
+          <a:bodyPr wrap="square">
+            <a:spAutoFit/>
+          </a:bodyPr>
+          <a:lstStyle/>
+          <a:p>
+            <a:pPr>
+              <a:defRPr sz="2600" b="1">
+                <a:solidFill>
+                  <a:srgbClr val="000000"/>
+                </a:solidFill>
+              </a:defRPr>
+            </a:pPr>
+            <a:r>
+              <a:t>完整端到端验证: AI Agent → 校验 → 存证</a:t>
+            </a:r>
+          </a:p>
+        </p:txBody>
+      </p:sp>
+      <p:sp>
+        <p:nvSpPr>
+          <p:cNvPr id="3" name="TextBox 2"/>
+          <p:cNvSpPr txBox="1"/>
+          <p:nvPr/>
+        </p:nvSpPr>
+        <p:spPr>
+          <a:xfrm>
+            <a:off x="571500" y="780000"/>
+            <a:ext cx="11049000" cy="250000"/>
+          </a:xfrm>
+          <a:prstGeom prst="rect">
+            <a:avLst/>
+          </a:prstGeom>
+          <a:noFill/>
+        </p:spPr>
+        <p:txBody>
+          <a:bodyPr wrap="square">
+            <a:spAutoFit/>
+          </a:bodyPr>
+          <a:lstStyle/>
+          <a:p>
+            <a:pPr>
+              <a:defRPr sz="1200" b="0">
+                <a:solidFill>
+                  <a:srgbClr val="656D76"/>
+                </a:solidFill>
+              </a:defRPr>
+            </a:pPr>
+            <a:r>
+              <a:t>DeepSeek API · ElizaOS · Chiron L1 · Sepolia → 区块 11078125</a:t>
+            </a:r>
+          </a:p>
+        </p:txBody>
+      </p:sp>
+      <p:sp>
+        <p:nvSpPr>
+          <p:cNvPr id="4" name="Rectangle 3"/>
+          <p:cNvSpPr/>
+          <p:nvPr/>
+        </p:nvSpPr>
+        <p:spPr>
+          <a:xfrm>
+            <a:off x="571500" y="1200000"/>
+            <a:ext cx="5800000" cy="470000"/>
+          </a:xfrm>
+          <a:prstGeom prst="rect">
+            <a:avLst/>
+          </a:prstGeom>
+          <a:solidFill>
+            <a:srgbClr val="FFFFFF"/>
+          </a:solidFill>
+          <a:ln w="6350">
+            <a:solidFill>
+              <a:srgbClr val="E1E4E8"/>
+            </a:solidFill>
+          </a:ln>
+        </p:spPr>
+        <p:style>
+          <a:lnRef idx="1">
+            <a:schemeClr val="accent1"/>
+          </a:lnRef>
+          <a:fillRef idx="3">
+            <a:schemeClr val="accent1"/>
+          </a:fillRef>
+          <a:effectRef idx="2">
+            <a:schemeClr val="accent1"/>
+          </a:effectRef>
+          <a:fontRef idx="minor">
+            <a:schemeClr val="lt1"/>
+          </a:fontRef>
+        </p:style>
+        <p:txBody>
+          <a:bodyPr rtlCol="0" anchor="ctr"/>
+          <a:lstStyle/>
+          <a:p>
+            <a:pPr algn="ctr"/>
+          </a:p>
+        </p:txBody>
+      </p:sp>
+      <p:sp>
+        <p:nvSpPr>
+          <p:cNvPr id="5" name="TextBox 4"/>
+          <p:cNvSpPr txBox="1"/>
+          <p:nvPr/>
+        </p:nvSpPr>
+        <p:spPr>
+          <a:xfrm>
+            <a:off x="691500" y="1250000"/>
+            <a:ext cx="5600000" cy="250000"/>
+          </a:xfrm>
+          <a:prstGeom prst="rect">
+            <a:avLst/>
+          </a:prstGeom>
+          <a:noFill/>
+        </p:spPr>
+        <p:txBody>
+          <a:bodyPr wrap="square">
+            <a:spAutoFit/>
+          </a:bodyPr>
+          <a:lstStyle/>
+          <a:p>
+            <a:pPr>
+              <a:defRPr sz="1300" b="1">
+                <a:solidFill>
+                  <a:srgbClr val="1F2328"/>
+                </a:solidFill>
+              </a:defRPr>
+            </a:pPr>
+            <a:r>
+              <a:t>🧑 用户</a:t>
+            </a:r>
+          </a:p>
+        </p:txBody>
+      </p:sp>
+      <p:sp>
+        <p:nvSpPr>
+          <p:cNvPr id="6" name="TextBox 5"/>
+          <p:cNvSpPr txBox="1"/>
+          <p:nvPr/>
+        </p:nvSpPr>
+        <p:spPr>
+          <a:xfrm>
+            <a:off x="691500" y="1440000"/>
+            <a:ext cx="5600000" cy="200000"/>
+          </a:xfrm>
+          <a:prstGeom prst="rect">
+            <a:avLst/>
+          </a:prstGeom>
+          <a:noFill/>
+        </p:spPr>
+        <p:txBody>
+          <a:bodyPr wrap="square">
+            <a:spAutoFit/>
+          </a:bodyPr>
+          <a:lstStyle/>
+          <a:p>
+            <a:pPr>
+              <a:defRPr sz="1000" b="0">
+                <a:solidFill>
+                  <a:srgbClr val="656D76"/>
+                </a:solidFill>
+              </a:defRPr>
+            </a:pPr>
+            <a:r>
+              <a:t>帮我用100 USDC换WETH，走Uniswap V3</a:t>
+            </a:r>
+          </a:p>
+        </p:txBody>
+      </p:sp>
+      <p:sp>
+        <p:nvSpPr>
+          <p:cNvPr id="7" name="Rectangle 6"/>
+          <p:cNvSpPr/>
+          <p:nvPr/>
+        </p:nvSpPr>
+        <p:spPr>
+          <a:xfrm>
+            <a:off x="571500" y="1720000"/>
+            <a:ext cx="5800000" cy="470000"/>
+          </a:xfrm>
+          <a:prstGeom prst="rect">
+            <a:avLst/>
+          </a:prstGeom>
+          <a:solidFill>
+            <a:srgbClr val="FFFFFF"/>
+          </a:solidFill>
+          <a:ln w="6350">
+            <a:solidFill>
+              <a:srgbClr val="E1E4E8"/>
+            </a:solidFill>
+          </a:ln>
+        </p:spPr>
+        <p:style>
+          <a:lnRef idx="1">
+            <a:schemeClr val="accent1"/>
+          </a:lnRef>
+          <a:fillRef idx="3">
+            <a:schemeClr val="accent1"/>
+          </a:fillRef>
+          <a:effectRef idx="2">
+            <a:schemeClr val="accent1"/>
+          </a:effectRef>
+          <a:fontRef idx="minor">
+            <a:schemeClr val="lt1"/>
+          </a:fontRef>
+        </p:style>
+        <p:txBody>
+          <a:bodyPr rtlCol="0" anchor="ctr"/>
+          <a:lstStyle/>
+          <a:p>
+            <a:pPr algn="ctr"/>
+          </a:p>
+        </p:txBody>
+      </p:sp>
+      <p:sp>
+        <p:nvSpPr>
+          <p:cNvPr id="8" name="TextBox 7"/>
+          <p:cNvSpPr txBox="1"/>
+          <p:nvPr/>
+        </p:nvSpPr>
+        <p:spPr>
+          <a:xfrm>
+            <a:off x="691500" y="1770000"/>
+            <a:ext cx="5600000" cy="250000"/>
+          </a:xfrm>
+          <a:prstGeom prst="rect">
+            <a:avLst/>
+          </a:prstGeom>
+          <a:noFill/>
+        </p:spPr>
+        <p:txBody>
+          <a:bodyPr wrap="square">
+            <a:spAutoFit/>
+          </a:bodyPr>
+          <a:lstStyle/>
+          <a:p>
+            <a:pPr>
+              <a:defRPr sz="1300" b="1">
+                <a:solidFill>
+                  <a:srgbClr val="1F2328"/>
+                </a:solidFill>
+              </a:defRPr>
+            </a:pPr>
+            <a:r>
+              <a:t>🤖 DeepSeek</a:t>
+            </a:r>
+          </a:p>
+        </p:txBody>
+      </p:sp>
+      <p:sp>
+        <p:nvSpPr>
+          <p:cNvPr id="9" name="TextBox 8"/>
+          <p:cNvSpPr txBox="1"/>
+          <p:nvPr/>
+        </p:nvSpPr>
+        <p:spPr>
+          <a:xfrm>
+            <a:off x="691500" y="1960000"/>
+            <a:ext cx="5600000" cy="200000"/>
+          </a:xfrm>
+          <a:prstGeom prst="rect">
+            <a:avLst/>
+          </a:prstGeom>
+          <a:noFill/>
+        </p:spPr>
+        <p:txBody>
+          <a:bodyPr wrap="square">
+            <a:spAutoFit/>
+          </a:bodyPr>
+          <a:lstStyle/>
+          <a:p>
+            <a:pPr>
+              <a:defRPr sz="1000" b="0">
+                <a:solidFill>
+                  <a:srgbClr val="656D76"/>
+                </a:solidFill>
+              </a:defRPr>
+            </a:pPr>
+            <a:r>
+              <a:t>真实LLM API → 生成 Intent + 交易参数</a:t>
+            </a:r>
+          </a:p>
+        </p:txBody>
+      </p:sp>
+      <p:sp>
+        <p:nvSpPr>
+          <p:cNvPr id="10" name="Rectangle 9"/>
+          <p:cNvSpPr/>
+          <p:nvPr/>
+        </p:nvSpPr>
+        <p:spPr>
+          <a:xfrm>
+            <a:off x="571500" y="2240000"/>
+            <a:ext cx="5800000" cy="470000"/>
+          </a:xfrm>
+          <a:prstGeom prst="rect">
+            <a:avLst/>
+          </a:prstGeom>
+          <a:solidFill>
+            <a:srgbClr val="FFFFFF"/>
+          </a:solidFill>
+          <a:ln w="6350">
+            <a:solidFill>
+              <a:srgbClr val="E1E4E8"/>
+            </a:solidFill>
+          </a:ln>
+        </p:spPr>
+        <p:style>
+          <a:lnRef idx="1">
+            <a:schemeClr val="accent1"/>
+          </a:lnRef>
+          <a:fillRef idx="3">
+            <a:schemeClr val="accent1"/>
+          </a:fillRef>
+          <a:effectRef idx="2">
+            <a:schemeClr val="accent1"/>
+          </a:effectRef>
+          <a:fontRef idx="minor">
+            <a:schemeClr val="lt1"/>
+          </a:fontRef>
+        </p:style>
+        <p:txBody>
+          <a:bodyPr rtlCol="0" anchor="ctr"/>
+          <a:lstStyle/>
+          <a:p>
+            <a:pPr algn="ctr"/>
+          </a:p>
+        </p:txBody>
+      </p:sp>
+      <p:sp>
+        <p:nvSpPr>
+          <p:cNvPr id="11" name="TextBox 10"/>
+          <p:cNvSpPr txBox="1"/>
+          <p:nvPr/>
+        </p:nvSpPr>
+        <p:spPr>
+          <a:xfrm>
+            <a:off x="691500" y="2290000"/>
+            <a:ext cx="5600000" cy="250000"/>
+          </a:xfrm>
+          <a:prstGeom prst="rect">
+            <a:avLst/>
+          </a:prstGeom>
+          <a:noFill/>
+        </p:spPr>
+        <p:txBody>
+          <a:bodyPr wrap="square">
+            <a:spAutoFit/>
+          </a:bodyPr>
+          <a:lstStyle/>
+          <a:p>
+            <a:pPr>
+              <a:defRPr sz="1300" b="1">
+                <a:solidFill>
+                  <a:srgbClr val="1F2328"/>
+                </a:solidFill>
+              </a:defRPr>
+            </a:pPr>
+            <a:r>
+              <a:t>🔄 ElizaOS</a:t>
+            </a:r>
+          </a:p>
+        </p:txBody>
+      </p:sp>
+      <p:sp>
+        <p:nvSpPr>
+          <p:cNvPr id="12" name="TextBox 11"/>
+          <p:cNvSpPr txBox="1"/>
+          <p:nvPr/>
+        </p:nvSpPr>
+        <p:spPr>
+          <a:xfrm>
+            <a:off x="691500" y="2480000"/>
+            <a:ext cx="5600000" cy="200000"/>
+          </a:xfrm>
+          <a:prstGeom prst="rect">
+            <a:avLst/>
+          </a:prstGeom>
+          <a:noFill/>
+        </p:spPr>
+        <p:txBody>
+          <a:bodyPr wrap="square">
+            <a:spAutoFit/>
+          </a:bodyPr>
+          <a:lstStyle/>
+          <a:p>
+            <a:pPr>
+              <a:defRPr sz="1000" b="0">
+                <a:solidFill>
+                  <a:srgbClr val="656D76"/>
+                </a:solidFill>
+              </a:defRPr>
+            </a:pPr>
+            <a:r>
+              <a:t>runtime.on(beforeTransaction) 事件拦截</a:t>
+            </a:r>
+          </a:p>
+        </p:txBody>
+      </p:sp>
+      <p:sp>
+        <p:nvSpPr>
+          <p:cNvPr id="13" name="Rectangle 12"/>
+          <p:cNvSpPr/>
+          <p:nvPr/>
+        </p:nvSpPr>
+        <p:spPr>
+          <a:xfrm>
+            <a:off x="571500" y="2760000"/>
+            <a:ext cx="5800000" cy="470000"/>
+          </a:xfrm>
+          <a:prstGeom prst="rect">
+            <a:avLst/>
+          </a:prstGeom>
+          <a:solidFill>
+            <a:srgbClr val="FFFFFF"/>
+          </a:solidFill>
+          <a:ln w="6350">
+            <a:solidFill>
+              <a:srgbClr val="E1E4E8"/>
+            </a:solidFill>
+          </a:ln>
+        </p:spPr>
+        <p:style>
+          <a:lnRef idx="1">
+            <a:schemeClr val="accent1"/>
+          </a:lnRef>
+          <a:fillRef idx="3">
+            <a:schemeClr val="accent1"/>
+          </a:fillRef>
+          <a:effectRef idx="2">
+            <a:schemeClr val="accent1"/>
+          </a:effectRef>
+          <a:fontRef idx="minor">
+            <a:schemeClr val="lt1"/>
+          </a:fontRef>
+        </p:style>
+        <p:txBody>
+          <a:bodyPr rtlCol="0" anchor="ctr"/>
+          <a:lstStyle/>
+          <a:p>
+            <a:pPr algn="ctr"/>
+          </a:p>
+        </p:txBody>
+      </p:sp>
+      <p:sp>
+        <p:nvSpPr>
+          <p:cNvPr id="14" name="TextBox 13"/>
+          <p:cNvSpPr txBox="1"/>
+          <p:nvPr/>
+        </p:nvSpPr>
+        <p:spPr>
+          <a:xfrm>
+            <a:off x="691500" y="2810000"/>
+            <a:ext cx="5600000" cy="250000"/>
+          </a:xfrm>
+          <a:prstGeom prst="rect">
+            <a:avLst/>
+          </a:prstGeom>
+          <a:noFill/>
+        </p:spPr>
+        <p:txBody>
+          <a:bodyPr wrap="square">
+            <a:spAutoFit/>
+          </a:bodyPr>
+          <a:lstStyle/>
+          <a:p>
+            <a:pPr>
+              <a:defRPr sz="1300" b="1">
+                <a:solidFill>
+                  <a:srgbClr val="1F2328"/>
+                </a:solidFill>
+              </a:defRPr>
+            </a:pPr>
+            <a:r>
+              <a:t>🛡️ Chiron L1</a:t>
+            </a:r>
+          </a:p>
+        </p:txBody>
+      </p:sp>
+      <p:sp>
+        <p:nvSpPr>
+          <p:cNvPr id="15" name="TextBox 14"/>
+          <p:cNvSpPr txBox="1"/>
+          <p:nvPr/>
+        </p:nvSpPr>
+        <p:spPr>
+          <a:xfrm>
+            <a:off x="691500" y="3000000"/>
+            <a:ext cx="5600000" cy="200000"/>
+          </a:xfrm>
+          <a:prstGeom prst="rect">
+            <a:avLst/>
+          </a:prstGeom>
+          <a:noFill/>
+        </p:spPr>
+        <p:txBody>
+          <a:bodyPr wrap="square">
+            <a:spAutoFit/>
+          </a:bodyPr>
+          <a:lstStyle/>
+          <a:p>
+            <a:pPr>
+              <a:defRPr sz="1000" b="0">
+                <a:solidFill>
+                  <a:srgbClr val="656D76"/>
+                </a:solidFill>
+              </a:defRPr>
+            </a:pPr>
+            <a:r>
+              <a:t>R1~R6 → ✅ 全部通过 → 放行</a:t>
+            </a:r>
+          </a:p>
+        </p:txBody>
+      </p:sp>
+      <p:sp>
+        <p:nvSpPr>
+          <p:cNvPr id="16" name="Rectangle 15"/>
+          <p:cNvSpPr/>
+          <p:nvPr/>
+        </p:nvSpPr>
+        <p:spPr>
+          <a:xfrm>
+            <a:off x="571500" y="3280000"/>
+            <a:ext cx="5800000" cy="470000"/>
+          </a:xfrm>
+          <a:prstGeom prst="rect">
+            <a:avLst/>
+          </a:prstGeom>
+          <a:solidFill>
+            <a:srgbClr val="FFFFFF"/>
+          </a:solidFill>
+          <a:ln w="6350">
+            <a:solidFill>
+              <a:srgbClr val="E1E4E8"/>
+            </a:solidFill>
+          </a:ln>
+        </p:spPr>
+        <p:style>
+          <a:lnRef idx="1">
+            <a:schemeClr val="accent1"/>
+          </a:lnRef>
+          <a:fillRef idx="3">
+            <a:schemeClr val="accent1"/>
+          </a:fillRef>
+          <a:effectRef idx="2">
+            <a:schemeClr val="accent1"/>
+          </a:effectRef>
+          <a:fontRef idx="minor">
+            <a:schemeClr val="lt1"/>
+          </a:fontRef>
+        </p:style>
+        <p:txBody>
+          <a:bodyPr rtlCol="0" anchor="ctr"/>
+          <a:lstStyle/>
+          <a:p>
+            <a:pPr algn="ctr"/>
+          </a:p>
+        </p:txBody>
+      </p:sp>
+      <p:sp>
+        <p:nvSpPr>
+          <p:cNvPr id="17" name="TextBox 16"/>
+          <p:cNvSpPr txBox="1"/>
+          <p:nvPr/>
+        </p:nvSpPr>
+        <p:spPr>
+          <a:xfrm>
+            <a:off x="691500" y="3330000"/>
+            <a:ext cx="5600000" cy="250000"/>
+          </a:xfrm>
+          <a:prstGeom prst="rect">
+            <a:avLst/>
+          </a:prstGeom>
+          <a:noFill/>
+        </p:spPr>
+        <p:txBody>
+          <a:bodyPr wrap="square">
+            <a:spAutoFit/>
+          </a:bodyPr>
+          <a:lstStyle/>
+          <a:p>
+            <a:pPr>
+              <a:defRPr sz="1300" b="1">
+                <a:solidFill>
+                  <a:srgbClr val="1F2328"/>
+                </a:solidFill>
+              </a:defRPr>
+            </a:pPr>
+            <a:r>
+              <a:t>⛓️ Sepolia</a:t>
+            </a:r>
+          </a:p>
+        </p:txBody>
+      </p:sp>
+      <p:sp>
+        <p:nvSpPr>
+          <p:cNvPr id="18" name="TextBox 17"/>
+          <p:cNvSpPr txBox="1"/>
+          <p:nvPr/>
+        </p:nvSpPr>
+        <p:spPr>
+          <a:xfrm>
+            <a:off x="691500" y="3520000"/>
+            <a:ext cx="5600000" cy="200000"/>
+          </a:xfrm>
+          <a:prstGeom prst="rect">
+            <a:avLst/>
+          </a:prstGeom>
+          <a:noFill/>
+        </p:spPr>
+        <p:txBody>
+          <a:bodyPr wrap="square">
+            <a:spAutoFit/>
+          </a:bodyPr>
+          <a:lstStyle/>
+          <a:p>
+            <a:pPr>
+              <a:defRPr sz="1000" b="0">
+                <a:solidFill>
+                  <a:srgbClr val="656D76"/>
+                </a:solidFill>
+              </a:defRPr>
+            </a:pPr>
+            <a:r>
+              <a:t>storeReceipt → 区块 11078125 确认</a:t>
+            </a:r>
+          </a:p>
+        </p:txBody>
+      </p:sp>
+      <p:sp>
+        <p:nvSpPr>
+          <p:cNvPr id="19" name="TextBox 18"/>
+          <p:cNvSpPr txBox="1"/>
+          <p:nvPr/>
+        </p:nvSpPr>
+        <p:spPr>
+          <a:xfrm>
+            <a:off x="6600000" y="1200000"/>
+            <a:ext cx="5200000" cy="300000"/>
+          </a:xfrm>
+          <a:prstGeom prst="rect">
+            <a:avLst/>
+          </a:prstGeom>
+          <a:noFill/>
+        </p:spPr>
+        <p:txBody>
+          <a:bodyPr wrap="square">
+            <a:spAutoFit/>
+          </a:bodyPr>
+          <a:lstStyle/>
+          <a:p>
+            <a:pPr>
+              <a:defRPr sz="1600" b="1">
+                <a:solidFill>
+                  <a:srgbClr val="1A7F37"/>
+                </a:solidFill>
+              </a:defRPr>
+            </a:pPr>
+            <a:r>
+              <a:t>L1 校验结果</a:t>
+            </a:r>
+          </a:p>
+        </p:txBody>
+      </p:sp>
+      <p:sp>
+        <p:nvSpPr>
+          <p:cNvPr id="20" name="Rectangle 19"/>
+          <p:cNvSpPr/>
+          <p:nvPr/>
+        </p:nvSpPr>
+        <p:spPr>
+          <a:xfrm>
+            <a:off x="6600000" y="1550000"/>
+            <a:ext cx="5200000" cy="300000"/>
+          </a:xfrm>
+          <a:prstGeom prst="rect">
+            <a:avLst/>
+          </a:prstGeom>
+          <a:solidFill>
+            <a:srgbClr val="F6F8FA"/>
+          </a:solidFill>
+          <a:ln w="6350">
+            <a:solidFill>
+              <a:srgbClr val="E1E4E8"/>
+            </a:solidFill>
+          </a:ln>
+        </p:spPr>
+        <p:style>
+          <a:lnRef idx="1">
+            <a:schemeClr val="accent1"/>
+          </a:lnRef>
+          <a:fillRef idx="3">
+            <a:schemeClr val="accent1"/>
+          </a:fillRef>
+          <a:effectRef idx="2">
+            <a:schemeClr val="accent1"/>
+          </a:effectRef>
+          <a:fontRef idx="minor">
+            <a:schemeClr val="lt1"/>
+          </a:fontRef>
+        </p:style>
+        <p:txBody>
+          <a:bodyPr rtlCol="0" anchor="ctr"/>
+          <a:lstStyle/>
+          <a:p>
+            <a:pPr algn="ctr"/>
+          </a:p>
+        </p:txBody>
+      </p:sp>
+      <p:sp>
+        <p:nvSpPr>
+          <p:cNvPr id="21" name="TextBox 20"/>
+          <p:cNvSpPr txBox="1"/>
+          <p:nvPr/>
+        </p:nvSpPr>
+        <p:spPr>
+          <a:xfrm>
+            <a:off x="6700000" y="1600000"/>
+            <a:ext cx="900000" cy="200000"/>
+          </a:xfrm>
+          <a:prstGeom prst="rect">
+            <a:avLst/>
+          </a:prstGeom>
+          <a:noFill/>
+        </p:spPr>
+        <p:txBody>
+          <a:bodyPr wrap="square">
+            <a:spAutoFit/>
+          </a:bodyPr>
+          <a:lstStyle/>
+          <a:p>
+            <a:pPr>
+              <a:defRPr sz="1050" b="1">
+                <a:solidFill>
+                  <a:srgbClr val="1F2328"/>
+                </a:solidFill>
+              </a:defRPr>
+            </a:pPr>
+            <a:r>
+              <a:t>R1</a:t>
+            </a:r>
+          </a:p>
+        </p:txBody>
+      </p:sp>
+      <p:sp>
+        <p:nvSpPr>
+          <p:cNvPr id="22" name="TextBox 21"/>
+          <p:cNvSpPr txBox="1"/>
+          <p:nvPr/>
+        </p:nvSpPr>
+        <p:spPr>
+          <a:xfrm>
+            <a:off x="7700000" y="1600000"/>
+            <a:ext cx="3500000" cy="200000"/>
+          </a:xfrm>
+          <a:prstGeom prst="rect">
+            <a:avLst/>
+          </a:prstGeom>
+          <a:noFill/>
+        </p:spPr>
+        <p:txBody>
+          <a:bodyPr wrap="square">
+            <a:spAutoFit/>
+          </a:bodyPr>
+          <a:lstStyle/>
+          <a:p>
+            <a:pPr>
+              <a:defRPr sz="1000" b="0">
+                <a:solidFill>
+                  <a:srgbClr val="656D76"/>
+                </a:solidFill>
+              </a:defRPr>
+            </a:pPr>
+            <a:r>
+              <a:t>Uniswap V3 Router</a:t>
+            </a:r>
+          </a:p>
+        </p:txBody>
+      </p:sp>
+      <p:sp>
+        <p:nvSpPr>
+          <p:cNvPr id="23" name="TextBox 22"/>
+          <p:cNvSpPr txBox="1"/>
+          <p:nvPr/>
+        </p:nvSpPr>
+        <p:spPr>
+          <a:xfrm>
+            <a:off x="11500000" y="1600000"/>
+            <a:ext cx="300000" cy="200000"/>
+          </a:xfrm>
+          <a:prstGeom prst="rect">
+            <a:avLst/>
+          </a:prstGeom>
+          <a:noFill/>
+        </p:spPr>
+        <p:txBody>
+          <a:bodyPr wrap="square">
+            <a:spAutoFit/>
+          </a:bodyPr>
+          <a:lstStyle/>
+          <a:p>
+            <a:pPr>
+              <a:defRPr sz="1300" b="1">
+                <a:solidFill>
+                  <a:srgbClr val="1A7F37"/>
+                </a:solidFill>
+              </a:defRPr>
+            </a:pPr>
+            <a:r>
+              <a:t>✓</a:t>
+            </a:r>
+          </a:p>
+        </p:txBody>
+      </p:sp>
+      <p:sp>
+        <p:nvSpPr>
+          <p:cNvPr id="24" name="Rectangle 23"/>
+          <p:cNvSpPr/>
+          <p:nvPr/>
+        </p:nvSpPr>
+        <p:spPr>
+          <a:xfrm>
+            <a:off x="6600000" y="1890000"/>
+            <a:ext cx="5200000" cy="300000"/>
+          </a:xfrm>
+          <a:prstGeom prst="rect">
+            <a:avLst/>
+          </a:prstGeom>
+          <a:solidFill>
+            <a:srgbClr val="FFFFFF"/>
+          </a:solidFill>
+          <a:ln w="6350">
+            <a:solidFill>
+              <a:srgbClr val="E1E4E8"/>
+            </a:solidFill>
+          </a:ln>
+        </p:spPr>
+        <p:style>
+          <a:lnRef idx="1">
+            <a:schemeClr val="accent1"/>
+          </a:lnRef>
+          <a:fillRef idx="3">
+            <a:schemeClr val="accent1"/>
+          </a:fillRef>
+          <a:effectRef idx="2">
+            <a:schemeClr val="accent1"/>
+          </a:effectRef>
+          <a:fontRef idx="minor">
+            <a:schemeClr val="lt1"/>
+          </a:fontRef>
+        </p:style>
+        <p:txBody>
+          <a:bodyPr rtlCol="0" anchor="ctr"/>
+          <a:lstStyle/>
+          <a:p>
+            <a:pPr algn="ctr"/>
+          </a:p>
+        </p:txBody>
+      </p:sp>
+      <p:sp>
+        <p:nvSpPr>
+          <p:cNvPr id="25" name="TextBox 24"/>
+          <p:cNvSpPr txBox="1"/>
+          <p:nvPr/>
+        </p:nvSpPr>
+        <p:spPr>
+          <a:xfrm>
+            <a:off x="6700000" y="1940000"/>
+            <a:ext cx="900000" cy="200000"/>
+          </a:xfrm>
+          <a:prstGeom prst="rect">
+            <a:avLst/>
+          </a:prstGeom>
+          <a:noFill/>
+        </p:spPr>
+        <p:txBody>
+          <a:bodyPr wrap="square">
+            <a:spAutoFit/>
+          </a:bodyPr>
+          <a:lstStyle/>
+          <a:p>
+            <a:pPr>
+              <a:defRPr sz="1050" b="1">
+                <a:solidFill>
+                  <a:srgbClr val="1F2328"/>
+                </a:solidFill>
+              </a:defRPr>
+            </a:pPr>
+            <a:r>
+              <a:t>R2</a:t>
+            </a:r>
+          </a:p>
+        </p:txBody>
+      </p:sp>
+      <p:sp>
+        <p:nvSpPr>
+          <p:cNvPr id="26" name="TextBox 25"/>
+          <p:cNvSpPr txBox="1"/>
+          <p:nvPr/>
+        </p:nvSpPr>
+        <p:spPr>
+          <a:xfrm>
+            <a:off x="7700000" y="1940000"/>
+            <a:ext cx="3500000" cy="200000"/>
+          </a:xfrm>
+          <a:prstGeom prst="rect">
+            <a:avLst/>
+          </a:prstGeom>
+          <a:noFill/>
+        </p:spPr>
+        <p:txBody>
+          <a:bodyPr wrap="square">
+            <a:spAutoFit/>
+          </a:bodyPr>
+          <a:lstStyle/>
+          <a:p>
+            <a:pPr>
+              <a:defRPr sz="1000" b="0">
+                <a:solidFill>
+                  <a:srgbClr val="656D76"/>
+                </a:solidFill>
+              </a:defRPr>
+            </a:pPr>
+            <a:r>
+              <a:t>exactInputSingle</a:t>
+            </a:r>
+          </a:p>
+        </p:txBody>
+      </p:sp>
+      <p:sp>
+        <p:nvSpPr>
+          <p:cNvPr id="27" name="TextBox 26"/>
+          <p:cNvSpPr txBox="1"/>
+          <p:nvPr/>
+        </p:nvSpPr>
+        <p:spPr>
+          <a:xfrm>
+            <a:off x="11500000" y="1940000"/>
+            <a:ext cx="300000" cy="200000"/>
+          </a:xfrm>
+          <a:prstGeom prst="rect">
+            <a:avLst/>
+          </a:prstGeom>
+          <a:noFill/>
+        </p:spPr>
+        <p:txBody>
+          <a:bodyPr wrap="square">
+            <a:spAutoFit/>
+          </a:bodyPr>
+          <a:lstStyle/>
+          <a:p>
+            <a:pPr>
+              <a:defRPr sz="1300" b="1">
+                <a:solidFill>
+                  <a:srgbClr val="1A7F37"/>
+                </a:solidFill>
+              </a:defRPr>
+            </a:pPr>
+            <a:r>
+              <a:t>✓</a:t>
+            </a:r>
+          </a:p>
+        </p:txBody>
+      </p:sp>
+      <p:sp>
+        <p:nvSpPr>
+          <p:cNvPr id="28" name="Rectangle 27"/>
+          <p:cNvSpPr/>
+          <p:nvPr/>
+        </p:nvSpPr>
+        <p:spPr>
+          <a:xfrm>
+            <a:off x="6600000" y="2230000"/>
+            <a:ext cx="5200000" cy="300000"/>
+          </a:xfrm>
+          <a:prstGeom prst="rect">
+            <a:avLst/>
+          </a:prstGeom>
+          <a:solidFill>
+            <a:srgbClr val="F6F8FA"/>
+          </a:solidFill>
+          <a:ln w="6350">
+            <a:solidFill>
+              <a:srgbClr val="E1E4E8"/>
+            </a:solidFill>
+          </a:ln>
+        </p:spPr>
+        <p:style>
+          <a:lnRef idx="1">
+            <a:schemeClr val="accent1"/>
+          </a:lnRef>
+          <a:fillRef idx="3">
+            <a:schemeClr val="accent1"/>
+          </a:fillRef>
+          <a:effectRef idx="2">
+            <a:schemeClr val="accent1"/>
+          </a:effectRef>
+          <a:fontRef idx="minor">
+            <a:schemeClr val="lt1"/>
+          </a:fontRef>
+        </p:style>
+        <p:txBody>
+          <a:bodyPr rtlCol="0" anchor="ctr"/>
+          <a:lstStyle/>
+          <a:p>
+            <a:pPr algn="ctr"/>
+          </a:p>
+        </p:txBody>
+      </p:sp>
+      <p:sp>
+        <p:nvSpPr>
+          <p:cNvPr id="29" name="TextBox 28"/>
+          <p:cNvSpPr txBox="1"/>
+          <p:nvPr/>
+        </p:nvSpPr>
+        <p:spPr>
+          <a:xfrm>
+            <a:off x="6700000" y="2280000"/>
+            <a:ext cx="900000" cy="200000"/>
+          </a:xfrm>
+          <a:prstGeom prst="rect">
+            <a:avLst/>
+          </a:prstGeom>
+          <a:noFill/>
+        </p:spPr>
+        <p:txBody>
+          <a:bodyPr wrap="square">
+            <a:spAutoFit/>
+          </a:bodyPr>
+          <a:lstStyle/>
+          <a:p>
+            <a:pPr>
+              <a:defRPr sz="1050" b="1">
+                <a:solidFill>
+                  <a:srgbClr val="1F2328"/>
+                </a:solidFill>
+              </a:defRPr>
+            </a:pPr>
+            <a:r>
+              <a:t>R3</a:t>
+            </a:r>
+          </a:p>
+        </p:txBody>
+      </p:sp>
+      <p:sp>
+        <p:nvSpPr>
+          <p:cNvPr id="30" name="TextBox 29"/>
+          <p:cNvSpPr txBox="1"/>
+          <p:nvPr/>
+        </p:nvSpPr>
+        <p:spPr>
+          <a:xfrm>
+            <a:off x="7700000" y="2280000"/>
+            <a:ext cx="3500000" cy="200000"/>
+          </a:xfrm>
+          <a:prstGeom prst="rect">
+            <a:avLst/>
+          </a:prstGeom>
+          <a:noFill/>
+        </p:spPr>
+        <p:txBody>
+          <a:bodyPr wrap="square">
+            <a:spAutoFit/>
+          </a:bodyPr>
+          <a:lstStyle/>
+          <a:p>
+            <a:pPr>
+              <a:defRPr sz="1000" b="0">
+                <a:solidFill>
+                  <a:srgbClr val="656D76"/>
+                </a:solidFill>
+              </a:defRPr>
+            </a:pPr>
+            <a:r>
+              <a:t>USDC + WETH</a:t>
+            </a:r>
+          </a:p>
+        </p:txBody>
+      </p:sp>
+      <p:sp>
+        <p:nvSpPr>
+          <p:cNvPr id="31" name="TextBox 30"/>
+          <p:cNvSpPr txBox="1"/>
+          <p:nvPr/>
+        </p:nvSpPr>
+        <p:spPr>
+          <a:xfrm>
+            <a:off x="11500000" y="2280000"/>
+            <a:ext cx="300000" cy="200000"/>
+          </a:xfrm>
+          <a:prstGeom prst="rect">
+            <a:avLst/>
+          </a:prstGeom>
+          <a:noFill/>
+        </p:spPr>
+        <p:txBody>
+          <a:bodyPr wrap="square">
+            <a:spAutoFit/>
+          </a:bodyPr>
+          <a:lstStyle/>
+          <a:p>
+            <a:pPr>
+              <a:defRPr sz="1300" b="1">
+                <a:solidFill>
+                  <a:srgbClr val="1A7F37"/>
+                </a:solidFill>
+              </a:defRPr>
+            </a:pPr>
+            <a:r>
+              <a:t>✓</a:t>
+            </a:r>
+          </a:p>
+        </p:txBody>
+      </p:sp>
+      <p:sp>
+        <p:nvSpPr>
+          <p:cNvPr id="32" name="Rectangle 31"/>
+          <p:cNvSpPr/>
+          <p:nvPr/>
+        </p:nvSpPr>
+        <p:spPr>
+          <a:xfrm>
+            <a:off x="6600000" y="2570000"/>
+            <a:ext cx="5200000" cy="300000"/>
+          </a:xfrm>
+          <a:prstGeom prst="rect">
+            <a:avLst/>
+          </a:prstGeom>
+          <a:solidFill>
+            <a:srgbClr val="FFFFFF"/>
+          </a:solidFill>
+          <a:ln w="6350">
+            <a:solidFill>
+              <a:srgbClr val="E1E4E8"/>
+            </a:solidFill>
+          </a:ln>
+        </p:spPr>
+        <p:style>
+          <a:lnRef idx="1">
+            <a:schemeClr val="accent1"/>
+          </a:lnRef>
+          <a:fillRef idx="3">
+            <a:schemeClr val="accent1"/>
+          </a:fillRef>
+          <a:effectRef idx="2">
+            <a:schemeClr val="accent1"/>
+          </a:effectRef>
+          <a:fontRef idx="minor">
+            <a:schemeClr val="lt1"/>
+          </a:fontRef>
+        </p:style>
+        <p:txBody>
+          <a:bodyPr rtlCol="0" anchor="ctr"/>
+          <a:lstStyle/>
+          <a:p>
+            <a:pPr algn="ctr"/>
+          </a:p>
+        </p:txBody>
+      </p:sp>
+      <p:sp>
+        <p:nvSpPr>
+          <p:cNvPr id="33" name="TextBox 32"/>
+          <p:cNvSpPr txBox="1"/>
+          <p:nvPr/>
+        </p:nvSpPr>
+        <p:spPr>
+          <a:xfrm>
+            <a:off x="6700000" y="2620000"/>
+            <a:ext cx="900000" cy="200000"/>
+          </a:xfrm>
+          <a:prstGeom prst="rect">
+            <a:avLst/>
+          </a:prstGeom>
+          <a:noFill/>
+        </p:spPr>
+        <p:txBody>
+          <a:bodyPr wrap="square">
+            <a:spAutoFit/>
+          </a:bodyPr>
+          <a:lstStyle/>
+          <a:p>
+            <a:pPr>
+              <a:defRPr sz="1050" b="1">
+                <a:solidFill>
+                  <a:srgbClr val="1F2328"/>
+                </a:solidFill>
+              </a:defRPr>
+            </a:pPr>
+            <a:r>
+              <a:t>R4</a:t>
+            </a:r>
+          </a:p>
+        </p:txBody>
+      </p:sp>
+      <p:sp>
+        <p:nvSpPr>
+          <p:cNvPr id="34" name="TextBox 33"/>
+          <p:cNvSpPr txBox="1"/>
+          <p:nvPr/>
+        </p:nvSpPr>
+        <p:spPr>
+          <a:xfrm>
+            <a:off x="7700000" y="2620000"/>
+            <a:ext cx="3500000" cy="200000"/>
+          </a:xfrm>
+          <a:prstGeom prst="rect">
+            <a:avLst/>
+          </a:prstGeom>
+          <a:noFill/>
+        </p:spPr>
+        <p:txBody>
+          <a:bodyPr wrap="square">
+            <a:spAutoFit/>
+          </a:bodyPr>
+          <a:lstStyle/>
+          <a:p>
+            <a:pPr>
+              <a:defRPr sz="1000" b="0">
+                <a:solidFill>
+                  <a:srgbClr val="656D76"/>
+                </a:solidFill>
+              </a:defRPr>
+            </a:pPr>
+            <a:r>
+              <a:t>100 USDC (±0.5%)</a:t>
+            </a:r>
+          </a:p>
+        </p:txBody>
+      </p:sp>
+      <p:sp>
+        <p:nvSpPr>
+          <p:cNvPr id="35" name="TextBox 34"/>
+          <p:cNvSpPr txBox="1"/>
+          <p:nvPr/>
+        </p:nvSpPr>
+        <p:spPr>
+          <a:xfrm>
+            <a:off x="11500000" y="2620000"/>
+            <a:ext cx="300000" cy="200000"/>
+          </a:xfrm>
+          <a:prstGeom prst="rect">
+            <a:avLst/>
+          </a:prstGeom>
+          <a:noFill/>
+        </p:spPr>
+        <p:txBody>
+          <a:bodyPr wrap="square">
+            <a:spAutoFit/>
+          </a:bodyPr>
+          <a:lstStyle/>
+          <a:p>
+            <a:pPr>
+              <a:defRPr sz="1300" b="1">
+                <a:solidFill>
+                  <a:srgbClr val="1A7F37"/>
+                </a:solidFill>
+              </a:defRPr>
+            </a:pPr>
+            <a:r>
+              <a:t>✓</a:t>
+            </a:r>
+          </a:p>
+        </p:txBody>
+      </p:sp>
+      <p:sp>
+        <p:nvSpPr>
+          <p:cNvPr id="36" name="Rectangle 35"/>
+          <p:cNvSpPr/>
+          <p:nvPr/>
+        </p:nvSpPr>
+        <p:spPr>
+          <a:xfrm>
+            <a:off x="6600000" y="2910000"/>
+            <a:ext cx="5200000" cy="300000"/>
+          </a:xfrm>
+          <a:prstGeom prst="rect">
+            <a:avLst/>
+          </a:prstGeom>
+          <a:solidFill>
+            <a:srgbClr val="F6F8FA"/>
+          </a:solidFill>
+          <a:ln w="6350">
+            <a:solidFill>
+              <a:srgbClr val="E1E4E8"/>
+            </a:solidFill>
+          </a:ln>
+        </p:spPr>
+        <p:style>
+          <a:lnRef idx="1">
+            <a:schemeClr val="accent1"/>
+          </a:lnRef>
+          <a:fillRef idx="3">
+            <a:schemeClr val="accent1"/>
+          </a:fillRef>
+          <a:effectRef idx="2">
+            <a:schemeClr val="accent1"/>
+          </a:effectRef>
+          <a:fontRef idx="minor">
+            <a:schemeClr val="lt1"/>
+          </a:fontRef>
+        </p:style>
+        <p:txBody>
+          <a:bodyPr rtlCol="0" anchor="ctr"/>
+          <a:lstStyle/>
+          <a:p>
+            <a:pPr algn="ctr"/>
+          </a:p>
+        </p:txBody>
+      </p:sp>
+      <p:sp>
+        <p:nvSpPr>
+          <p:cNvPr id="37" name="TextBox 36"/>
+          <p:cNvSpPr txBox="1"/>
+          <p:nvPr/>
+        </p:nvSpPr>
+        <p:spPr>
+          <a:xfrm>
+            <a:off x="6700000" y="2960000"/>
+            <a:ext cx="900000" cy="200000"/>
+          </a:xfrm>
+          <a:prstGeom prst="rect">
+            <a:avLst/>
+          </a:prstGeom>
+          <a:noFill/>
+        </p:spPr>
+        <p:txBody>
+          <a:bodyPr wrap="square">
+            <a:spAutoFit/>
+          </a:bodyPr>
+          <a:lstStyle/>
+          <a:p>
+            <a:pPr>
+              <a:defRPr sz="1050" b="1">
+                <a:solidFill>
+                  <a:srgbClr val="1F2328"/>
+                </a:solidFill>
+              </a:defRPr>
+            </a:pPr>
+            <a:r>
+              <a:t>R5</a:t>
+            </a:r>
+          </a:p>
+        </p:txBody>
+      </p:sp>
+      <p:sp>
+        <p:nvSpPr>
+          <p:cNvPr id="38" name="TextBox 37"/>
+          <p:cNvSpPr txBox="1"/>
+          <p:nvPr/>
+        </p:nvSpPr>
+        <p:spPr>
+          <a:xfrm>
+            <a:off x="7700000" y="2960000"/>
+            <a:ext cx="3500000" cy="200000"/>
+          </a:xfrm>
+          <a:prstGeom prst="rect">
+            <a:avLst/>
+          </a:prstGeom>
+          <a:noFill/>
+        </p:spPr>
+        <p:txBody>
+          <a:bodyPr wrap="square">
+            <a:spAutoFit/>
+          </a:bodyPr>
+          <a:lstStyle/>
+          <a:p>
+            <a:pPr>
+              <a:defRPr sz="1000" b="0">
+                <a:solidFill>
+                  <a:srgbClr val="656D76"/>
+                </a:solidFill>
+              </a:defRPr>
+            </a:pPr>
+            <a:r>
+              <a:t>接收地址一致</a:t>
+            </a:r>
+          </a:p>
+        </p:txBody>
+      </p:sp>
+      <p:sp>
+        <p:nvSpPr>
+          <p:cNvPr id="39" name="TextBox 38"/>
+          <p:cNvSpPr txBox="1"/>
+          <p:nvPr/>
+        </p:nvSpPr>
+        <p:spPr>
+          <a:xfrm>
+            <a:off x="11500000" y="2960000"/>
+            <a:ext cx="300000" cy="200000"/>
+          </a:xfrm>
+          <a:prstGeom prst="rect">
+            <a:avLst/>
+          </a:prstGeom>
+          <a:noFill/>
+        </p:spPr>
+        <p:txBody>
+          <a:bodyPr wrap="square">
+            <a:spAutoFit/>
+          </a:bodyPr>
+          <a:lstStyle/>
+          <a:p>
+            <a:pPr>
+              <a:defRPr sz="1300" b="1">
+                <a:solidFill>
+                  <a:srgbClr val="1A7F37"/>
+                </a:solidFill>
+              </a:defRPr>
+            </a:pPr>
+            <a:r>
+              <a:t>✓</a:t>
+            </a:r>
+          </a:p>
+        </p:txBody>
+      </p:sp>
+      <p:sp>
+        <p:nvSpPr>
+          <p:cNvPr id="40" name="Rectangle 39"/>
+          <p:cNvSpPr/>
+          <p:nvPr/>
+        </p:nvSpPr>
+        <p:spPr>
+          <a:xfrm>
+            <a:off x="6600000" y="3250000"/>
+            <a:ext cx="5200000" cy="300000"/>
+          </a:xfrm>
+          <a:prstGeom prst="rect">
+            <a:avLst/>
+          </a:prstGeom>
+          <a:solidFill>
+            <a:srgbClr val="FFFFFF"/>
+          </a:solidFill>
+          <a:ln w="6350">
+            <a:solidFill>
+              <a:srgbClr val="E1E4E8"/>
+            </a:solidFill>
+          </a:ln>
+        </p:spPr>
+        <p:style>
+          <a:lnRef idx="1">
+            <a:schemeClr val="accent1"/>
+          </a:lnRef>
+          <a:fillRef idx="3">
+            <a:schemeClr val="accent1"/>
+          </a:fillRef>
+          <a:effectRef idx="2">
+            <a:schemeClr val="accent1"/>
+          </a:effectRef>
+          <a:fontRef idx="minor">
+            <a:schemeClr val="lt1"/>
+          </a:fontRef>
+        </p:style>
+        <p:txBody>
+          <a:bodyPr rtlCol="0" anchor="ctr"/>
+          <a:lstStyle/>
+          <a:p>
+            <a:pPr algn="ctr"/>
+          </a:p>
+        </p:txBody>
+      </p:sp>
+      <p:sp>
+        <p:nvSpPr>
+          <p:cNvPr id="41" name="TextBox 40"/>
+          <p:cNvSpPr txBox="1"/>
+          <p:nvPr/>
+        </p:nvSpPr>
+        <p:spPr>
+          <a:xfrm>
+            <a:off x="6700000" y="3300000"/>
+            <a:ext cx="900000" cy="200000"/>
+          </a:xfrm>
+          <a:prstGeom prst="rect">
+            <a:avLst/>
+          </a:prstGeom>
+          <a:noFill/>
+        </p:spPr>
+        <p:txBody>
+          <a:bodyPr wrap="square">
+            <a:spAutoFit/>
+          </a:bodyPr>
+          <a:lstStyle/>
+          <a:p>
+            <a:pPr>
+              <a:defRPr sz="1050" b="1">
+                <a:solidFill>
+                  <a:srgbClr val="1F2328"/>
+                </a:solidFill>
+              </a:defRPr>
+            </a:pPr>
+            <a:r>
+              <a:t>R6</a:t>
+            </a:r>
+          </a:p>
+        </p:txBody>
+      </p:sp>
+      <p:sp>
+        <p:nvSpPr>
+          <p:cNvPr id="42" name="TextBox 41"/>
+          <p:cNvSpPr txBox="1"/>
+          <p:nvPr/>
+        </p:nvSpPr>
+        <p:spPr>
+          <a:xfrm>
+            <a:off x="7700000" y="3300000"/>
+            <a:ext cx="3500000" cy="200000"/>
+          </a:xfrm>
+          <a:prstGeom prst="rect">
+            <a:avLst/>
+          </a:prstGeom>
+          <a:noFill/>
+        </p:spPr>
+        <p:txBody>
+          <a:bodyPr wrap="square">
+            <a:spAutoFit/>
+          </a:bodyPr>
+          <a:lstStyle/>
+          <a:p>
+            <a:pPr>
+              <a:defRPr sz="1000" b="0">
+                <a:solidFill>
+                  <a:srgbClr val="656D76"/>
+                </a:solidFill>
+              </a:defRPr>
+            </a:pPr>
+            <a:r>
+              <a:t>无 delegatecall</a:t>
+            </a:r>
+          </a:p>
+        </p:txBody>
+      </p:sp>
+      <p:sp>
+        <p:nvSpPr>
+          <p:cNvPr id="43" name="TextBox 42"/>
+          <p:cNvSpPr txBox="1"/>
+          <p:nvPr/>
+        </p:nvSpPr>
+        <p:spPr>
+          <a:xfrm>
+            <a:off x="11500000" y="3300000"/>
+            <a:ext cx="300000" cy="200000"/>
+          </a:xfrm>
+          <a:prstGeom prst="rect">
+            <a:avLst/>
+          </a:prstGeom>
+          <a:noFill/>
+        </p:spPr>
+        <p:txBody>
+          <a:bodyPr wrap="square">
+            <a:spAutoFit/>
+          </a:bodyPr>
+          <a:lstStyle/>
+          <a:p>
+            <a:pPr>
+              <a:defRPr sz="1300" b="1">
+                <a:solidFill>
+                  <a:srgbClr val="1A7F37"/>
+                </a:solidFill>
+              </a:defRPr>
+            </a:pPr>
+            <a:r>
+              <a:t>✓</a:t>
+            </a:r>
+          </a:p>
+        </p:txBody>
+      </p:sp>
+      <p:sp>
+        <p:nvSpPr>
+          <p:cNvPr id="44" name="Rectangle 43"/>
+          <p:cNvSpPr/>
+          <p:nvPr/>
+        </p:nvSpPr>
+        <p:spPr>
+          <a:xfrm>
+            <a:off x="571500" y="5200000"/>
+            <a:ext cx="11049000" cy="750000"/>
+          </a:xfrm>
+          <a:prstGeom prst="rect">
+            <a:avLst/>
+          </a:prstGeom>
+          <a:solidFill>
+            <a:srgbClr val="FFFFFF"/>
+          </a:solidFill>
+          <a:ln w="6350">
+            <a:solidFill>
+              <a:srgbClr val="E1E4E8"/>
+            </a:solidFill>
+          </a:ln>
+        </p:spPr>
+        <p:style>
+          <a:lnRef idx="1">
+            <a:schemeClr val="accent1"/>
+          </a:lnRef>
+          <a:fillRef idx="3">
+            <a:schemeClr val="accent1"/>
+          </a:fillRef>
+          <a:effectRef idx="2">
+            <a:schemeClr val="accent1"/>
+          </a:effectRef>
+          <a:fontRef idx="minor">
+            <a:schemeClr val="lt1"/>
+          </a:fontRef>
+        </p:style>
+        <p:txBody>
+          <a:bodyPr rtlCol="0" anchor="ctr"/>
+          <a:lstStyle/>
+          <a:p>
+            <a:pPr algn="ctr"/>
+          </a:p>
+        </p:txBody>
+      </p:sp>
+      <p:sp>
+        <p:nvSpPr>
+          <p:cNvPr id="45" name="TextBox 44"/>
+          <p:cNvSpPr txBox="1"/>
+          <p:nvPr/>
+        </p:nvSpPr>
+        <p:spPr>
+          <a:xfrm>
+            <a:off x="691500" y="5280000"/>
+            <a:ext cx="11049000" cy="220000"/>
+          </a:xfrm>
+          <a:prstGeom prst="rect">
+            <a:avLst/>
+          </a:prstGeom>
+          <a:noFill/>
+        </p:spPr>
+        <p:txBody>
+          <a:bodyPr wrap="square">
+            <a:spAutoFit/>
+          </a:bodyPr>
+          <a:lstStyle/>
+          <a:p>
+            <a:pPr>
+              <a:defRPr sz="1500" b="1">
+                <a:solidFill>
+                  <a:srgbClr val="0969DA"/>
+                </a:solidFill>
+              </a:defRPr>
+            </a:pPr>
+            <a:r>
+              <a:t>📎 链上存证证据</a:t>
+            </a:r>
+          </a:p>
+        </p:txBody>
+      </p:sp>
+      <p:sp>
+        <p:nvSpPr>
+          <p:cNvPr id="46" name="TextBox 45"/>
+          <p:cNvSpPr txBox="1"/>
+          <p:nvPr/>
+        </p:nvSpPr>
+        <p:spPr>
+          <a:xfrm>
+            <a:off x="691500" y="5520000"/>
+            <a:ext cx="11049000" cy="200000"/>
+          </a:xfrm>
+          <a:prstGeom prst="rect">
+            <a:avLst/>
+          </a:prstGeom>
+          <a:noFill/>
+        </p:spPr>
+        <p:txBody>
+          <a:bodyPr wrap="square">
+            <a:spAutoFit/>
+          </a:bodyPr>
+          <a:lstStyle/>
+          <a:p>
+            <a:pPr>
+              <a:defRPr sz="1000" b="0">
+                <a:solidFill>
+                  <a:srgbClr val="0969DA"/>
+                </a:solidFill>
+              </a:defRPr>
+            </a:pPr>
+            <a:r>
+              <a:t>sepolia.etherscan.io/tx/0x8b429cca60205ce253737ffd514c39dbc6933dcae0317b3ba1d6a5ba85f469cc</a:t>
+            </a:r>
+          </a:p>
+        </p:txBody>
+      </p:sp>
+      <p:sp>
+        <p:nvSpPr>
+          <p:cNvPr id="47" name="TextBox 46"/>
+          <p:cNvSpPr txBox="1"/>
+          <p:nvPr/>
+        </p:nvSpPr>
+        <p:spPr>
+          <a:xfrm>
+            <a:off x="691500" y="5720000"/>
+            <a:ext cx="11049000" cy="200000"/>
+          </a:xfrm>
+          <a:prstGeom prst="rect">
+            <a:avLst/>
+          </a:prstGeom>
+          <a:noFill/>
+        </p:spPr>
+        <p:txBody>
+          <a:bodyPr wrap="square">
+            <a:spAutoFit/>
+          </a:bodyPr>
+          <a:lstStyle/>
+          <a:p>
+            <a:pPr>
+              <a:defRPr sz="900" b="0">
+                <a:solidFill>
+                  <a:srgbClr val="656D76"/>
+                </a:solidFill>
+              </a:defRPr>
+            </a:pPr>
+            <a:r>
+              <a:t>合约: 0xD21BCB2868...  |  Agent: 0x0547BAaA...  |  ElizaOS v1.7.2  |  DeepSeek Chat</a:t>
+            </a:r>
+          </a:p>
+        </p:txBody>
+      </p:sp>
+      <p:sp>
+        <p:nvSpPr>
+          <p:cNvPr id="48" name="TextBox 47"/>
+          <p:cNvSpPr txBox="1"/>
+          <p:nvPr/>
+        </p:nvSpPr>
+        <p:spPr>
+          <a:xfrm>
+            <a:off x="571500" y="6150000"/>
+            <a:ext cx="11049000" cy="250000"/>
+          </a:xfrm>
+          <a:prstGeom prst="rect">
+            <a:avLst/>
+          </a:prstGeom>
+          <a:noFill/>
+        </p:spPr>
+        <p:txBody>
+          <a:bodyPr wrap="square">
+            <a:spAutoFit/>
+          </a:bodyPr>
+          <a:lstStyle/>
+          <a:p>
+            <a:pPr>
+              <a:defRPr sz="900" b="0">
+                <a:solidFill>
+                  <a:srgbClr val="656D76"/>
+                </a:solidFill>
+              </a:defRPr>
+            </a:pPr>
+            <a:r>
+              <a:t>runtime.on('beforeTransaction', chironVerify)  ·  @elizaos/core  ·  @chiron/sdk</a:t>
+            </a:r>
+          </a:p>
+        </p:txBody>
+      </p:sp>
+    </p:spTree>
+  </p:cSld>
+  <p:clrMapOvr>
+    <a:masterClrMapping/>
+  </p:clrMapOvr>
+</p:sld>
+</file>
+
+<file path=ppt/slides/slide13.xml><?xml version="1.0" encoding="utf-8"?>
+<p:sld xmlns:a="http://schemas.openxmlformats.org/drawingml/2006/main" xmlns:p="http://schemas.openxmlformats.org/presentationml/2006/main" xmlns:r="http://schemas.openxmlformats.org/officeDocument/2006/relationships">
+  <p:cSld>
+    <p:spTree>
+      <p:nvGrpSpPr>
+        <p:cNvPr id="1" name=""/>
+        <p:cNvGrpSpPr/>
+        <p:nvPr/>
+      </p:nvGrpSpPr>
+      <p:grpSpPr/>
+      <p:sp>
+        <p:nvSpPr>
+          <p:cNvPr id="2" name="TextBox 1"/>
+          <p:cNvSpPr txBox="1"/>
+          <p:nvPr/>
+        </p:nvSpPr>
+        <p:spPr>
+          <a:xfrm>
+            <a:off x="571500" y="380000"/>
+            <a:ext cx="11049000" cy="420000"/>
+          </a:xfrm>
+          <a:prstGeom prst="rect">
+            <a:avLst/>
+          </a:prstGeom>
+          <a:noFill/>
+        </p:spPr>
+        <p:txBody>
+          <a:bodyPr wrap="square">
+            <a:spAutoFit/>
+          </a:bodyPr>
+          <a:lstStyle/>
+          <a:p>
+            <a:pPr>
+              <a:defRPr sz="2600" b="1">
+                <a:solidFill>
+                  <a:srgbClr val="000000"/>
+                </a:solidFill>
+              </a:defRPr>
+            </a:pPr>
+            <a:r>
+              <a:t>参考文献与论据来源</a:t>
+            </a:r>
+          </a:p>
+        </p:txBody>
+      </p:sp>
+      <p:sp>
+        <p:nvSpPr>
+          <p:cNvPr id="3" name="Rectangle 2"/>
+          <p:cNvSpPr/>
+          <p:nvPr/>
+        </p:nvSpPr>
+        <p:spPr>
+          <a:xfrm>
+            <a:off x="571500" y="950000"/>
+            <a:ext cx="11049000" cy="320000"/>
+          </a:xfrm>
+          <a:prstGeom prst="rect">
+            <a:avLst/>
+          </a:prstGeom>
+          <a:solidFill>
+            <a:srgbClr val="F6F8FA"/>
+          </a:solidFill>
+          <a:ln w="6350">
+            <a:solidFill>
+              <a:srgbClr val="E1E4E8"/>
+            </a:solidFill>
+          </a:ln>
+        </p:spPr>
+        <p:style>
+          <a:lnRef idx="1">
+            <a:schemeClr val="accent1"/>
+          </a:lnRef>
+          <a:fillRef idx="3">
+            <a:schemeClr val="accent1"/>
+          </a:fillRef>
+          <a:effectRef idx="2">
+            <a:schemeClr val="accent1"/>
+          </a:effectRef>
+          <a:fontRef idx="minor">
+            <a:schemeClr val="lt1"/>
+          </a:fontRef>
+        </p:style>
+        <p:txBody>
+          <a:bodyPr rtlCol="0" anchor="ctr"/>
+          <a:lstStyle/>
+          <a:p>
+            <a:pPr algn="ctr"/>
+          </a:p>
+        </p:txBody>
+      </p:sp>
+      <p:sp>
+        <p:nvSpPr>
+          <p:cNvPr id="4" name="TextBox 3"/>
+          <p:cNvSpPr txBox="1"/>
+          <p:nvPr/>
+        </p:nvSpPr>
+        <p:spPr>
+          <a:xfrm>
+            <a:off x="691500" y="1010000"/>
+            <a:ext cx="10809000" cy="200000"/>
+          </a:xfrm>
+          <a:prstGeom prst="rect">
+            <a:avLst/>
+          </a:prstGeom>
+          <a:noFill/>
+        </p:spPr>
+        <p:txBody>
+          <a:bodyPr wrap="square">
+            <a:spAutoFit/>
+          </a:bodyPr>
+          <a:lstStyle/>
+          <a:p>
+            <a:pPr>
+              <a:defRPr sz="1100" b="0">
+                <a:solidFill>
+                  <a:srgbClr val="1F2328"/>
+                </a:solidFill>
+              </a:defRPr>
+            </a:pPr>
+            <a:r>
+              <a:t>[1] arXiv 2601.04583 (2025) — Autonomous Agents on Blockchains</a:t>
+            </a:r>
+          </a:p>
+        </p:txBody>
+      </p:sp>
+      <p:sp>
+        <p:nvSpPr>
+          <p:cNvPr id="5" name="Rectangle 4"/>
+          <p:cNvSpPr/>
+          <p:nvPr/>
+        </p:nvSpPr>
+        <p:spPr>
+          <a:xfrm>
+            <a:off x="571500" y="1310000"/>
+            <a:ext cx="11049000" cy="320000"/>
+          </a:xfrm>
+          <a:prstGeom prst="rect">
+            <a:avLst/>
+          </a:prstGeom>
+          <a:solidFill>
+            <a:srgbClr val="FFFFFF"/>
+          </a:solidFill>
+          <a:ln w="6350">
+            <a:solidFill>
+              <a:srgbClr val="E1E4E8"/>
+            </a:solidFill>
+          </a:ln>
+        </p:spPr>
+        <p:style>
+          <a:lnRef idx="1">
+            <a:schemeClr val="accent1"/>
+          </a:lnRef>
+          <a:fillRef idx="3">
+            <a:schemeClr val="accent1"/>
+          </a:fillRef>
+          <a:effectRef idx="2">
+            <a:schemeClr val="accent1"/>
+          </a:effectRef>
+          <a:fontRef idx="minor">
+            <a:schemeClr val="lt1"/>
+          </a:fontRef>
+        </p:style>
+        <p:txBody>
+          <a:bodyPr rtlCol="0" anchor="ctr"/>
+          <a:lstStyle/>
+          <a:p>
+            <a:pPr algn="ctr"/>
+          </a:p>
+        </p:txBody>
+      </p:sp>
+      <p:sp>
+        <p:nvSpPr>
+          <p:cNvPr id="6" name="TextBox 5"/>
+          <p:cNvSpPr txBox="1"/>
+          <p:nvPr/>
+        </p:nvSpPr>
+        <p:spPr>
+          <a:xfrm>
+            <a:off x="691500" y="1370000"/>
+            <a:ext cx="10809000" cy="200000"/>
+          </a:xfrm>
+          <a:prstGeom prst="rect">
+            <a:avLst/>
+          </a:prstGeom>
+          <a:noFill/>
+        </p:spPr>
+        <p:txBody>
+          <a:bodyPr wrap="square">
+            <a:spAutoFit/>
+          </a:bodyPr>
+          <a:lstStyle/>
+          <a:p>
+            <a:pPr>
+              <a:defRPr sz="1100" b="0">
+                <a:solidFill>
+                  <a:srgbClr val="1F2328"/>
+                </a:solidFill>
+              </a:defRPr>
+            </a:pPr>
+            <a:r>
+              <a:t>[2] Stanford CRFM (2024) — Agent Security and Alignment</a:t>
+            </a:r>
+          </a:p>
+        </p:txBody>
+      </p:sp>
+      <p:sp>
+        <p:nvSpPr>
+          <p:cNvPr id="7" name="Rectangle 6"/>
+          <p:cNvSpPr/>
+          <p:nvPr/>
+        </p:nvSpPr>
+        <p:spPr>
+          <a:xfrm>
+            <a:off x="571500" y="1670000"/>
+            <a:ext cx="11049000" cy="320000"/>
+          </a:xfrm>
+          <a:prstGeom prst="rect">
+            <a:avLst/>
+          </a:prstGeom>
+          <a:solidFill>
+            <a:srgbClr val="F6F8FA"/>
+          </a:solidFill>
+          <a:ln w="6350">
+            <a:solidFill>
+              <a:srgbClr val="E1E4E8"/>
+            </a:solidFill>
+          </a:ln>
+        </p:spPr>
+        <p:style>
+          <a:lnRef idx="1">
+            <a:schemeClr val="accent1"/>
+          </a:lnRef>
+          <a:fillRef idx="3">
+            <a:schemeClr val="accent1"/>
+          </a:fillRef>
+          <a:effectRef idx="2">
+            <a:schemeClr val="accent1"/>
+          </a:effectRef>
+          <a:fontRef idx="minor">
+            <a:schemeClr val="lt1"/>
+          </a:fontRef>
+        </p:style>
+        <p:txBody>
+          <a:bodyPr rtlCol="0" anchor="ctr"/>
+          <a:lstStyle/>
+          <a:p>
+            <a:pPr algn="ctr"/>
+          </a:p>
+        </p:txBody>
+      </p:sp>
+      <p:sp>
+        <p:nvSpPr>
+          <p:cNvPr id="8" name="TextBox 7"/>
+          <p:cNvSpPr txBox="1"/>
+          <p:nvPr/>
+        </p:nvSpPr>
+        <p:spPr>
+          <a:xfrm>
+            <a:off x="691500" y="1730000"/>
+            <a:ext cx="10809000" cy="200000"/>
+          </a:xfrm>
+          <a:prstGeom prst="rect">
+            <a:avLst/>
+          </a:prstGeom>
+          <a:noFill/>
+        </p:spPr>
+        <p:txBody>
+          <a:bodyPr wrap="square">
+            <a:spAutoFit/>
+          </a:bodyPr>
+          <a:lstStyle/>
+          <a:p>
+            <a:pPr>
+              <a:defRPr sz="1100" b="0">
+                <a:solidFill>
+                  <a:srgbClr val="1F2328"/>
+                </a:solidFill>
+              </a:defRPr>
+            </a:pPr>
+            <a:r>
+              <a:t>[3] arXiv 2403.1114 (2024) — Security of Autonomous Agents</a:t>
+            </a:r>
+          </a:p>
+        </p:txBody>
+      </p:sp>
+      <p:sp>
+        <p:nvSpPr>
+          <p:cNvPr id="9" name="Rectangle 8"/>
+          <p:cNvSpPr/>
+          <p:nvPr/>
+        </p:nvSpPr>
+        <p:spPr>
+          <a:xfrm>
+            <a:off x="571500" y="2030000"/>
+            <a:ext cx="11049000" cy="320000"/>
+          </a:xfrm>
+          <a:prstGeom prst="rect">
+            <a:avLst/>
+          </a:prstGeom>
+          <a:solidFill>
+            <a:srgbClr val="FFFFFF"/>
+          </a:solidFill>
+          <a:ln w="6350">
+            <a:solidFill>
+              <a:srgbClr val="E1E4E8"/>
+            </a:solidFill>
+          </a:ln>
+        </p:spPr>
+        <p:style>
+          <a:lnRef idx="1">
+            <a:schemeClr val="accent1"/>
+          </a:lnRef>
+          <a:fillRef idx="3">
+            <a:schemeClr val="accent1"/>
+          </a:fillRef>
+          <a:effectRef idx="2">
+            <a:schemeClr val="accent1"/>
+          </a:effectRef>
+          <a:fontRef idx="minor">
+            <a:schemeClr val="lt1"/>
+          </a:fontRef>
+        </p:style>
+        <p:txBody>
+          <a:bodyPr rtlCol="0" anchor="ctr"/>
+          <a:lstStyle/>
+          <a:p>
+            <a:pPr algn="ctr"/>
+          </a:p>
+        </p:txBody>
+      </p:sp>
+      <p:sp>
+        <p:nvSpPr>
+          <p:cNvPr id="10" name="TextBox 9"/>
+          <p:cNvSpPr txBox="1"/>
+          <p:nvPr/>
+        </p:nvSpPr>
+        <p:spPr>
+          <a:xfrm>
+            <a:off x="691500" y="2090000"/>
+            <a:ext cx="10809000" cy="200000"/>
+          </a:xfrm>
+          <a:prstGeom prst="rect">
+            <a:avLst/>
+          </a:prstGeom>
+          <a:noFill/>
+        </p:spPr>
+        <p:txBody>
+          <a:bodyPr wrap="square">
+            <a:spAutoFit/>
+          </a:bodyPr>
+          <a:lstStyle/>
+          <a:p>
+            <a:pPr>
+              <a:defRPr sz="1100" b="0">
+                <a:solidFill>
+                  <a:srgbClr val="1F2328"/>
+                </a:solidFill>
+              </a:defRPr>
+            </a:pPr>
+            <a:r>
+              <a:t>[4] ERC-4337 (2023) — Account Abstraction</a:t>
+            </a:r>
+          </a:p>
+        </p:txBody>
+      </p:sp>
+      <p:sp>
+        <p:nvSpPr>
+          <p:cNvPr id="11" name="Rectangle 10"/>
+          <p:cNvSpPr/>
+          <p:nvPr/>
+        </p:nvSpPr>
+        <p:spPr>
+          <a:xfrm>
+            <a:off x="571500" y="2390000"/>
+            <a:ext cx="11049000" cy="320000"/>
+          </a:xfrm>
+          <a:prstGeom prst="rect">
+            <a:avLst/>
+          </a:prstGeom>
+          <a:solidFill>
+            <a:srgbClr val="F6F8FA"/>
+          </a:solidFill>
+          <a:ln w="6350">
+            <a:solidFill>
+              <a:srgbClr val="E1E4E8"/>
+            </a:solidFill>
+          </a:ln>
+        </p:spPr>
+        <p:style>
+          <a:lnRef idx="1">
+            <a:schemeClr val="accent1"/>
+          </a:lnRef>
+          <a:fillRef idx="3">
+            <a:schemeClr val="accent1"/>
+          </a:fillRef>
+          <a:effectRef idx="2">
+            <a:schemeClr val="accent1"/>
+          </a:effectRef>
+          <a:fontRef idx="minor">
+            <a:schemeClr val="lt1"/>
+          </a:fontRef>
+        </p:style>
+        <p:txBody>
+          <a:bodyPr rtlCol="0" anchor="ctr"/>
+          <a:lstStyle/>
+          <a:p>
+            <a:pPr algn="ctr"/>
+          </a:p>
+        </p:txBody>
+      </p:sp>
+      <p:sp>
+        <p:nvSpPr>
+          <p:cNvPr id="12" name="TextBox 11"/>
+          <p:cNvSpPr txBox="1"/>
+          <p:nvPr/>
+        </p:nvSpPr>
+        <p:spPr>
+          <a:xfrm>
+            <a:off x="691500" y="2450000"/>
+            <a:ext cx="10809000" cy="200000"/>
+          </a:xfrm>
+          <a:prstGeom prst="rect">
+            <a:avLst/>
+          </a:prstGeom>
+          <a:noFill/>
+        </p:spPr>
+        <p:txBody>
+          <a:bodyPr wrap="square">
+            <a:spAutoFit/>
+          </a:bodyPr>
+          <a:lstStyle/>
+          <a:p>
+            <a:pPr>
+              <a:defRPr sz="1100" b="0">
+                <a:solidFill>
+                  <a:srgbClr val="1F2328"/>
+                </a:solidFill>
+              </a:defRPr>
+            </a:pPr>
+            <a:r>
+              <a:t>[5] UniswapX — Dutch Auction 意图驱动交易</a:t>
+            </a:r>
+          </a:p>
+        </p:txBody>
+      </p:sp>
+      <p:sp>
+        <p:nvSpPr>
+          <p:cNvPr id="13" name="Rectangle 12"/>
+          <p:cNvSpPr/>
+          <p:nvPr/>
+        </p:nvSpPr>
+        <p:spPr>
+          <a:xfrm>
+            <a:off x="571500" y="2750000"/>
+            <a:ext cx="11049000" cy="320000"/>
+          </a:xfrm>
+          <a:prstGeom prst="rect">
+            <a:avLst/>
+          </a:prstGeom>
+          <a:solidFill>
+            <a:srgbClr val="FFFFFF"/>
+          </a:solidFill>
+          <a:ln w="6350">
+            <a:solidFill>
+              <a:srgbClr val="E1E4E8"/>
+            </a:solidFill>
+          </a:ln>
+        </p:spPr>
+        <p:style>
+          <a:lnRef idx="1">
+            <a:schemeClr val="accent1"/>
+          </a:lnRef>
+          <a:fillRef idx="3">
+            <a:schemeClr val="accent1"/>
+          </a:fillRef>
+          <a:effectRef idx="2">
+            <a:schemeClr val="accent1"/>
+          </a:effectRef>
+          <a:fontRef idx="minor">
+            <a:schemeClr val="lt1"/>
+          </a:fontRef>
+        </p:style>
+        <p:txBody>
+          <a:bodyPr rtlCol="0" anchor="ctr"/>
+          <a:lstStyle/>
+          <a:p>
+            <a:pPr algn="ctr"/>
+          </a:p>
+        </p:txBody>
+      </p:sp>
+      <p:sp>
+        <p:nvSpPr>
+          <p:cNvPr id="14" name="TextBox 13"/>
+          <p:cNvSpPr txBox="1"/>
+          <p:nvPr/>
+        </p:nvSpPr>
+        <p:spPr>
+          <a:xfrm>
+            <a:off x="691500" y="2810000"/>
+            <a:ext cx="10809000" cy="200000"/>
+          </a:xfrm>
+          <a:prstGeom prst="rect">
+            <a:avLst/>
+          </a:prstGeom>
+          <a:noFill/>
+        </p:spPr>
+        <p:txBody>
+          <a:bodyPr wrap="square">
+            <a:spAutoFit/>
+          </a:bodyPr>
+          <a:lstStyle/>
+          <a:p>
+            <a:pPr>
+              <a:defRPr sz="1100" b="0">
+                <a:solidFill>
+                  <a:srgbClr val="1F2328"/>
+                </a:solidFill>
+              </a:defRPr>
+            </a:pPr>
+            <a:r>
+              <a:t>[6] CoW Protocol — Batch Auction MEV 保护</a:t>
+            </a:r>
+          </a:p>
+        </p:txBody>
+      </p:sp>
+      <p:sp>
+        <p:nvSpPr>
+          <p:cNvPr id="15" name="Rectangle 14"/>
+          <p:cNvSpPr/>
+          <p:nvPr/>
+        </p:nvSpPr>
+        <p:spPr>
+          <a:xfrm>
+            <a:off x="571500" y="3110000"/>
+            <a:ext cx="11049000" cy="320000"/>
+          </a:xfrm>
+          <a:prstGeom prst="rect">
+            <a:avLst/>
+          </a:prstGeom>
+          <a:solidFill>
+            <a:srgbClr val="F6F8FA"/>
+          </a:solidFill>
+          <a:ln w="6350">
+            <a:solidFill>
+              <a:srgbClr val="E1E4E8"/>
+            </a:solidFill>
+          </a:ln>
+        </p:spPr>
+        <p:style>
+          <a:lnRef idx="1">
+            <a:schemeClr val="accent1"/>
+          </a:lnRef>
+          <a:fillRef idx="3">
+            <a:schemeClr val="accent1"/>
+          </a:fillRef>
+          <a:effectRef idx="2">
+            <a:schemeClr val="accent1"/>
+          </a:effectRef>
+          <a:fontRef idx="minor">
+            <a:schemeClr val="lt1"/>
+          </a:fontRef>
+        </p:style>
+        <p:txBody>
+          <a:bodyPr rtlCol="0" anchor="ctr"/>
+          <a:lstStyle/>
+          <a:p>
+            <a:pPr algn="ctr"/>
+          </a:p>
+        </p:txBody>
+      </p:sp>
+      <p:sp>
+        <p:nvSpPr>
+          <p:cNvPr id="16" name="TextBox 15"/>
+          <p:cNvSpPr txBox="1"/>
+          <p:nvPr/>
+        </p:nvSpPr>
+        <p:spPr>
+          <a:xfrm>
+            <a:off x="691500" y="3170000"/>
+            <a:ext cx="10809000" cy="200000"/>
+          </a:xfrm>
+          <a:prstGeom prst="rect">
+            <a:avLst/>
+          </a:prstGeom>
+          <a:noFill/>
+        </p:spPr>
+        <p:txBody>
+          <a:bodyPr wrap="square">
+            <a:spAutoFit/>
+          </a:bodyPr>
+          <a:lstStyle/>
+          <a:p>
+            <a:pPr>
+              <a:defRPr sz="1100" b="0">
+                <a:solidFill>
+                  <a:srgbClr val="1F2328"/>
+                </a:solidFill>
+              </a:defRPr>
+            </a:pPr>
+            <a:r>
+              <a:t>[7] 1inch Fusion — RFQ 无 Gas 交换</a:t>
+            </a:r>
+          </a:p>
+        </p:txBody>
+      </p:sp>
+      <p:sp>
+        <p:nvSpPr>
+          <p:cNvPr id="17" name="Rectangle 16"/>
+          <p:cNvSpPr/>
+          <p:nvPr/>
+        </p:nvSpPr>
+        <p:spPr>
+          <a:xfrm>
+            <a:off x="571500" y="3470000"/>
+            <a:ext cx="11049000" cy="320000"/>
+          </a:xfrm>
+          <a:prstGeom prst="rect">
+            <a:avLst/>
+          </a:prstGeom>
+          <a:solidFill>
+            <a:srgbClr val="FFFFFF"/>
+          </a:solidFill>
+          <a:ln w="6350">
+            <a:solidFill>
+              <a:srgbClr val="E1E4E8"/>
+            </a:solidFill>
+          </a:ln>
+        </p:spPr>
+        <p:style>
+          <a:lnRef idx="1">
+            <a:schemeClr val="accent1"/>
+          </a:lnRef>
+          <a:fillRef idx="3">
+            <a:schemeClr val="accent1"/>
+          </a:fillRef>
+          <a:effectRef idx="2">
+            <a:schemeClr val="accent1"/>
+          </a:effectRef>
+          <a:fontRef idx="minor">
+            <a:schemeClr val="lt1"/>
+          </a:fontRef>
+        </p:style>
+        <p:txBody>
+          <a:bodyPr rtlCol="0" anchor="ctr"/>
+          <a:lstStyle/>
+          <a:p>
+            <a:pPr algn="ctr"/>
+          </a:p>
+        </p:txBody>
+      </p:sp>
+      <p:sp>
+        <p:nvSpPr>
+          <p:cNvPr id="18" name="TextBox 17"/>
+          <p:cNvSpPr txBox="1"/>
+          <p:nvPr/>
+        </p:nvSpPr>
+        <p:spPr>
+          <a:xfrm>
+            <a:off x="691500" y="3530000"/>
+            <a:ext cx="10809000" cy="200000"/>
+          </a:xfrm>
+          <a:prstGeom prst="rect">
+            <a:avLst/>
+          </a:prstGeom>
+          <a:noFill/>
+        </p:spPr>
+        <p:txBody>
+          <a:bodyPr wrap="square">
+            <a:spAutoFit/>
+          </a:bodyPr>
+          <a:lstStyle/>
+          <a:p>
+            <a:pPr>
+              <a:defRPr sz="1100" b="0">
+                <a:solidFill>
+                  <a:srgbClr val="1F2328"/>
+                </a:solidFill>
+              </a:defRPr>
+            </a:pPr>
+            <a:r>
+              <a:t>[8] Blowfish — Transaction Simulation</a:t>
+            </a:r>
+          </a:p>
+        </p:txBody>
+      </p:sp>
+      <p:sp>
+        <p:nvSpPr>
+          <p:cNvPr id="19" name="Rectangle 18"/>
+          <p:cNvSpPr/>
+          <p:nvPr/>
+        </p:nvSpPr>
+        <p:spPr>
+          <a:xfrm>
+            <a:off x="571500" y="3830000"/>
+            <a:ext cx="11049000" cy="320000"/>
+          </a:xfrm>
+          <a:prstGeom prst="rect">
+            <a:avLst/>
+          </a:prstGeom>
+          <a:solidFill>
+            <a:srgbClr val="F6F8FA"/>
+          </a:solidFill>
+          <a:ln w="6350">
+            <a:solidFill>
+              <a:srgbClr val="E1E4E8"/>
+            </a:solidFill>
+          </a:ln>
+        </p:spPr>
+        <p:style>
+          <a:lnRef idx="1">
+            <a:schemeClr val="accent1"/>
+          </a:lnRef>
+          <a:fillRef idx="3">
+            <a:schemeClr val="accent1"/>
+          </a:fillRef>
+          <a:effectRef idx="2">
+            <a:schemeClr val="accent1"/>
+          </a:effectRef>
+          <a:fontRef idx="minor">
+            <a:schemeClr val="lt1"/>
+          </a:fontRef>
+        </p:style>
+        <p:txBody>
+          <a:bodyPr rtlCol="0" anchor="ctr"/>
+          <a:lstStyle/>
+          <a:p>
+            <a:pPr algn="ctr"/>
+          </a:p>
+        </p:txBody>
+      </p:sp>
+      <p:sp>
+        <p:nvSpPr>
+          <p:cNvPr id="20" name="TextBox 19"/>
+          <p:cNvSpPr txBox="1"/>
+          <p:nvPr/>
+        </p:nvSpPr>
+        <p:spPr>
+          <a:xfrm>
+            <a:off x="691500" y="3890000"/>
+            <a:ext cx="10809000" cy="200000"/>
+          </a:xfrm>
+          <a:prstGeom prst="rect">
+            <a:avLst/>
+          </a:prstGeom>
+          <a:noFill/>
+        </p:spPr>
+        <p:txBody>
+          <a:bodyPr wrap="square">
+            <a:spAutoFit/>
+          </a:bodyPr>
+          <a:lstStyle/>
+          <a:p>
+            <a:pPr>
+              <a:defRPr sz="1100" b="0">
+                <a:solidFill>
+                  <a:srgbClr val="1F2328"/>
+                </a:solidFill>
+              </a:defRPr>
+            </a:pPr>
+            <a:r>
+              <a:t>[9] ElizaOS (elizaOS/eliza) — 18.6k ⭐</a:t>
+            </a:r>
+          </a:p>
+        </p:txBody>
+      </p:sp>
+      <p:sp>
+        <p:nvSpPr>
+          <p:cNvPr id="21" name="Rectangle 20"/>
+          <p:cNvSpPr/>
+          <p:nvPr/>
+        </p:nvSpPr>
+        <p:spPr>
+          <a:xfrm>
+            <a:off x="571500" y="4190000"/>
+            <a:ext cx="11049000" cy="320000"/>
+          </a:xfrm>
+          <a:prstGeom prst="rect">
+            <a:avLst/>
+          </a:prstGeom>
+          <a:solidFill>
+            <a:srgbClr val="FFFFFF"/>
+          </a:solidFill>
+          <a:ln w="6350">
+            <a:solidFill>
+              <a:srgbClr val="E1E4E8"/>
+            </a:solidFill>
+          </a:ln>
+        </p:spPr>
+        <p:style>
+          <a:lnRef idx="1">
+            <a:schemeClr val="accent1"/>
+          </a:lnRef>
+          <a:fillRef idx="3">
+            <a:schemeClr val="accent1"/>
+          </a:fillRef>
+          <a:effectRef idx="2">
+            <a:schemeClr val="accent1"/>
+          </a:effectRef>
+          <a:fontRef idx="minor">
+            <a:schemeClr val="lt1"/>
+          </a:fontRef>
+        </p:style>
+        <p:txBody>
+          <a:bodyPr rtlCol="0" anchor="ctr"/>
+          <a:lstStyle/>
+          <a:p>
+            <a:pPr algn="ctr"/>
+          </a:p>
+        </p:txBody>
+      </p:sp>
+      <p:sp>
+        <p:nvSpPr>
+          <p:cNvPr id="22" name="TextBox 21"/>
+          <p:cNvSpPr txBox="1"/>
+          <p:nvPr/>
+        </p:nvSpPr>
+        <p:spPr>
+          <a:xfrm>
+            <a:off x="691500" y="4250000"/>
+            <a:ext cx="10809000" cy="200000"/>
+          </a:xfrm>
+          <a:prstGeom prst="rect">
+            <a:avLst/>
+          </a:prstGeom>
+          <a:noFill/>
+        </p:spPr>
+        <p:txBody>
+          <a:bodyPr wrap="square">
+            <a:spAutoFit/>
+          </a:bodyPr>
+          <a:lstStyle/>
+          <a:p>
+            <a:pPr>
+              <a:defRPr sz="1100" b="0">
+                <a:solidFill>
+                  <a:srgbClr val="1F2328"/>
+                </a:solidFill>
+              </a:defRPr>
+            </a:pPr>
+            <a:r>
+              <a:t>[10] Fetch.ai uAgents — 1.6k ⭐</a:t>
+            </a:r>
+          </a:p>
+        </p:txBody>
+      </p:sp>
+      <p:sp>
+        <p:nvSpPr>
+          <p:cNvPr id="23" name="TextBox 22"/>
+          <p:cNvSpPr txBox="1"/>
+          <p:nvPr/>
+        </p:nvSpPr>
+        <p:spPr>
+          <a:xfrm>
+            <a:off x="571500" y="6000000"/>
+            <a:ext cx="11049000" cy="250000"/>
+          </a:xfrm>
+          <a:prstGeom prst="rect">
+            <a:avLst/>
+          </a:prstGeom>
+          <a:noFill/>
+        </p:spPr>
+        <p:txBody>
+          <a:bodyPr wrap="square">
+            <a:spAutoFit/>
+          </a:bodyPr>
+          <a:lstStyle/>
+          <a:p>
+            <a:pPr>
+              <a:defRPr sz="900" b="0">
+                <a:solidFill>
+                  <a:srgbClr val="656D76"/>
+                </a:solidFill>
+              </a:defRPr>
+            </a:pPr>
+            <a:r>
+              <a:t>更多资料: docs/ 目录下含完整分析文档</a:t>
+            </a:r>
+          </a:p>
+        </p:txBody>
+      </p:sp>
+    </p:spTree>
+  </p:cSld>
+  <p:clrMapOvr>
+    <a:masterClrMapping/>
+  </p:clrMapOvr>
+</p:sld>
+</file>
+
+<file path=ppt/slides/slide14.xml><?xml version="1.0" encoding="utf-8"?>
+<p:sld xmlns:a="http://schemas.openxmlformats.org/drawingml/2006/main" xmlns:p="http://schemas.openxmlformats.org/presentationml/2006/main" xmlns:r="http://schemas.openxmlformats.org/officeDocument/2006/relationships">
+  <p:cSld>
+    <p:spTree>
+      <p:nvGrpSpPr>
+        <p:cNvPr id="1" name=""/>
+        <p:cNvGrpSpPr/>
+        <p:nvPr/>
+      </p:nvGrpSpPr>
+      <p:grpSpPr/>
+      <p:sp>
+        <p:nvSpPr>
+          <p:cNvPr id="2" name="TextBox 1"/>
+          <p:cNvSpPr txBox="1"/>
+          <p:nvPr/>
+        </p:nvSpPr>
+        <p:spPr>
+          <a:xfrm>
+            <a:off x="3000000" y="2200000"/>
+            <a:ext cx="6000000" cy="700000"/>
+          </a:xfrm>
+          <a:prstGeom prst="rect">
+            <a:avLst/>
+          </a:prstGeom>
+          <a:noFill/>
+        </p:spPr>
+        <p:txBody>
+          <a:bodyPr wrap="square">
+            <a:spAutoFit/>
+          </a:bodyPr>
+          <a:lstStyle/>
+          <a:p>
+            <a:pPr>
+              <a:defRPr sz="4400" b="1">
+                <a:solidFill>
+                  <a:srgbClr val="000000"/>
+                </a:solidFill>
+              </a:defRPr>
+            </a:pPr>
+            <a:r>
+              <a:t>Thank You</a:t>
+            </a:r>
+          </a:p>
+        </p:txBody>
+      </p:sp>
+      <p:sp>
+        <p:nvSpPr>
+          <p:cNvPr id="3" name="TextBox 2"/>
+          <p:cNvSpPr txBox="1"/>
+          <p:nvPr/>
+        </p:nvSpPr>
+        <p:spPr>
+          <a:xfrm>
+            <a:off x="2000000" y="3100000"/>
+            <a:ext cx="8000000" cy="400000"/>
+          </a:xfrm>
+          <a:prstGeom prst="rect">
+            <a:avLst/>
+          </a:prstGeom>
+          <a:noFill/>
+        </p:spPr>
+        <p:txBody>
+          <a:bodyPr wrap="square">
+            <a:spAutoFit/>
+          </a:bodyPr>
+          <a:lstStyle/>
+          <a:p>
+            <a:pPr>
+              <a:defRPr sz="2000" b="0">
+                <a:solidFill>
+                  <a:srgbClr val="656D76"/>
+                </a:solidFill>
+              </a:defRPr>
+            </a:pPr>
+            <a:r>
+              <a:t>Chiron — Agent Transaction Security Middleware</a:t>
+            </a:r>
+          </a:p>
+        </p:txBody>
+      </p:sp>
+      <p:sp>
+        <p:nvSpPr>
+          <p:cNvPr id="4" name="TextBox 3"/>
+          <p:cNvSpPr txBox="1"/>
+          <p:nvPr/>
+        </p:nvSpPr>
+        <p:spPr>
+          <a:xfrm>
+            <a:off x="2000000" y="3600000"/>
+            <a:ext cx="8000000" cy="400000"/>
+          </a:xfrm>
+          <a:prstGeom prst="rect">
+            <a:avLst/>
+          </a:prstGeom>
+          <a:noFill/>
+        </p:spPr>
+        <p:txBody>
+          <a:bodyPr wrap="square">
+            <a:spAutoFit/>
+          </a:bodyPr>
+          <a:lstStyle/>
+          <a:p>
+            <a:pPr>
+              <a:defRPr sz="1600" b="0">
+                <a:solidFill>
+                  <a:srgbClr val="656D76"/>
+                </a:solidFill>
+              </a:defRPr>
+            </a:pPr>
+            <a:r>
+              <a:t>"一致性是可验证的，正确性是不可验证的。"</a:t>
+            </a:r>
+          </a:p>
+        </p:txBody>
+      </p:sp>
+    </p:spTree>
+  </p:cSld>
+  <p:clrMapOvr>
+    <a:masterClrMapping/>
+  </p:clrMapOvr>
+</p:sld>
+</file>
+
 <file path=ppt/slides/slide2.xml><?xml version="1.0" encoding="utf-8"?>
 <p:sld xmlns:p="http://schemas.openxmlformats.org/presentationml/2006/main">
   <p:cSld>

--- a/outputs/chiron-report/Chiron-课程项目汇报.pptx
+++ b/outputs/chiron-report/Chiron-课程项目汇报.pptx
@@ -5944,6 +5944,10 @@
             <a:avLst/>
           </a:prstGeom>
         </p:spPr>
+        <p:txBody>
+          <a:bodyPr/>
+          <a:p/>
+        </p:txBody>
       </p:sp>
       <p:sp>
         <p:nvSpPr>
@@ -6013,6 +6017,10 @@
             <a:avLst/>
           </a:prstGeom>
         </p:spPr>
+        <p:txBody>
+          <a:bodyPr/>
+          <a:p/>
+        </p:txBody>
       </p:sp>
       <p:sp>
         <p:nvSpPr>
@@ -6176,6 +6184,10 @@
             <a:avLst/>
           </a:prstGeom>
         </p:spPr>
+        <p:txBody>
+          <a:bodyPr/>
+          <a:p/>
+        </p:txBody>
       </p:sp>
       <p:sp>
         <p:nvSpPr>
@@ -6279,6 +6291,10 @@
             <a:avLst/>
           </a:prstGeom>
         </p:spPr>
+        <p:txBody>
+          <a:bodyPr/>
+          <a:p/>
+        </p:txBody>
       </p:sp>
       <p:sp>
         <p:nvSpPr>
@@ -6348,6 +6364,10 @@
             <a:avLst/>
           </a:prstGeom>
         </p:spPr>
+        <p:txBody>
+          <a:bodyPr/>
+          <a:p/>
+        </p:txBody>
       </p:sp>
       <p:sp>
         <p:nvSpPr>
@@ -6530,6 +6550,10 @@
             <a:avLst/>
           </a:prstGeom>
         </p:spPr>
+        <p:txBody>
+          <a:bodyPr/>
+          <a:p/>
+        </p:txBody>
       </p:sp>
       <p:sp>
         <p:nvSpPr>
@@ -6747,6 +6771,131 @@
                 </a:solidFill>
               </a:rPr>
               <a:t>因为 LLM 无法区分「语法正确的交易」和「语义错误的交易」。</a:t>
+            </a:r>
+          </a:p>
+        </p:txBody>
+      </p:sp>
+      <p:sp>
+        <p:nvSpPr>
+          <p:cNvPr id="17" name="Rectangle 16"/>
+          <p:cNvSpPr/>
+          <p:nvPr/>
+        </p:nvSpPr>
+        <p:spPr>
+          <a:xfrm>
+            <a:off x="571500" y="1850000"/>
+            <a:ext cx="11049000" cy="600000"/>
+          </a:xfrm>
+          <a:prstGeom prst="rect">
+            <a:avLst/>
+          </a:prstGeom>
+          <a:solidFill>
+            <a:srgbClr val="FFF8E1"/>
+          </a:solidFill>
+          <a:ln w="6350">
+            <a:solidFill>
+              <a:srgbClr val="D4A72C"/>
+            </a:solidFill>
+          </a:ln>
+        </p:spPr>
+        <p:style>
+          <a:lnRef idx="1">
+            <a:schemeClr val="accent1"/>
+          </a:lnRef>
+          <a:fillRef idx="3">
+            <a:schemeClr val="accent1"/>
+          </a:fillRef>
+          <a:effectRef idx="2">
+            <a:schemeClr val="accent1"/>
+          </a:effectRef>
+          <a:fontRef idx="minor">
+            <a:schemeClr val="lt1"/>
+          </a:fontRef>
+        </p:style>
+        <p:txBody>
+          <a:bodyPr rtlCol="0" anchor="ctr"/>
+          <a:lstStyle/>
+          <a:p>
+            <a:pPr algn="ctr"/>
+          </a:p>
+        </p:txBody>
+      </p:sp>
+      <p:sp>
+        <p:nvSpPr>
+          <p:cNvPr id="18" name="TextBox 17"/>
+          <p:cNvSpPr txBox="1"/>
+          <p:nvPr/>
+        </p:nvSpPr>
+        <p:spPr>
+          <a:xfrm>
+            <a:off x="714375" y="1870000"/>
+            <a:ext cx="10763250" cy="560000"/>
+          </a:xfrm>
+          <a:prstGeom prst="rect">
+            <a:avLst/>
+          </a:prstGeom>
+          <a:noFill/>
+        </p:spPr>
+        <p:txBody>
+          <a:bodyPr wrap="square">
+            <a:spAutoFit/>
+          </a:bodyPr>
+          <a:lstStyle/>
+          <a:p>
+            <a:pPr>
+              <a:defRPr sz="1100" b="1">
+                <a:solidFill>
+                  <a:srgbClr val="7A5C00"/>
+                </a:solidFill>
+              </a:defRPr>
+            </a:pPr>
+            <a:r>
+              <a:t>② LLM 读取链上数据并构建 calldata（受害者入口）</a:t>
+            </a:r>
+          </a:p>
+          <a:p>
+            <a:pPr>
+              <a:spcBef>
+                <a:spcPts val="400"/>
+              </a:spcBef>
+              <a:defRPr sz="1000">
+                <a:solidFill>
+                  <a:srgbClr val="656D76"/>
+                </a:solidFill>
+              </a:defRPr>
+            </a:pPr>
+            <a:r>
+              <a:t>Agent 的 LLM 在执行决策时，需要读取链上数据来获取价格、池子地址等参数。</a:t>
+            </a:r>
+          </a:p>
+          <a:p>
+            <a:pPr>
+              <a:spcBef>
+                <a:spcPts val="200"/>
+              </a:spcBef>
+              <a:defRPr sz="1000">
+                <a:solidFill>
+                  <a:srgbClr val="656D76"/>
+                </a:solidFill>
+              </a:defRPr>
+            </a:pPr>
+            <a:r>
+              <a:t>攻击者将恶意指令嵌入这些链上数据中，LLM 无法区分数据和指令，</a:t>
+            </a:r>
+          </a:p>
+          <a:p>
+            <a:pPr>
+              <a:spcBef>
+                <a:spcPts val="200"/>
+              </a:spcBef>
+              <a:defRPr sz="1000">
+                <a:solidFill>
+                  <a:srgbClr val="656D76"/>
+                </a:solidFill>
+              </a:defRPr>
+            </a:pPr>
+            <a:r>
+              <a:t>在构造交易时被注入，签出了和预期完全不同的 calldata。</a:t>
             </a:r>
           </a:p>
         </p:txBody>

--- a/outputs/chiron-report/Chiron-课程项目汇报.pptx
+++ b/outputs/chiron-report/Chiron-课程项目汇报.pptx
@@ -19,8 +19,8 @@
     <p:sldId id="265" r:id="rId10"/>
     <p:sldId id="266" r:id="rId11"/>
     <p:sldId id="267" r:id="rId12"/>
-    <p:sldId id="268" r:id="rId13"/>
-    <p:sldId id="269" r:id="rId14"/>
+    <p:sldId id="272" r:id="rId22"/>
+    <p:sldId id="273" r:id="rId23"/>
   </p:sldIdLst>
   <p:sldSz cx="12192000" cy="6858000"/>
   <p:notesSz cx="6858000" cy="9144000"/>
@@ -1266,6 +1266,10 @@
             <a:avLst/>
           </a:prstGeom>
         </p:spPr>
+        <p:txBody>
+          <a:bodyPr/>
+          <a:p/>
+        </p:txBody>
       </p:sp>
       <p:sp>
         <p:nvSpPr>
@@ -1290,6 +1294,10 @@
             <a:avLst/>
           </a:prstGeom>
         </p:spPr>
+        <p:txBody>
+          <a:bodyPr/>
+          <a:p/>
+        </p:txBody>
       </p:sp>
       <p:sp>
         <p:nvSpPr>
@@ -4870,7 +4878,7 @@
 </file>
 
 <file path=ppt/slides/slide12.xml><?xml version="1.0" encoding="utf-8"?>
-<p:sld xmlns:a="http://schemas.openxmlformats.org/drawingml/2006/main" xmlns:r="http://schemas.openxmlformats.org/officeDocument/2006/relationships" xmlns:p="http://schemas.openxmlformats.org/presentationml/2006/main">
+<p:sld xmlns:a="http://schemas.openxmlformats.org/drawingml/2006/main" xmlns:p="http://schemas.openxmlformats.org/presentationml/2006/main" xmlns:r="http://schemas.openxmlformats.org/officeDocument/2006/relationships">
   <p:cSld>
     <p:spTree>
       <p:nvGrpSpPr>
@@ -4878,14 +4886,7 @@
         <p:cNvGrpSpPr/>
         <p:nvPr/>
       </p:nvGrpSpPr>
-      <p:grpSpPr>
-        <a:xfrm>
-          <a:off x="0" y="0"/>
-          <a:ext cx="0" cy="0"/>
-          <a:chOff x="0" y="0"/>
-          <a:chExt cx="0" cy="0"/>
-        </a:xfrm>
-      </p:grpSpPr>
+      <p:grpSpPr/>
       <p:sp>
         <p:nvSpPr>
           <p:cNvPr id="2" name="TextBox 1"/>
@@ -4894,8 +4895,8 @@
         </p:nvSpPr>
         <p:spPr>
           <a:xfrm>
-            <a:off x="571500" y="380000"/>
-            <a:ext cx="11049000" cy="420000"/>
+            <a:off x="571500" y="250000"/>
+            <a:ext cx="11049000" cy="350000"/>
           </a:xfrm>
           <a:prstGeom prst="rect">
             <a:avLst/>
@@ -4916,7 +4917,7 @@
               </a:defRPr>
             </a:pPr>
             <a:r>
-              <a:t>参考文献与论据来源</a:t>
+              <a:t>参考文献</a:t>
             </a:r>
           </a:p>
         </p:txBody>
@@ -4929,8 +4930,8 @@
         </p:nvSpPr>
         <p:spPr>
           <a:xfrm>
-            <a:off x="571500" y="950000"/>
-            <a:ext cx="11049000" cy="320000"/>
+            <a:off x="571500" y="750000"/>
+            <a:ext cx="11049000" cy="310000"/>
           </a:xfrm>
           <a:prstGeom prst="rect">
             <a:avLst/>
@@ -4963,7 +4964,6 @@
           <a:lstStyle/>
           <a:p>
             <a:pPr algn="ctr"/>
-            <a:endParaRPr/>
           </a:p>
         </p:txBody>
       </p:sp>
@@ -4975,8 +4975,8 @@
         </p:nvSpPr>
         <p:spPr>
           <a:xfrm>
-            <a:off x="691500" y="1010000"/>
-            <a:ext cx="10809000" cy="200000"/>
+            <a:off x="651500" y="810000"/>
+            <a:ext cx="10889000" cy="200000"/>
           </a:xfrm>
           <a:prstGeom prst="rect">
             <a:avLst/>
@@ -4990,14 +4990,14 @@
           <a:lstStyle/>
           <a:p>
             <a:pPr>
-              <a:defRPr sz="1100" b="0">
-                <a:solidFill>
-                  <a:srgbClr val="1F2328"/>
-                </a:solidFill>
-              </a:defRPr>
-            </a:pPr>
-            <a:r>
-              <a:t>[1] arXiv 2601.04583 (2025) — Autonomous Agents on Blockchains</a:t>
+              <a:defRPr sz="1000" b="0">
+                <a:solidFill>
+                  <a:srgbClr val="1F2328"/>
+                </a:solidFill>
+              </a:defRPr>
+            </a:pPr>
+            <a:r>
+              <a:t>[1] "Autonomous Agents on Blockchains." arXiv:2601.04583, 2025.</a:t>
             </a:r>
           </a:p>
         </p:txBody>
@@ -5010,8 +5010,8 @@
         </p:nvSpPr>
         <p:spPr>
           <a:xfrm>
-            <a:off x="571500" y="1310000"/>
-            <a:ext cx="11049000" cy="320000"/>
+            <a:off x="571500" y="1090000"/>
+            <a:ext cx="11049000" cy="310000"/>
           </a:xfrm>
           <a:prstGeom prst="rect">
             <a:avLst/>
@@ -5044,7 +5044,6 @@
           <a:lstStyle/>
           <a:p>
             <a:pPr algn="ctr"/>
-            <a:endParaRPr/>
           </a:p>
         </p:txBody>
       </p:sp>
@@ -5056,8 +5055,8 @@
         </p:nvSpPr>
         <p:spPr>
           <a:xfrm>
-            <a:off x="691500" y="1370000"/>
-            <a:ext cx="10809000" cy="200000"/>
+            <a:off x="651500" y="1150000"/>
+            <a:ext cx="10889000" cy="200000"/>
           </a:xfrm>
           <a:prstGeom prst="rect">
             <a:avLst/>
@@ -5071,14 +5070,14 @@
           <a:lstStyle/>
           <a:p>
             <a:pPr>
-              <a:defRPr sz="1100" b="0">
-                <a:solidFill>
-                  <a:srgbClr val="1F2328"/>
-                </a:solidFill>
-              </a:defRPr>
-            </a:pPr>
-            <a:r>
-              <a:t>[2] Stanford CRFM (2024) — Agent Security and Alignment</a:t>
+              <a:defRPr sz="1000" b="0">
+                <a:solidFill>
+                  <a:srgbClr val="1F2328"/>
+                </a:solidFill>
+              </a:defRPr>
+            </a:pPr>
+            <a:r>
+              <a:t>[2] "Liquidity Exhaustion Attacks on Permissionless DEX." arXiv:2602.17805, 2025.</a:t>
             </a:r>
           </a:p>
         </p:txBody>
@@ -5091,8 +5090,8 @@
         </p:nvSpPr>
         <p:spPr>
           <a:xfrm>
-            <a:off x="571500" y="1670000"/>
-            <a:ext cx="11049000" cy="320000"/>
+            <a:off x="571500" y="1430000"/>
+            <a:ext cx="11049000" cy="310000"/>
           </a:xfrm>
           <a:prstGeom prst="rect">
             <a:avLst/>
@@ -5125,7 +5124,6 @@
           <a:lstStyle/>
           <a:p>
             <a:pPr algn="ctr"/>
-            <a:endParaRPr/>
           </a:p>
         </p:txBody>
       </p:sp>
@@ -5137,8 +5135,8 @@
         </p:nvSpPr>
         <p:spPr>
           <a:xfrm>
-            <a:off x="691500" y="1730000"/>
-            <a:ext cx="10809000" cy="200000"/>
+            <a:off x="651500" y="1490000"/>
+            <a:ext cx="10889000" cy="200000"/>
           </a:xfrm>
           <a:prstGeom prst="rect">
             <a:avLst/>
@@ -5152,14 +5150,14 @@
           <a:lstStyle/>
           <a:p>
             <a:pPr>
-              <a:defRPr sz="1100" b="0">
-                <a:solidFill>
-                  <a:srgbClr val="1F2328"/>
-                </a:solidFill>
-              </a:defRPr>
-            </a:pPr>
-            <a:r>
-              <a:t>[3] arXiv 2403.1114 (2024) — Security of Autonomous Agents</a:t>
+              <a:defRPr sz="1000" b="0">
+                <a:solidFill>
+                  <a:srgbClr val="1F2328"/>
+                </a:solidFill>
+              </a:defRPr>
+            </a:pPr>
+            <a:r>
+              <a:t>[3] Stanford CRFM. "Agent Security and Alignment: Taxonomy of AI Agent Attacks." 2024.</a:t>
             </a:r>
           </a:p>
         </p:txBody>
@@ -5172,8 +5170,8 @@
         </p:nvSpPr>
         <p:spPr>
           <a:xfrm>
-            <a:off x="571500" y="2030000"/>
-            <a:ext cx="11049000" cy="320000"/>
+            <a:off x="571500" y="1770000"/>
+            <a:ext cx="11049000" cy="310000"/>
           </a:xfrm>
           <a:prstGeom prst="rect">
             <a:avLst/>
@@ -5206,7 +5204,6 @@
           <a:lstStyle/>
           <a:p>
             <a:pPr algn="ctr"/>
-            <a:endParaRPr/>
           </a:p>
         </p:txBody>
       </p:sp>
@@ -5218,8 +5215,8 @@
         </p:nvSpPr>
         <p:spPr>
           <a:xfrm>
-            <a:off x="691500" y="2090000"/>
-            <a:ext cx="10809000" cy="200000"/>
+            <a:off x="651500" y="1830000"/>
+            <a:ext cx="10889000" cy="200000"/>
           </a:xfrm>
           <a:prstGeom prst="rect">
             <a:avLst/>
@@ -5233,14 +5230,14 @@
           <a:lstStyle/>
           <a:p>
             <a:pPr>
-              <a:defRPr sz="1100" b="0">
-                <a:solidFill>
-                  <a:srgbClr val="1F2328"/>
-                </a:solidFill>
-              </a:defRPr>
-            </a:pPr>
-            <a:r>
-              <a:t>[4] ERC-4337 (2023) — Account Abstraction</a:t>
+              <a:defRPr sz="1000" b="0">
+                <a:solidFill>
+                  <a:srgbClr val="1F2328"/>
+                </a:solidFill>
+              </a:defRPr>
+            </a:pPr>
+            <a:r>
+              <a:t>[4] "Security of Autonomous Agents: Attack Surface Analysis." arXiv:2403.1114, 2024.</a:t>
             </a:r>
           </a:p>
         </p:txBody>
@@ -5253,8 +5250,8 @@
         </p:nvSpPr>
         <p:spPr>
           <a:xfrm>
-            <a:off x="571500" y="2390000"/>
-            <a:ext cx="11049000" cy="320000"/>
+            <a:off x="571500" y="2110000"/>
+            <a:ext cx="11049000" cy="310000"/>
           </a:xfrm>
           <a:prstGeom prst="rect">
             <a:avLst/>
@@ -5287,7 +5284,6 @@
           <a:lstStyle/>
           <a:p>
             <a:pPr algn="ctr"/>
-            <a:endParaRPr/>
           </a:p>
         </p:txBody>
       </p:sp>
@@ -5299,8 +5295,8 @@
         </p:nvSpPr>
         <p:spPr>
           <a:xfrm>
-            <a:off x="691500" y="2450000"/>
-            <a:ext cx="10809000" cy="200000"/>
+            <a:off x="651500" y="2170000"/>
+            <a:ext cx="10889000" cy="200000"/>
           </a:xfrm>
           <a:prstGeom prst="rect">
             <a:avLst/>
@@ -5314,14 +5310,14 @@
           <a:lstStyle/>
           <a:p>
             <a:pPr>
-              <a:defRPr sz="1100" b="0">
-                <a:solidFill>
-                  <a:srgbClr val="1F2328"/>
-                </a:solidFill>
-              </a:defRPr>
-            </a:pPr>
-            <a:r>
-              <a:t>[5] UniswapX — Dutch Auction 意图驱动交易</a:t>
+              <a:defRPr sz="1000" b="0">
+                <a:solidFill>
+                  <a:srgbClr val="1F2328"/>
+                </a:solidFill>
+              </a:defRPr>
+            </a:pPr>
+            <a:r>
+              <a:t>[5] ERC-4337: Account Abstraction Using Alt Mempool. Ethereum.org, 2023.</a:t>
             </a:r>
           </a:p>
         </p:txBody>
@@ -5334,8 +5330,8 @@
         </p:nvSpPr>
         <p:spPr>
           <a:xfrm>
-            <a:off x="571500" y="2750000"/>
-            <a:ext cx="11049000" cy="320000"/>
+            <a:off x="571500" y="2450000"/>
+            <a:ext cx="11049000" cy="310000"/>
           </a:xfrm>
           <a:prstGeom prst="rect">
             <a:avLst/>
@@ -5368,7 +5364,6 @@
           <a:lstStyle/>
           <a:p>
             <a:pPr algn="ctr"/>
-            <a:endParaRPr/>
           </a:p>
         </p:txBody>
       </p:sp>
@@ -5380,8 +5375,8 @@
         </p:nvSpPr>
         <p:spPr>
           <a:xfrm>
-            <a:off x="691500" y="2810000"/>
-            <a:ext cx="10809000" cy="200000"/>
+            <a:off x="651500" y="2510000"/>
+            <a:ext cx="10889000" cy="200000"/>
           </a:xfrm>
           <a:prstGeom prst="rect">
             <a:avLst/>
@@ -5395,14 +5390,14 @@
           <a:lstStyle/>
           <a:p>
             <a:pPr>
-              <a:defRPr sz="1100" b="0">
-                <a:solidFill>
-                  <a:srgbClr val="1F2328"/>
-                </a:solidFill>
-              </a:defRPr>
-            </a:pPr>
-            <a:r>
-              <a:t>[6] CoW Protocol — Batch Auction MEV 保护</a:t>
+              <a:defRPr sz="1000" b="0">
+                <a:solidFill>
+                  <a:srgbClr val="1F2328"/>
+                </a:solidFill>
+              </a:defRPr>
+            </a:pPr>
+            <a:r>
+              <a:t>[6] ERC-7683: Cross Chain Intents. Ethereum Magicians, 2024.</a:t>
             </a:r>
           </a:p>
         </p:txBody>
@@ -5415,8 +5410,8 @@
         </p:nvSpPr>
         <p:spPr>
           <a:xfrm>
-            <a:off x="571500" y="3110000"/>
-            <a:ext cx="11049000" cy="320000"/>
+            <a:off x="571500" y="2790000"/>
+            <a:ext cx="11049000" cy="310000"/>
           </a:xfrm>
           <a:prstGeom prst="rect">
             <a:avLst/>
@@ -5449,7 +5444,6 @@
           <a:lstStyle/>
           <a:p>
             <a:pPr algn="ctr"/>
-            <a:endParaRPr/>
           </a:p>
         </p:txBody>
       </p:sp>
@@ -5461,8 +5455,8 @@
         </p:nvSpPr>
         <p:spPr>
           <a:xfrm>
-            <a:off x="691500" y="3170000"/>
-            <a:ext cx="10809000" cy="200000"/>
+            <a:off x="651500" y="2850000"/>
+            <a:ext cx="10889000" cy="200000"/>
           </a:xfrm>
           <a:prstGeom prst="rect">
             <a:avLst/>
@@ -5476,14 +5470,14 @@
           <a:lstStyle/>
           <a:p>
             <a:pPr>
-              <a:defRPr sz="1100" b="0">
-                <a:solidFill>
-                  <a:srgbClr val="1F2328"/>
-                </a:solidFill>
-              </a:defRPr>
-            </a:pPr>
-            <a:r>
-              <a:t>[7] 1inch Fusion — RFQ 无 Gas 交换</a:t>
+              <a:defRPr sz="1000" b="0">
+                <a:solidFill>
+                  <a:srgbClr val="1F2328"/>
+                </a:solidFill>
+              </a:defRPr>
+            </a:pPr>
+            <a:r>
+              <a:t>[7] ERC-8004: Trustless Agents. Ethereum Magicians, 2025.</a:t>
             </a:r>
           </a:p>
         </p:txBody>
@@ -5496,8 +5490,8 @@
         </p:nvSpPr>
         <p:spPr>
           <a:xfrm>
-            <a:off x="571500" y="3470000"/>
-            <a:ext cx="11049000" cy="320000"/>
+            <a:off x="571500" y="3130000"/>
+            <a:ext cx="11049000" cy="310000"/>
           </a:xfrm>
           <a:prstGeom prst="rect">
             <a:avLst/>
@@ -5530,7 +5524,6 @@
           <a:lstStyle/>
           <a:p>
             <a:pPr algn="ctr"/>
-            <a:endParaRPr/>
           </a:p>
         </p:txBody>
       </p:sp>
@@ -5542,8 +5535,8 @@
         </p:nvSpPr>
         <p:spPr>
           <a:xfrm>
-            <a:off x="691500" y="3530000"/>
-            <a:ext cx="10809000" cy="200000"/>
+            <a:off x="651500" y="3190000"/>
+            <a:ext cx="10889000" cy="200000"/>
           </a:xfrm>
           <a:prstGeom prst="rect">
             <a:avLst/>
@@ -5557,14 +5550,14 @@
           <a:lstStyle/>
           <a:p>
             <a:pPr>
-              <a:defRPr sz="1100" b="0">
-                <a:solidFill>
-                  <a:srgbClr val="1F2328"/>
-                </a:solidFill>
-              </a:defRPr>
-            </a:pPr>
-            <a:r>
-              <a:t>[8] Blowfish — Transaction Simulation</a:t>
+              <a:defRPr sz="1000" b="0">
+                <a:solidFill>
+                  <a:srgbClr val="1F2328"/>
+                </a:solidFill>
+              </a:defRPr>
+            </a:pPr>
+            <a:r>
+              <a:t>[8] ERC-8211: Smart Batching. Ethereum Magicians, 2025.</a:t>
             </a:r>
           </a:p>
         </p:txBody>
@@ -5577,8 +5570,8 @@
         </p:nvSpPr>
         <p:spPr>
           <a:xfrm>
-            <a:off x="571500" y="3830000"/>
-            <a:ext cx="11049000" cy="320000"/>
+            <a:off x="571500" y="3470000"/>
+            <a:ext cx="11049000" cy="310000"/>
           </a:xfrm>
           <a:prstGeom prst="rect">
             <a:avLst/>
@@ -5611,7 +5604,6 @@
           <a:lstStyle/>
           <a:p>
             <a:pPr algn="ctr"/>
-            <a:endParaRPr/>
           </a:p>
         </p:txBody>
       </p:sp>
@@ -5623,8 +5615,8 @@
         </p:nvSpPr>
         <p:spPr>
           <a:xfrm>
-            <a:off x="691500" y="3890000"/>
-            <a:ext cx="10809000" cy="200000"/>
+            <a:off x="651500" y="3530000"/>
+            <a:ext cx="10889000" cy="200000"/>
           </a:xfrm>
           <a:prstGeom prst="rect">
             <a:avLst/>
@@ -5638,14 +5630,14 @@
           <a:lstStyle/>
           <a:p>
             <a:pPr>
-              <a:defRPr sz="1100" b="0">
-                <a:solidFill>
-                  <a:srgbClr val="1F2328"/>
-                </a:solidFill>
-              </a:defRPr>
-            </a:pPr>
-            <a:r>
-              <a:t>[9] ElizaOS (elizaOS/eliza) — 18.6k ⭐</a:t>
+              <a:defRPr sz="1000" b="0">
+                <a:solidFill>
+                  <a:srgbClr val="1F2328"/>
+                </a:solidFill>
+              </a:defRPr>
+            </a:pPr>
+            <a:r>
+              <a:t>[9] UniswapX: Dutch Auction Based Cross-Chain Swaps. uniswap.org, 2024.</a:t>
             </a:r>
           </a:p>
         </p:txBody>
@@ -5658,8 +5650,8 @@
         </p:nvSpPr>
         <p:spPr>
           <a:xfrm>
-            <a:off x="571500" y="4190000"/>
-            <a:ext cx="11049000" cy="320000"/>
+            <a:off x="571500" y="3810000"/>
+            <a:ext cx="11049000" cy="310000"/>
           </a:xfrm>
           <a:prstGeom prst="rect">
             <a:avLst/>
@@ -5692,7 +5684,6 @@
           <a:lstStyle/>
           <a:p>
             <a:pPr algn="ctr"/>
-            <a:endParaRPr/>
           </a:p>
         </p:txBody>
       </p:sp>
@@ -5704,8 +5695,8 @@
         </p:nvSpPr>
         <p:spPr>
           <a:xfrm>
-            <a:off x="691500" y="4250000"/>
-            <a:ext cx="10809000" cy="200000"/>
+            <a:off x="651500" y="3870000"/>
+            <a:ext cx="10889000" cy="200000"/>
           </a:xfrm>
           <a:prstGeom prst="rect">
             <a:avLst/>
@@ -5719,28 +5710,73 @@
           <a:lstStyle/>
           <a:p>
             <a:pPr>
-              <a:defRPr sz="1100" b="0">
-                <a:solidFill>
-                  <a:srgbClr val="1F2328"/>
-                </a:solidFill>
-              </a:defRPr>
-            </a:pPr>
-            <a:r>
-              <a:t>[10] Fetch.ai uAgents — 1.6k ⭐</a:t>
-            </a:r>
-          </a:p>
-        </p:txBody>
-      </p:sp>
-      <p:sp>
-        <p:nvSpPr>
-          <p:cNvPr id="23" name="TextBox 22"/>
+              <a:defRPr sz="1000" b="0">
+                <a:solidFill>
+                  <a:srgbClr val="1F2328"/>
+                </a:solidFill>
+              </a:defRPr>
+            </a:pPr>
+            <a:r>
+              <a:t>[10] CoW Protocol: Batch Auction for MEV-Protected Trading. cow.fi, 2023.</a:t>
+            </a:r>
+          </a:p>
+        </p:txBody>
+      </p:sp>
+      <p:sp>
+        <p:nvSpPr>
+          <p:cNvPr id="23" name="Rectangle 22"/>
+          <p:cNvSpPr/>
+          <p:nvPr/>
+        </p:nvSpPr>
+        <p:spPr>
+          <a:xfrm>
+            <a:off x="571500" y="4150000"/>
+            <a:ext cx="11049000" cy="310000"/>
+          </a:xfrm>
+          <a:prstGeom prst="rect">
+            <a:avLst/>
+          </a:prstGeom>
+          <a:solidFill>
+            <a:srgbClr val="F6F8FA"/>
+          </a:solidFill>
+          <a:ln w="6350">
+            <a:solidFill>
+              <a:srgbClr val="E1E4E8"/>
+            </a:solidFill>
+          </a:ln>
+        </p:spPr>
+        <p:style>
+          <a:lnRef idx="1">
+            <a:schemeClr val="accent1"/>
+          </a:lnRef>
+          <a:fillRef idx="3">
+            <a:schemeClr val="accent1"/>
+          </a:fillRef>
+          <a:effectRef idx="2">
+            <a:schemeClr val="accent1"/>
+          </a:effectRef>
+          <a:fontRef idx="minor">
+            <a:schemeClr val="lt1"/>
+          </a:fontRef>
+        </p:style>
+        <p:txBody>
+          <a:bodyPr rtlCol="0" anchor="ctr"/>
+          <a:lstStyle/>
+          <a:p>
+            <a:pPr algn="ctr"/>
+          </a:p>
+        </p:txBody>
+      </p:sp>
+      <p:sp>
+        <p:nvSpPr>
+          <p:cNvPr id="24" name="TextBox 23"/>
           <p:cNvSpPr txBox="1"/>
           <p:nvPr/>
         </p:nvSpPr>
         <p:spPr>
           <a:xfrm>
-            <a:off x="571500" y="6000000"/>
-            <a:ext cx="11049000" cy="250000"/>
+            <a:off x="651500" y="4210000"/>
+            <a:ext cx="10889000" cy="200000"/>
           </a:xfrm>
           <a:prstGeom prst="rect">
             <a:avLst/>
@@ -5754,6 +5790,361 @@
           <a:lstStyle/>
           <a:p>
             <a:pPr>
+              <a:defRPr sz="1000" b="0">
+                <a:solidFill>
+                  <a:srgbClr val="1F2328"/>
+                </a:solidFill>
+              </a:defRPr>
+            </a:pPr>
+            <a:r>
+              <a:t>[11] 1inch Fusion: RFQ-Based Gasless Swaps. 1inch.io, 2024.</a:t>
+            </a:r>
+          </a:p>
+        </p:txBody>
+      </p:sp>
+      <p:sp>
+        <p:nvSpPr>
+          <p:cNvPr id="25" name="Rectangle 24"/>
+          <p:cNvSpPr/>
+          <p:nvPr/>
+        </p:nvSpPr>
+        <p:spPr>
+          <a:xfrm>
+            <a:off x="571500" y="4490000"/>
+            <a:ext cx="11049000" cy="310000"/>
+          </a:xfrm>
+          <a:prstGeom prst="rect">
+            <a:avLst/>
+          </a:prstGeom>
+          <a:solidFill>
+            <a:srgbClr val="FFFFFF"/>
+          </a:solidFill>
+          <a:ln w="6350">
+            <a:solidFill>
+              <a:srgbClr val="E1E4E8"/>
+            </a:solidFill>
+          </a:ln>
+        </p:spPr>
+        <p:style>
+          <a:lnRef idx="1">
+            <a:schemeClr val="accent1"/>
+          </a:lnRef>
+          <a:fillRef idx="3">
+            <a:schemeClr val="accent1"/>
+          </a:fillRef>
+          <a:effectRef idx="2">
+            <a:schemeClr val="accent1"/>
+          </a:effectRef>
+          <a:fontRef idx="minor">
+            <a:schemeClr val="lt1"/>
+          </a:fontRef>
+        </p:style>
+        <p:txBody>
+          <a:bodyPr rtlCol="0" anchor="ctr"/>
+          <a:lstStyle/>
+          <a:p>
+            <a:pPr algn="ctr"/>
+          </a:p>
+        </p:txBody>
+      </p:sp>
+      <p:sp>
+        <p:nvSpPr>
+          <p:cNvPr id="26" name="TextBox 25"/>
+          <p:cNvSpPr txBox="1"/>
+          <p:nvPr/>
+        </p:nvSpPr>
+        <p:spPr>
+          <a:xfrm>
+            <a:off x="651500" y="4550000"/>
+            <a:ext cx="10889000" cy="200000"/>
+          </a:xfrm>
+          <a:prstGeom prst="rect">
+            <a:avLst/>
+          </a:prstGeom>
+          <a:noFill/>
+        </p:spPr>
+        <p:txBody>
+          <a:bodyPr wrap="square">
+            <a:spAutoFit/>
+          </a:bodyPr>
+          <a:lstStyle/>
+          <a:p>
+            <a:pPr>
+              <a:defRPr sz="1000" b="0">
+                <a:solidFill>
+                  <a:srgbClr val="1F2328"/>
+                </a:solidFill>
+              </a:defRPr>
+            </a:pPr>
+            <a:r>
+              <a:t>[12] Across Protocol: Optimistic Cross-Chain Filling. across.to, 2023.</a:t>
+            </a:r>
+          </a:p>
+        </p:txBody>
+      </p:sp>
+      <p:sp>
+        <p:nvSpPr>
+          <p:cNvPr id="27" name="Rectangle 26"/>
+          <p:cNvSpPr/>
+          <p:nvPr/>
+        </p:nvSpPr>
+        <p:spPr>
+          <a:xfrm>
+            <a:off x="571500" y="4830000"/>
+            <a:ext cx="11049000" cy="310000"/>
+          </a:xfrm>
+          <a:prstGeom prst="rect">
+            <a:avLst/>
+          </a:prstGeom>
+          <a:solidFill>
+            <a:srgbClr val="F6F8FA"/>
+          </a:solidFill>
+          <a:ln w="6350">
+            <a:solidFill>
+              <a:srgbClr val="E1E4E8"/>
+            </a:solidFill>
+          </a:ln>
+        </p:spPr>
+        <p:style>
+          <a:lnRef idx="1">
+            <a:schemeClr val="accent1"/>
+          </a:lnRef>
+          <a:fillRef idx="3">
+            <a:schemeClr val="accent1"/>
+          </a:fillRef>
+          <a:effectRef idx="2">
+            <a:schemeClr val="accent1"/>
+          </a:effectRef>
+          <a:fontRef idx="minor">
+            <a:schemeClr val="lt1"/>
+          </a:fontRef>
+        </p:style>
+        <p:txBody>
+          <a:bodyPr rtlCol="0" anchor="ctr"/>
+          <a:lstStyle/>
+          <a:p>
+            <a:pPr algn="ctr"/>
+          </a:p>
+        </p:txBody>
+      </p:sp>
+      <p:sp>
+        <p:nvSpPr>
+          <p:cNvPr id="28" name="TextBox 27"/>
+          <p:cNvSpPr txBox="1"/>
+          <p:nvPr/>
+        </p:nvSpPr>
+        <p:spPr>
+          <a:xfrm>
+            <a:off x="651500" y="4890000"/>
+            <a:ext cx="10889000" cy="200000"/>
+          </a:xfrm>
+          <a:prstGeom prst="rect">
+            <a:avLst/>
+          </a:prstGeom>
+          <a:noFill/>
+        </p:spPr>
+        <p:txBody>
+          <a:bodyPr wrap="square">
+            <a:spAutoFit/>
+          </a:bodyPr>
+          <a:lstStyle/>
+          <a:p>
+            <a:pPr>
+              <a:defRPr sz="1000" b="0">
+                <a:solidFill>
+                  <a:srgbClr val="1F2328"/>
+                </a:solidFill>
+              </a:defRPr>
+            </a:pPr>
+            <a:r>
+              <a:t>[13] Blowfish: Transaction Simulation and Security. blowfish.xyz, 2023.</a:t>
+            </a:r>
+          </a:p>
+        </p:txBody>
+      </p:sp>
+      <p:sp>
+        <p:nvSpPr>
+          <p:cNvPr id="29" name="Rectangle 28"/>
+          <p:cNvSpPr/>
+          <p:nvPr/>
+        </p:nvSpPr>
+        <p:spPr>
+          <a:xfrm>
+            <a:off x="571500" y="5170000"/>
+            <a:ext cx="11049000" cy="310000"/>
+          </a:xfrm>
+          <a:prstGeom prst="rect">
+            <a:avLst/>
+          </a:prstGeom>
+          <a:solidFill>
+            <a:srgbClr val="FFFFFF"/>
+          </a:solidFill>
+          <a:ln w="6350">
+            <a:solidFill>
+              <a:srgbClr val="E1E4E8"/>
+            </a:solidFill>
+          </a:ln>
+        </p:spPr>
+        <p:style>
+          <a:lnRef idx="1">
+            <a:schemeClr val="accent1"/>
+          </a:lnRef>
+          <a:fillRef idx="3">
+            <a:schemeClr val="accent1"/>
+          </a:fillRef>
+          <a:effectRef idx="2">
+            <a:schemeClr val="accent1"/>
+          </a:effectRef>
+          <a:fontRef idx="minor">
+            <a:schemeClr val="lt1"/>
+          </a:fontRef>
+        </p:style>
+        <p:txBody>
+          <a:bodyPr rtlCol="0" anchor="ctr"/>
+          <a:lstStyle/>
+          <a:p>
+            <a:pPr algn="ctr"/>
+          </a:p>
+        </p:txBody>
+      </p:sp>
+      <p:sp>
+        <p:nvSpPr>
+          <p:cNvPr id="30" name="TextBox 29"/>
+          <p:cNvSpPr txBox="1"/>
+          <p:nvPr/>
+        </p:nvSpPr>
+        <p:spPr>
+          <a:xfrm>
+            <a:off x="651500" y="5230000"/>
+            <a:ext cx="10889000" cy="200000"/>
+          </a:xfrm>
+          <a:prstGeom prst="rect">
+            <a:avLst/>
+          </a:prstGeom>
+          <a:noFill/>
+        </p:spPr>
+        <p:txBody>
+          <a:bodyPr wrap="square">
+            <a:spAutoFit/>
+          </a:bodyPr>
+          <a:lstStyle/>
+          <a:p>
+            <a:pPr>
+              <a:defRPr sz="1000" b="0">
+                <a:solidFill>
+                  <a:srgbClr val="1F2328"/>
+                </a:solidFill>
+              </a:defRPr>
+            </a:pPr>
+            <a:r>
+              <a:t>[14] ElizaOS: Open Source AI Agent Operating System. github.com/elizaOS/eliza, 2025.</a:t>
+            </a:r>
+          </a:p>
+        </p:txBody>
+      </p:sp>
+      <p:sp>
+        <p:nvSpPr>
+          <p:cNvPr id="31" name="Rectangle 30"/>
+          <p:cNvSpPr/>
+          <p:nvPr/>
+        </p:nvSpPr>
+        <p:spPr>
+          <a:xfrm>
+            <a:off x="571500" y="5510000"/>
+            <a:ext cx="11049000" cy="310000"/>
+          </a:xfrm>
+          <a:prstGeom prst="rect">
+            <a:avLst/>
+          </a:prstGeom>
+          <a:solidFill>
+            <a:srgbClr val="F6F8FA"/>
+          </a:solidFill>
+          <a:ln w="6350">
+            <a:solidFill>
+              <a:srgbClr val="E1E4E8"/>
+            </a:solidFill>
+          </a:ln>
+        </p:spPr>
+        <p:style>
+          <a:lnRef idx="1">
+            <a:schemeClr val="accent1"/>
+          </a:lnRef>
+          <a:fillRef idx="3">
+            <a:schemeClr val="accent1"/>
+          </a:fillRef>
+          <a:effectRef idx="2">
+            <a:schemeClr val="accent1"/>
+          </a:effectRef>
+          <a:fontRef idx="minor">
+            <a:schemeClr val="lt1"/>
+          </a:fontRef>
+        </p:style>
+        <p:txBody>
+          <a:bodyPr rtlCol="0" anchor="ctr"/>
+          <a:lstStyle/>
+          <a:p>
+            <a:pPr algn="ctr"/>
+          </a:p>
+        </p:txBody>
+      </p:sp>
+      <p:sp>
+        <p:nvSpPr>
+          <p:cNvPr id="32" name="TextBox 31"/>
+          <p:cNvSpPr txBox="1"/>
+          <p:nvPr/>
+        </p:nvSpPr>
+        <p:spPr>
+          <a:xfrm>
+            <a:off x="651500" y="5570000"/>
+            <a:ext cx="10889000" cy="200000"/>
+          </a:xfrm>
+          <a:prstGeom prst="rect">
+            <a:avLst/>
+          </a:prstGeom>
+          <a:noFill/>
+        </p:spPr>
+        <p:txBody>
+          <a:bodyPr wrap="square">
+            <a:spAutoFit/>
+          </a:bodyPr>
+          <a:lstStyle/>
+          <a:p>
+            <a:pPr>
+              <a:defRPr sz="1000" b="0">
+                <a:solidFill>
+                  <a:srgbClr val="1F2328"/>
+                </a:solidFill>
+              </a:defRPr>
+            </a:pPr>
+            <a:r>
+              <a:t>[15] Fetch.ai uAgents: Decentralized Agent Framework. github.com/fetchai/uAgents, 2024.</a:t>
+            </a:r>
+          </a:p>
+        </p:txBody>
+      </p:sp>
+      <p:sp>
+        <p:nvSpPr>
+          <p:cNvPr id="33" name="TextBox 32"/>
+          <p:cNvSpPr txBox="1"/>
+          <p:nvPr/>
+        </p:nvSpPr>
+        <p:spPr>
+          <a:xfrm>
+            <a:off x="571500" y="6100000"/>
+            <a:ext cx="11049000" cy="250000"/>
+          </a:xfrm>
+          <a:prstGeom prst="rect">
+            <a:avLst/>
+          </a:prstGeom>
+          <a:noFill/>
+        </p:spPr>
+        <p:txBody>
+          <a:bodyPr wrap="square">
+            <a:spAutoFit/>
+          </a:bodyPr>
+          <a:lstStyle/>
+          <a:p>
+            <a:pPr>
               <a:defRPr sz="900" b="0">
                 <a:solidFill>
                   <a:srgbClr val="656D76"/>
@@ -5761,7 +6152,7 @@
               </a:defRPr>
             </a:pPr>
             <a:r>
-              <a:t>更多资料: docs/ 目录下含完整分析文档</a:t>
+              <a:t>docs/ 目录下含完整分析文档  |  github.com/laserBea/chiron</a:t>
             </a:r>
           </a:p>
         </p:txBody>
@@ -5775,7 +6166,7 @@
 </file>
 
 <file path=ppt/slides/slide13.xml><?xml version="1.0" encoding="utf-8"?>
-<p:sld xmlns:a="http://schemas.openxmlformats.org/drawingml/2006/main" xmlns:r="http://schemas.openxmlformats.org/officeDocument/2006/relationships" xmlns:p="http://schemas.openxmlformats.org/presentationml/2006/main">
+<p:sld xmlns:a="http://schemas.openxmlformats.org/drawingml/2006/main" xmlns:p="http://schemas.openxmlformats.org/presentationml/2006/main" xmlns:r="http://schemas.openxmlformats.org/officeDocument/2006/relationships">
   <p:cSld>
     <p:spTree>
       <p:nvGrpSpPr>
@@ -5783,14 +6174,7 @@
         <p:cNvGrpSpPr/>
         <p:nvPr/>
       </p:nvGrpSpPr>
-      <p:grpSpPr>
-        <a:xfrm>
-          <a:off x="0" y="0"/>
-          <a:ext cx="0" cy="0"/>
-          <a:chOff x="0" y="0"/>
-          <a:chExt cx="0" cy="0"/>
-        </a:xfrm>
-      </p:grpSpPr>
+      <p:grpSpPr/>
       <p:sp>
         <p:nvSpPr>
           <p:cNvPr id="2" name="TextBox 1"/>
@@ -5808,7 +6192,7 @@
           <a:noFill/>
         </p:spPr>
         <p:txBody>
-          <a:bodyPr wrap="square">
+          <a:bodyPr wrap="none">
             <a:spAutoFit/>
           </a:bodyPr>
           <a:lstStyle/>
@@ -5843,13 +6227,13 @@
           <a:noFill/>
         </p:spPr>
         <p:txBody>
-          <a:bodyPr wrap="square">
+          <a:bodyPr wrap="none">
             <a:spAutoFit/>
           </a:bodyPr>
           <a:lstStyle/>
           <a:p>
             <a:pPr>
-              <a:defRPr sz="2000" b="0">
+              <a:defRPr sz="2000">
                 <a:solidFill>
                   <a:srgbClr val="656D76"/>
                 </a:solidFill>
@@ -5878,15 +6262,15 @@
           <a:noFill/>
         </p:spPr>
         <p:txBody>
-          <a:bodyPr wrap="square">
+          <a:bodyPr wrap="none">
             <a:spAutoFit/>
           </a:bodyPr>
           <a:lstStyle/>
           <a:p>
             <a:pPr>
-              <a:defRPr sz="1600" b="0">
-                <a:solidFill>
-                  <a:srgbClr val="656D76"/>
+              <a:defRPr sz="1600">
+                <a:solidFill>
+                  <a:srgbClr val="0969DA"/>
                 </a:solidFill>
               </a:defRPr>
             </a:pPr>
@@ -6953,6 +7337,10 @@
             <a:avLst/>
           </a:prstGeom>
         </p:spPr>
+        <p:txBody>
+          <a:bodyPr/>
+          <a:p/>
+        </p:txBody>
       </p:sp>
       <p:sp>
         <p:nvSpPr>
@@ -7808,6 +8196,10 @@
             <a:avLst/>
           </a:prstGeom>
         </p:spPr>
+        <p:txBody>
+          <a:bodyPr/>
+          <a:p/>
+        </p:txBody>
       </p:sp>
       <p:sp>
         <p:nvSpPr>
@@ -8618,6 +9010,10 @@
             <a:avLst/>
           </a:prstGeom>
         </p:spPr>
+        <p:txBody>
+          <a:bodyPr/>
+          <a:p/>
+        </p:txBody>
       </p:sp>
       <p:sp>
         <p:nvSpPr>
@@ -9422,6 +9818,10 @@
             <a:avLst/>
           </a:prstGeom>
         </p:spPr>
+        <p:txBody>
+          <a:bodyPr/>
+          <a:p/>
+        </p:txBody>
       </p:sp>
       <p:sp>
         <p:nvSpPr>
@@ -10266,6 +10666,10 @@
             <a:avLst/>
           </a:prstGeom>
         </p:spPr>
+        <p:txBody>
+          <a:bodyPr/>
+          <a:p/>
+        </p:txBody>
       </p:sp>
       <p:sp>
         <p:nvSpPr>
@@ -11388,6 +11792,10 @@
             <a:avLst/>
           </a:prstGeom>
         </p:spPr>
+        <p:txBody>
+          <a:bodyPr/>
+          <a:p/>
+        </p:txBody>
       </p:sp>
       <p:sp>
         <p:nvSpPr>
